--- a/docs/HK-presentation.pptx
+++ b/docs/HK-presentation.pptx
@@ -513,7 +513,7 @@
           <a:p>
             <a:r>
               <a:rPr lang="en-US" dirty="0"/>
-              <a:t>שקט. משפט אחד: "אני רוצה להראות לך למה אתה תקוע על עשרה לקוחות — ומה קורה כשזה נעלם." ואז השאלה: כמה מהשבוע האחרון שלך היה באמת ייעוץ?</a:t>
+              <a:t>פתיחה עניינית: "אני אעבור איתך על המערכת — מה יש בה, איך זה עובד, ומה זה נותן לך. בסוף נדבר על איך מתחילים." בלי הבטחות בפתיחה.</a:t>
             </a:r>
             <a:endParaRPr lang="en-US" dirty="0"/>
           </a:p>
@@ -601,7 +601,7 @@
           <a:p>
             <a:r>
               <a:rPr lang="en-US" dirty="0"/>
-              <a:t>יועצים חוששים ש-AI ימציא מספרים — להפריד חד: ה-AI רק מסווג שמות וממפה מבנה; חיבור הכסף רץ בקוד עם בדיקות ביקורת. חריגה נראית בתחזית לפני שהיא קורית, והלקוח רואה את התכנון לקריאה בלבד.</a:t>
+              <a:t>לעבור מהר — זה לא ליבת הפגישה. המסר: השיטה מוגדרת ברמת המשרד, כך שיועץ חדש נכנס לשיטה קיימת ולא ממציא אותה מחדש.</a:t>
             </a:r>
             <a:endParaRPr lang="en-US" dirty="0"/>
           </a:p>
@@ -689,7 +689,7 @@
           <a:p>
             <a:r>
               <a:rPr lang="en-US" dirty="0"/>
-              <a:t>לעבור מהר — עשר שניות. המסר היחיד: יש כאן שכבת ניהול שלמה למשרד שגדל, והיא לא הנושא של הפגישה הזאת.</a:t>
+              <a:t>כאן לעצור ולעשות את החשבון על המספרים שלהם: כמה לקוחות יש להם, כמה שעות הם מעריכים שהתפעול לוקח, וכמה שווה שעה שלהם. המספר צריך לצאת מהם, לא ממני.</a:t>
             </a:r>
             <a:endParaRPr lang="en-US" dirty="0"/>
           </a:p>
@@ -777,7 +777,7 @@
           <a:p>
             <a:r>
               <a:rPr lang="en-US" dirty="0"/>
-              <a:t>לחזור למספר משקף 3 ולסגור עליו את המעגל. הבקשה קונקרטית וקטנה: לקוח אחד, חודש הרצה, בוחרים אותו עכשיו יחד. בלי התחייבות על כל התיק.</a:t>
+              <a:t>הבקשה קונקרטית וקטנה: לקוח אחד. אם אפשר — לבחור אותו יחד עכשיו, בפגישה. זה מה שהופך את הסיום להתחלה של משהו ולא לשאלה פתוחה.</a:t>
             </a:r>
             <a:endParaRPr lang="en-US" dirty="0"/>
           </a:p>
@@ -865,7 +865,7 @@
           <a:p>
             <a:r>
               <a:rPr lang="en-US" dirty="0"/>
-              <a:t>לתת להם לצחוק צחוק כואב. ואז: ההכנה לפגישה נעשית בתשע וחצי מהזיכרון, הסיכום נכתב בערב אם בכלל, ובין לבין אתה מקטלג תנועות בנק. בסוף החודש שני לקוחות נפלו בין הכיסאות — לא כי הם לא חשובים, כי לא היה זמן.</a:t>
+              <a:t>זה השקף שנותן להם את המפה. לומר: "אני אעבור על חמשת החלקים לפי הסדר הזה, ואראה לך כל אחד במערכת עצמה." אם הם עוצרים בשאלה על חלק מסוים — לקפוץ לשקף שלו.</a:t>
             </a:r>
             <a:endParaRPr lang="en-US" dirty="0"/>
           </a:p>
@@ -953,7 +953,7 @@
           <a:p>
             <a:r>
               <a:rPr lang="en-US" dirty="0"/>
-              <a:t>לעשות את החשבון בקול על המספרים שלהם: כמה לקוחות, כמה שעות פר לקוח, כמה שווה שעה שלהם. עם HK זה יורד ל-1–1.5 שעות פר לקוח — אותן 80 שעות מכסות 25–30 לקוחות. אם המספר הזה נכון אצלם, כל השאר הוא רק ה"איך".</a:t>
+              <a:t>להדגיש שזה שירות ולא פיצ׳ר — אדם שמפעיל מערכת. זה ההבדל מכל כלי תוכנה שהם מכירים. אם שואלים על הוואטסאפ: מנהל התזרים עונה ללקוח על תפעול שוטף בשם המשרד, ואליהם מגיע רק מה שדורש יועץ.</a:t>
             </a:r>
             <a:endParaRPr lang="en-US" dirty="0"/>
           </a:p>
@@ -1041,7 +1041,7 @@
           <a:p>
             <a:r>
               <a:rPr lang="en-US" dirty="0"/>
-              <a:t>זה שירות, לא פיצ׳ר — אדם שמפעיל מערכת, וזה מה שאף תוכנה לא מעתיקה. השלבים: קטגוריות, מוטבים, נגררות, הודעות לקוח, הזנות. הבדיקות: שורה תקציבית, דוח חודשי מול הבנקים בסבילות 300 ש"ח, תקציבי, חומר, שינויים. והוואטסאפ? מנהל התזרים עונה ללקוח כל יום — אליך מגיע רק מה שדורש יועץ.</a:t>
+              <a:t>להראות קטגוריה אחת פתוחה. ולומר בכנות: אחרי שנה של עבודה הזיכרון הוא נכס של המשרד שלהם ואין לו תחליף — ולכן הוא נשמר בטקסט קריא ולא בקופסה שחורה.</a:t>
             </a:r>
             <a:endParaRPr lang="en-US" dirty="0"/>
           </a:p>
@@ -1129,7 +1129,7 @@
           <a:p>
             <a:r>
               <a:rPr lang="en-US" dirty="0"/>
-              <a:t>יועץ עם 25 לקוחות לא זוכר מה כואב לכל אחד — המערכת זוכרת ומזכירה לפני הפגישה, לא אחריה. מה שפנימי נשאר פנימי: הלקוח לא רואה את מה שנכתב עליו. וכאן אני אומר בגלוי: אחרי שנה, לזיכרון הזה אין תחליף בשום מקום.</a:t>
+              <a:t>לסנן לקוח אחד ולהראות. הנקודה: השאלה של יועץ היא "מה קורה עם הלקוח הזה", ולכן זה מסך אחד ולא ארבעה. שיחה בלי שיוך לחברה לא מתומללת בכלל.</a:t>
             </a:r>
             <a:endParaRPr lang="en-US" dirty="0"/>
           </a:p>
@@ -1217,7 +1217,7 @@
           <a:p>
             <a:r>
               <a:rPr lang="en-US" dirty="0"/>
-              <a:t>לסנן לקוח אחד ולהראות איך הכל נופל למקום. השאלה של יועץ היא "מה קורה עם הלקוח הזה" — לא "אילו פגישות היו". ג׳וב לילי סוגר כל יום לבד: מסכם את הקבוצות ואת הצ׳אטים, מעדכן את הזיכרון.</a:t>
+              <a:t>להקריא את ההנחיה האישית מהמסך — היא באה מקטגוריית סגנון התקשורת בזיכרון. אם יש זמן: להראות את מסך הפגישה אחרי.</a:t>
             </a:r>
             <a:endParaRPr lang="en-US" dirty="0"/>
           </a:p>
@@ -1305,7 +1305,7 @@
           <a:p>
             <a:r>
               <a:rPr lang="en-US" dirty="0"/>
-              <a:t>להקריא את ההנחיה האישית מהמסך. זה הרגע שבו יועצים מבינים שהמערכת מכירה את הלקוח, לא מתייקת אותו. ואחרי הפגישה: סיכום, משימות ועדכוני זיכרון — מוכנים לאישור. שעה וחצי פר פגישה יורדת לדקות.</a:t>
+              <a:t>החלק שאין לו מקבילה בשוק — לומר עניינית ולא כהתפארות: רוב הכלים מודדים את הלקוח; כאן יש גם משוב על עבודת היועץ.</a:t>
             </a:r>
             <a:endParaRPr lang="en-US" dirty="0"/>
           </a:p>
@@ -1393,7 +1393,7 @@
           <a:p>
             <a:r>
               <a:rPr lang="en-US" dirty="0"/>
-              <a:t>לעצור כאן. כל מערכת אחרת מודדת את הלקוח — זו היחידה שעוזרת ליועץ עצמו להשתפר מפגישה לפגישה. אפשר להראות את המסך אם שואלים (יש בגיבוי), אבל המשפט חזק יותר מהצילום.</a:t>
+              <a:t>ההפרדה חשובה ליועצים: ה-AI מסווג שמות וממפה מבנה בלבד; כל חיבור של סכומים רץ בקוד דטרמיניסטי עם בדיקות ביקורת. זה מה שמאפשר להציג את הדוח ללקוח בלי לבדוק אותו שורה־שורה.</a:t>
             </a:r>
             <a:endParaRPr lang="en-US" dirty="0"/>
           </a:p>
@@ -1481,7 +1481,7 @@
           <a:p>
             <a:r>
               <a:rPr lang="en-US" dirty="0"/>
-              <a:t>שקף השימור: לקוח שעוזב כמעט אף פעם לא עוזב בגלל ייעוץ גרוע — הוא עוזב כי הרגיש נטוש בין פגישות. כאן הוא מרגיש מטופל כל בוקר. white-label מלא, כולל שם הבוט. סיפור אמיתי: אחרי התראת חריגה הלקוח שאל את העוזר "מה זאת אומרת חריגה?" — וזה הפך למשימה ליועץ ולשורת זיכרון.</a:t>
+              <a:t>סיפור אמיתי מהמערכת: אחרי התראת חריגה הלקוח שאל את העוזר "מה זאת אומרת חריגה?" — וזה הפך למשימה ליועץ ולשורת זיכרון. מה שהלקוח שואל מגלה מה מטריד אותו.</a:t>
             </a:r>
             <a:endParaRPr lang="en-US" dirty="0"/>
           </a:p>
@@ -1862,24 +1862,24 @@
         </p:nvSpPr>
         <p:spPr>
           <a:xfrm>
-            <a:off x="685800" y="1371600"/>
-            <a:ext cx="10820095" cy="365760"/>
-          </a:xfrm>
-          <a:prstGeom prst="rect">
-            <a:avLst/>
-          </a:prstGeom>
-          <a:noFill/>
-          <a:ln/>
-        </p:spPr>
-        <p:txBody>
-          <a:bodyPr wrap="square" lIns="0" tIns="0" rIns="0" bIns="0" rtlCol="0" anchor="ctr"/>
-          <a:lstStyle/>
-          <a:p>
-            <a:pPr rtl="1" algn="r" indent="0" marL="0">
-              <a:buNone/>
-            </a:pPr>
-            <a:r>
-              <a:rPr lang="en-US" sz="1500" spc="200" kern="0" dirty="0">
+            <a:off x="658368" y="1691640"/>
+            <a:ext cx="10874959" cy="384048"/>
+          </a:xfrm>
+          <a:prstGeom prst="rect">
+            <a:avLst/>
+          </a:prstGeom>
+          <a:noFill/>
+          <a:ln/>
+        </p:spPr>
+        <p:txBody>
+          <a:bodyPr wrap="square" lIns="0" tIns="0" rIns="0" bIns="0" rtlCol="0" anchor="ctr"/>
+          <a:lstStyle/>
+          <a:p>
+            <a:pPr rtl="1" algn="r" indent="0" marL="0">
+              <a:buNone/>
+            </a:pPr>
+            <a:r>
+              <a:rPr lang="en-US" sz="1900" b="1" spc="400" kern="0" dirty="0">
                 <a:solidFill>
                   <a:srgbClr val="39ABE2"/>
                 </a:solidFill>
@@ -1887,9 +1887,9 @@
                 <a:ea typeface="Arial" pitchFamily="34" charset="-122"/>
                 <a:cs typeface="Arial" pitchFamily="34" charset="-120"/>
               </a:rPr>
-              <a:t>HK · מערכת ליועצים עסקיים</a:t>
-            </a:r>
-            <a:endParaRPr lang="en-US" sz="1500" dirty="0"/>
+              <a:t>HK</a:t>
+            </a:r>
+            <a:endParaRPr lang="en-US" sz="1900" dirty="0"/>
           </a:p>
         </p:txBody>
       </p:sp>
@@ -1901,24 +1901,27 @@
         </p:nvSpPr>
         <p:spPr>
           <a:xfrm>
-            <a:off x="685800" y="2148840"/>
-            <a:ext cx="10820095" cy="1737360"/>
-          </a:xfrm>
-          <a:prstGeom prst="rect">
-            <a:avLst/>
-          </a:prstGeom>
-          <a:noFill/>
-          <a:ln/>
-        </p:spPr>
-        <p:txBody>
-          <a:bodyPr wrap="square" lIns="0" tIns="0" rIns="0" bIns="0" rtlCol="0" anchor="ctr"/>
-          <a:lstStyle/>
-          <a:p>
-            <a:pPr rtl="1" algn="r" indent="0" marL="0">
-              <a:buNone/>
-            </a:pPr>
-            <a:r>
-              <a:rPr lang="en-US" sz="8000" b="1" dirty="0">
+            <a:off x="658368" y="2240280"/>
+            <a:ext cx="10874959" cy="1920240"/>
+          </a:xfrm>
+          <a:prstGeom prst="rect">
+            <a:avLst/>
+          </a:prstGeom>
+          <a:noFill/>
+          <a:ln/>
+        </p:spPr>
+        <p:txBody>
+          <a:bodyPr wrap="square" lIns="0" tIns="0" rIns="0" bIns="0" rtlCol="0" anchor="ctr"/>
+          <a:lstStyle/>
+          <a:p>
+            <a:pPr rtl="1" algn="r" indent="0" marL="0">
+              <a:lnSpc>
+                <a:spcPct val="112000"/>
+              </a:lnSpc>
+              <a:buNone/>
+            </a:pPr>
+            <a:r>
+              <a:rPr lang="en-US" sz="5400" b="1" dirty="0">
                 <a:solidFill>
                   <a:srgbClr val="FFFFFF"/>
                 </a:solidFill>
@@ -1926,9 +1929,29 @@
                 <a:ea typeface="Arial" pitchFamily="34" charset="-122"/>
                 <a:cs typeface="Arial" pitchFamily="34" charset="-120"/>
               </a:rPr>
-              <a:t>מ־10 לקוחות ל־30.</a:t>
-            </a:r>
-            <a:endParaRPr lang="en-US" sz="8000" dirty="0"/>
+              <a:t>מערכת ניהול</a:t>
+            </a:r>
+            <a:endParaRPr lang="en-US" sz="5400" dirty="0"/>
+          </a:p>
+          <a:p>
+            <a:pPr rtl="1" algn="r" indent="0" marL="0">
+              <a:lnSpc>
+                <a:spcPct val="112000"/>
+              </a:lnSpc>
+              <a:buNone/>
+            </a:pPr>
+            <a:r>
+              <a:rPr lang="en-US" sz="5400" b="1" dirty="0">
+                <a:solidFill>
+                  <a:srgbClr val="FFFFFF"/>
+                </a:solidFill>
+                <a:latin typeface="Arial" pitchFamily="34" charset="0"/>
+                <a:ea typeface="Arial" pitchFamily="34" charset="-122"/>
+                <a:cs typeface="Arial" pitchFamily="34" charset="-120"/>
+              </a:rPr>
+              <a:t>ליועצים עסקיים</a:t>
+            </a:r>
+            <a:endParaRPr lang="en-US" sz="5400" dirty="0"/>
           </a:p>
         </p:txBody>
       </p:sp>
@@ -1940,24 +1963,27 @@
         </p:nvSpPr>
         <p:spPr>
           <a:xfrm>
-            <a:off x="685800" y="4114800"/>
-            <a:ext cx="10820095" cy="640080"/>
-          </a:xfrm>
-          <a:prstGeom prst="rect">
-            <a:avLst/>
-          </a:prstGeom>
-          <a:noFill/>
-          <a:ln/>
-        </p:spPr>
-        <p:txBody>
-          <a:bodyPr wrap="square" lIns="0" tIns="0" rIns="0" bIns="0" rtlCol="0" anchor="ctr"/>
-          <a:lstStyle/>
-          <a:p>
-            <a:pPr rtl="1" algn="r" indent="0" marL="0">
-              <a:buNone/>
-            </a:pPr>
-            <a:r>
-              <a:rPr lang="en-US" sz="2600" dirty="0">
+            <a:off x="658368" y="4389120"/>
+            <a:ext cx="7863840" cy="914400"/>
+          </a:xfrm>
+          <a:prstGeom prst="rect">
+            <a:avLst/>
+          </a:prstGeom>
+          <a:noFill/>
+          <a:ln/>
+        </p:spPr>
+        <p:txBody>
+          <a:bodyPr wrap="square" lIns="0" tIns="0" rIns="0" bIns="0" rtlCol="0" anchor="ctr"/>
+          <a:lstStyle/>
+          <a:p>
+            <a:pPr rtl="1" algn="r" indent="0" marL="0">
+              <a:lnSpc>
+                <a:spcPct val="140000"/>
+              </a:lnSpc>
+              <a:buNone/>
+            </a:pPr>
+            <a:r>
+              <a:rPr lang="en-US" sz="1600" dirty="0">
                 <a:solidFill>
                   <a:srgbClr val="9FC0DA"/>
                 </a:solidFill>
@@ -1965,9 +1991,9 @@
                 <a:ea typeface="Arial" pitchFamily="34" charset="-122"/>
                 <a:cs typeface="Arial" pitchFamily="34" charset="-120"/>
               </a:rPr>
-              <a:t>כל מה שאינו ייעוץ — יורד ממך.</a:t>
-            </a:r>
-            <a:endParaRPr lang="en-US" sz="2600" dirty="0"/>
+              <a:t>תפעול תזרים, זיכרון לקוח, תקשורת ודוחות פיננסיים — במערכת אחת, שהלקוח רואה בשם המשרד שלך.</a:t>
+            </a:r>
+            <a:endParaRPr lang="en-US" sz="1600" dirty="0"/>
           </a:p>
         </p:txBody>
       </p:sp>
@@ -2011,24 +2037,24 @@
         </p:nvSpPr>
         <p:spPr>
           <a:xfrm>
-            <a:off x="685800" y="384048"/>
-            <a:ext cx="10820095" cy="310896"/>
-          </a:xfrm>
-          <a:prstGeom prst="rect">
-            <a:avLst/>
-          </a:prstGeom>
-          <a:noFill/>
-          <a:ln/>
-        </p:spPr>
-        <p:txBody>
-          <a:bodyPr wrap="square" lIns="0" tIns="0" rIns="0" bIns="0" rtlCol="0" anchor="ctr"/>
-          <a:lstStyle/>
-          <a:p>
-            <a:pPr rtl="1" algn="r" indent="0" marL="0">
-              <a:buNone/>
-            </a:pPr>
-            <a:r>
-              <a:rPr lang="en-US" sz="1300" b="1" dirty="0">
+            <a:off x="658368" y="365760"/>
+            <a:ext cx="10874959" cy="274320"/>
+          </a:xfrm>
+          <a:prstGeom prst="rect">
+            <a:avLst/>
+          </a:prstGeom>
+          <a:noFill/>
+          <a:ln/>
+        </p:spPr>
+        <p:txBody>
+          <a:bodyPr wrap="square" lIns="0" tIns="0" rIns="0" bIns="0" rtlCol="0" anchor="ctr"/>
+          <a:lstStyle/>
+          <a:p>
+            <a:pPr rtl="1" algn="r" indent="0" marL="0">
+              <a:buNone/>
+            </a:pPr>
+            <a:r>
+              <a:rPr lang="en-US" sz="1250" b="1" dirty="0">
                 <a:solidFill>
                   <a:srgbClr val="E8635A"/>
                 </a:solidFill>
@@ -2036,101 +2062,90 @@
                 <a:ea typeface="Arial" pitchFamily="34" charset="-122"/>
                 <a:cs typeface="Arial" pitchFamily="34" charset="-120"/>
               </a:rPr>
-              <a:t>והמספרים עצמם</a:t>
+              <a:t>ומעל הכל · ניהול המשרד</a:t>
+            </a:r>
+            <a:endParaRPr lang="en-US" sz="1250" dirty="0"/>
+          </a:p>
+        </p:txBody>
+      </p:sp>
+      <p:sp>
+        <p:nvSpPr>
+          <p:cNvPr id="3" name="Text 1"/>
+          <p:cNvSpPr txBox="1"/>
+          <p:nvPr/>
+        </p:nvSpPr>
+        <p:spPr>
+          <a:xfrm>
+            <a:off x="658368" y="658368"/>
+            <a:ext cx="10874959" cy="566928"/>
+          </a:xfrm>
+          <a:prstGeom prst="rect">
+            <a:avLst/>
+          </a:prstGeom>
+          <a:noFill/>
+          <a:ln/>
+        </p:spPr>
+        <p:txBody>
+          <a:bodyPr wrap="square" lIns="0" tIns="0" rIns="0" bIns="0" rtlCol="0" anchor="ctr"/>
+          <a:lstStyle/>
+          <a:p>
+            <a:pPr rtl="1" algn="r" indent="0" marL="0">
+              <a:buNone/>
+            </a:pPr>
+            <a:r>
+              <a:rPr lang="en-US" sz="2900" b="1" dirty="0">
+                <a:solidFill>
+                  <a:srgbClr val="0C4068"/>
+                </a:solidFill>
+                <a:latin typeface="Arial" pitchFamily="34" charset="0"/>
+                <a:ea typeface="Arial" pitchFamily="34" charset="-122"/>
+                <a:cs typeface="Arial" pitchFamily="34" charset="-120"/>
+              </a:rPr>
+              <a:t>שכבת ניהול למשרד שגדל</a:t>
+            </a:r>
+            <a:endParaRPr lang="en-US" sz="2900" dirty="0"/>
+          </a:p>
+        </p:txBody>
+      </p:sp>
+      <p:sp>
+        <p:nvSpPr>
+          <p:cNvPr id="4" name="Text 2"/>
+          <p:cNvSpPr txBox="1"/>
+          <p:nvPr/>
+        </p:nvSpPr>
+        <p:spPr>
+          <a:xfrm>
+            <a:off x="658368" y="1261872"/>
+            <a:ext cx="10874959" cy="786384"/>
+          </a:xfrm>
+          <a:prstGeom prst="rect">
+            <a:avLst/>
+          </a:prstGeom>
+          <a:noFill/>
+          <a:ln/>
+        </p:spPr>
+        <p:txBody>
+          <a:bodyPr wrap="square" lIns="0" tIns="0" rIns="0" bIns="0" rtlCol="0" anchor="ctr"/>
+          <a:lstStyle/>
+          <a:p>
+            <a:pPr rtl="1" algn="r" indent="0" marL="0">
+              <a:lnSpc>
+                <a:spcPct val="135000"/>
+              </a:lnSpc>
+              <a:buNone/>
+            </a:pPr>
+            <a:r>
+              <a:rPr lang="en-US" sz="1300" dirty="0">
+                <a:solidFill>
+                  <a:srgbClr val="51677A"/>
+                </a:solidFill>
+                <a:latin typeface="Arial" pitchFamily="34" charset="0"/>
+                <a:ea typeface="Arial" pitchFamily="34" charset="-122"/>
+                <a:cs typeface="Arial" pitchFamily="34" charset="-120"/>
+              </a:rPr>
+              <a:t>מה שמאפשר להעביר את השיטה בין יועצים: הרשאות ותפקידים, מחזור חודשי אחיד, תבניות הודעות מאושרות, ובקרת איכות על התוצרים של ה־AI.</a:t>
             </a:r>
             <a:endParaRPr lang="en-US" sz="1300" dirty="0"/>
-          </a:p>
-        </p:txBody>
-      </p:sp>
-      <p:sp>
-        <p:nvSpPr>
-          <p:cNvPr id="3" name="Text 1"/>
-          <p:cNvSpPr txBox="1"/>
-          <p:nvPr/>
-        </p:nvSpPr>
-        <p:spPr>
-          <a:xfrm>
-            <a:off x="685800" y="713232"/>
-            <a:ext cx="10820095" cy="685800"/>
-          </a:xfrm>
-          <a:prstGeom prst="rect">
-            <a:avLst/>
-          </a:prstGeom>
-          <a:noFill/>
-          <a:ln/>
-        </p:spPr>
-        <p:txBody>
-          <a:bodyPr wrap="square" lIns="0" tIns="0" rIns="0" bIns="0" rtlCol="0" anchor="ctr"/>
-          <a:lstStyle/>
-          <a:p>
-            <a:pPr algn="r" indent="0" marL="0">
-              <a:buNone/>
-            </a:pPr>
-            <a:r>
-              <a:rPr lang="en-US" sz="3300" b="1" dirty="0">
-                <a:solidFill>
-                  <a:srgbClr val="0C4068"/>
-                </a:solidFill>
-                <a:latin typeface="Arial" pitchFamily="34" charset="0"/>
-                <a:ea typeface="Arial" pitchFamily="34" charset="-122"/>
-                <a:cs typeface="Arial" pitchFamily="34" charset="-120"/>
-              </a:rPr>
-              <a:t>דוחות ברמת CFO — </a:t>
-            </a:r>
-            <a:pPr algn="r" indent="0" marL="0">
-              <a:buNone/>
-            </a:pPr>
-            <a:r>
-              <a:rPr lang="en-US" sz="3300" b="1" dirty="0">
-                <a:solidFill>
-                  <a:srgbClr val="E8635A"/>
-                </a:solidFill>
-                <a:latin typeface="Arial" pitchFamily="34" charset="0"/>
-                <a:ea typeface="Arial" pitchFamily="34" charset="-122"/>
-                <a:cs typeface="Arial" pitchFamily="34" charset="-120"/>
-              </a:rPr>
-              <a:t>בלי שתבנה אותם.</a:t>
-            </a:r>
-            <a:endParaRPr lang="en-US" sz="3300" dirty="0"/>
-          </a:p>
-        </p:txBody>
-      </p:sp>
-      <p:sp>
-        <p:nvSpPr>
-          <p:cNvPr id="4" name="Text 2"/>
-          <p:cNvSpPr txBox="1"/>
-          <p:nvPr/>
-        </p:nvSpPr>
-        <p:spPr>
-          <a:xfrm>
-            <a:off x="685800" y="1426464"/>
-            <a:ext cx="10820095" cy="502920"/>
-          </a:xfrm>
-          <a:prstGeom prst="rect">
-            <a:avLst/>
-          </a:prstGeom>
-          <a:noFill/>
-          <a:ln/>
-        </p:spPr>
-        <p:txBody>
-          <a:bodyPr wrap="square" lIns="0" tIns="0" rIns="0" bIns="0" rtlCol="0" anchor="ctr"/>
-          <a:lstStyle/>
-          <a:p>
-            <a:pPr rtl="1" algn="r" indent="0" marL="0">
-              <a:buNone/>
-            </a:pPr>
-            <a:r>
-              <a:rPr lang="en-US" sz="1450" dirty="0">
-                <a:solidFill>
-                  <a:srgbClr val="51677A"/>
-                </a:solidFill>
-                <a:latin typeface="Arial" pitchFamily="34" charset="0"/>
-                <a:ea typeface="Arial" pitchFamily="34" charset="-122"/>
-                <a:cs typeface="Arial" pitchFamily="34" charset="-120"/>
-              </a:rPr>
-              <a:t>תכנון תזרימי קדימה עם יעדים ללקוח, ודוח רווח והפסד שנבנה מהכרטסת האמיתית של רואה החשבון — 14,083 תנועות, 631 כרטיסים.</a:t>
-            </a:r>
-            <a:endParaRPr lang="en-US" sz="1450" dirty="0"/>
           </a:p>
         </p:txBody>
       </p:sp>
@@ -2142,120 +2157,628 @@
         </p:nvSpPr>
         <p:spPr>
           <a:xfrm>
-            <a:off x="630936" y="2029968"/>
-            <a:ext cx="10929823" cy="4498848"/>
+            <a:off x="7875727" y="2651760"/>
+            <a:ext cx="3657600" cy="713232"/>
           </a:xfrm>
           <a:prstGeom prst="roundRect">
             <a:avLst>
-              <a:gd name="adj" fmla="val 1626"/>
+              <a:gd name="adj" fmla="val 50000"/>
             </a:avLst>
           </a:prstGeom>
           <a:solidFill>
-            <a:srgbClr val="FFFFFF"/>
+            <a:srgbClr val="F4F7FA"/>
           </a:solidFill>
           <a:ln w="12700">
             <a:solidFill>
-              <a:srgbClr val="D5DEE8"/>
+              <a:srgbClr val="E6ECF4"/>
             </a:solidFill>
             <a:prstDash val="solid"/>
           </a:ln>
-          <a:effectLst>
-            <a:outerShdw sx="100000" sy="100000" kx="0" ky="0" algn="bl" rotWithShape="0" blurRad="254000" dist="63500" dir="5400000">
-              <a:srgbClr val="0C4068">
-                <a:alpha val="28000"/>
-              </a:srgbClr>
-            </a:outerShdw>
-          </a:effectLst>
-        </p:spPr>
-      </p:sp>
-      <p:pic>
-        <p:nvPicPr>
-          <p:cNvPr id="6" name="Image 0" descr="/Users/eyalhazut/Documents/Claude/Projects/hk/mainScreen/docs/shots/co-fcast.png">    </p:cNvPr>
-          <p:cNvPicPr>
-            <a:picLocks noChangeAspect="1"/>
-          </p:cNvPicPr>
-          <p:nvPr/>
-        </p:nvPicPr>
-        <p:blipFill>
-          <a:blip r:embed="rId1"/>
-          <a:srcRect l="0" r="0" t="0" b="0"/>
-          <a:stretch/>
-        </p:blipFill>
-        <p:spPr>
-          <a:xfrm>
-            <a:off x="685800" y="2084832"/>
-            <a:ext cx="10820095" cy="4389120"/>
-          </a:xfrm>
-          <a:prstGeom prst="rect">
-            <a:avLst/>
-          </a:prstGeom>
-        </p:spPr>
-      </p:pic>
-      <p:sp>
-        <p:nvSpPr>
-          <p:cNvPr id="7" name="Shape 4"/>
+        </p:spPr>
+      </p:sp>
+      <p:sp>
+        <p:nvSpPr>
+          <p:cNvPr id="6" name="Text 4"/>
+          <p:cNvSpPr txBox="1"/>
+          <p:nvPr/>
+        </p:nvSpPr>
+        <p:spPr>
+          <a:xfrm>
+            <a:off x="8012887" y="2651760"/>
+            <a:ext cx="3383280" cy="713232"/>
+          </a:xfrm>
+          <a:prstGeom prst="rect">
+            <a:avLst/>
+          </a:prstGeom>
+          <a:noFill/>
+          <a:ln/>
+        </p:spPr>
+        <p:txBody>
+          <a:bodyPr wrap="square" lIns="0" tIns="0" rIns="0" bIns="0" rtlCol="0" anchor="ctr"/>
+          <a:lstStyle/>
+          <a:p>
+            <a:pPr rtl="1" algn="ctr" indent="0" marL="0">
+              <a:buNone/>
+            </a:pPr>
+            <a:r>
+              <a:rPr lang="en-US" sz="1350" dirty="0">
+                <a:solidFill>
+                  <a:srgbClr val="0C4068"/>
+                </a:solidFill>
+                <a:latin typeface="Arial" pitchFamily="34" charset="0"/>
+                <a:ea typeface="Arial" pitchFamily="34" charset="-122"/>
+                <a:cs typeface="Arial" pitchFamily="34" charset="-120"/>
+              </a:rPr>
+              <a:t>יועצים והרשאות</a:t>
+            </a:r>
+            <a:endParaRPr lang="en-US" sz="1350" dirty="0"/>
+          </a:p>
+        </p:txBody>
+      </p:sp>
+      <p:sp>
+        <p:nvSpPr>
+          <p:cNvPr id="7" name="Shape 5"/>
           <p:cNvSpPr/>
           <p:nvPr/>
         </p:nvSpPr>
         <p:spPr>
           <a:xfrm>
-            <a:off x="1005840" y="2542032"/>
-            <a:ext cx="3291840" cy="713232"/>
+            <a:off x="3980383" y="2651760"/>
+            <a:ext cx="3657600" cy="713232"/>
           </a:xfrm>
           <a:prstGeom prst="roundRect">
             <a:avLst>
-              <a:gd name="adj" fmla="val 8974"/>
+              <a:gd name="adj" fmla="val 50000"/>
             </a:avLst>
           </a:prstGeom>
           <a:solidFill>
-            <a:srgbClr val="0C4068"/>
+            <a:srgbClr val="F4F7FA"/>
           </a:solidFill>
-          <a:ln/>
-          <a:effectLst>
-            <a:outerShdw sx="100000" sy="100000" kx="0" ky="0" algn="bl" rotWithShape="0" blurRad="152400" dist="38100" dir="5400000">
-              <a:srgbClr val="0A3557">
-                <a:alpha val="40000"/>
-              </a:srgbClr>
-            </a:outerShdw>
-          </a:effectLst>
-        </p:spPr>
-      </p:sp>
-      <p:sp>
-        <p:nvSpPr>
-          <p:cNvPr id="8" name="Text 5"/>
-          <p:cNvSpPr txBox="1"/>
-          <p:nvPr/>
-        </p:nvSpPr>
-        <p:spPr>
-          <a:xfrm>
-            <a:off x="1133856" y="2542032"/>
-            <a:ext cx="3035808" cy="713232"/>
-          </a:xfrm>
-          <a:prstGeom prst="rect">
-            <a:avLst/>
-          </a:prstGeom>
-          <a:noFill/>
-          <a:ln/>
-        </p:spPr>
-        <p:txBody>
-          <a:bodyPr wrap="square" lIns="0" tIns="0" rIns="0" bIns="0" rtlCol="0" anchor="ctr"/>
-          <a:lstStyle/>
-          <a:p>
-            <a:pPr rtl="1" algn="r" indent="0" marL="0">
-              <a:buNone/>
-            </a:pPr>
-            <a:r>
-              <a:rPr lang="en-US" sz="1150" dirty="0">
-                <a:solidFill>
-                  <a:srgbClr val="FFFFFF"/>
-                </a:solidFill>
-                <a:latin typeface="Arial" pitchFamily="34" charset="0"/>
-                <a:ea typeface="Arial" pitchFamily="34" charset="-122"/>
-                <a:cs typeface="Arial" pitchFamily="34" charset="-120"/>
-              </a:rPr>
-              <a:t>ה־AI ממפה ומסווג · כל שקל מחובר בקוד דטרמיניסטי</a:t>
-            </a:r>
-            <a:endParaRPr lang="en-US" sz="1150" dirty="0"/>
+          <a:ln w="12700">
+            <a:solidFill>
+              <a:srgbClr val="E6ECF4"/>
+            </a:solidFill>
+            <a:prstDash val="solid"/>
+          </a:ln>
+        </p:spPr>
+      </p:sp>
+      <p:sp>
+        <p:nvSpPr>
+          <p:cNvPr id="8" name="Text 6"/>
+          <p:cNvSpPr txBox="1"/>
+          <p:nvPr/>
+        </p:nvSpPr>
+        <p:spPr>
+          <a:xfrm>
+            <a:off x="4117543" y="2651760"/>
+            <a:ext cx="3383280" cy="713232"/>
+          </a:xfrm>
+          <a:prstGeom prst="rect">
+            <a:avLst/>
+          </a:prstGeom>
+          <a:noFill/>
+          <a:ln/>
+        </p:spPr>
+        <p:txBody>
+          <a:bodyPr wrap="square" lIns="0" tIns="0" rIns="0" bIns="0" rtlCol="0" anchor="ctr"/>
+          <a:lstStyle/>
+          <a:p>
+            <a:pPr rtl="1" algn="ctr" indent="0" marL="0">
+              <a:buNone/>
+            </a:pPr>
+            <a:r>
+              <a:rPr lang="en-US" sz="1350" dirty="0">
+                <a:solidFill>
+                  <a:srgbClr val="0C4068"/>
+                </a:solidFill>
+                <a:latin typeface="Arial" pitchFamily="34" charset="0"/>
+                <a:ea typeface="Arial" pitchFamily="34" charset="-122"/>
+                <a:cs typeface="Arial" pitchFamily="34" charset="-120"/>
+              </a:rPr>
+              <a:t>חיוב וגבייה</a:t>
+            </a:r>
+            <a:endParaRPr lang="en-US" sz="1350" dirty="0"/>
+          </a:p>
+        </p:txBody>
+      </p:sp>
+      <p:sp>
+        <p:nvSpPr>
+          <p:cNvPr id="9" name="Shape 7"/>
+          <p:cNvSpPr/>
+          <p:nvPr/>
+        </p:nvSpPr>
+        <p:spPr>
+          <a:xfrm>
+            <a:off x="85039" y="2651760"/>
+            <a:ext cx="3657600" cy="713232"/>
+          </a:xfrm>
+          <a:prstGeom prst="roundRect">
+            <a:avLst>
+              <a:gd name="adj" fmla="val 50000"/>
+            </a:avLst>
+          </a:prstGeom>
+          <a:solidFill>
+            <a:srgbClr val="F4F7FA"/>
+          </a:solidFill>
+          <a:ln w="12700">
+            <a:solidFill>
+              <a:srgbClr val="E6ECF4"/>
+            </a:solidFill>
+            <a:prstDash val="solid"/>
+          </a:ln>
+        </p:spPr>
+      </p:sp>
+      <p:sp>
+        <p:nvSpPr>
+          <p:cNvPr id="10" name="Text 8"/>
+          <p:cNvSpPr txBox="1"/>
+          <p:nvPr/>
+        </p:nvSpPr>
+        <p:spPr>
+          <a:xfrm>
+            <a:off x="222199" y="2651760"/>
+            <a:ext cx="3383280" cy="713232"/>
+          </a:xfrm>
+          <a:prstGeom prst="rect">
+            <a:avLst/>
+          </a:prstGeom>
+          <a:noFill/>
+          <a:ln/>
+        </p:spPr>
+        <p:txBody>
+          <a:bodyPr wrap="square" lIns="0" tIns="0" rIns="0" bIns="0" rtlCol="0" anchor="ctr"/>
+          <a:lstStyle/>
+          <a:p>
+            <a:pPr rtl="1" algn="ctr" indent="0" marL="0">
+              <a:buNone/>
+            </a:pPr>
+            <a:r>
+              <a:rPr lang="en-US" sz="1350" dirty="0">
+                <a:solidFill>
+                  <a:srgbClr val="0C4068"/>
+                </a:solidFill>
+                <a:latin typeface="Arial" pitchFamily="34" charset="0"/>
+                <a:ea typeface="Arial" pitchFamily="34" charset="-122"/>
+                <a:cs typeface="Arial" pitchFamily="34" charset="-120"/>
+              </a:rPr>
+              <a:t>לידים</a:t>
+            </a:r>
+            <a:endParaRPr lang="en-US" sz="1350" dirty="0"/>
+          </a:p>
+        </p:txBody>
+      </p:sp>
+      <p:sp>
+        <p:nvSpPr>
+          <p:cNvPr id="11" name="Shape 9"/>
+          <p:cNvSpPr/>
+          <p:nvPr/>
+        </p:nvSpPr>
+        <p:spPr>
+          <a:xfrm>
+            <a:off x="7875727" y="3602736"/>
+            <a:ext cx="3657600" cy="713232"/>
+          </a:xfrm>
+          <a:prstGeom prst="roundRect">
+            <a:avLst>
+              <a:gd name="adj" fmla="val 50000"/>
+            </a:avLst>
+          </a:prstGeom>
+          <a:solidFill>
+            <a:srgbClr val="F4F7FA"/>
+          </a:solidFill>
+          <a:ln w="12700">
+            <a:solidFill>
+              <a:srgbClr val="E6ECF4"/>
+            </a:solidFill>
+            <a:prstDash val="solid"/>
+          </a:ln>
+        </p:spPr>
+      </p:sp>
+      <p:sp>
+        <p:nvSpPr>
+          <p:cNvPr id="12" name="Text 10"/>
+          <p:cNvSpPr txBox="1"/>
+          <p:nvPr/>
+        </p:nvSpPr>
+        <p:spPr>
+          <a:xfrm>
+            <a:off x="8012887" y="3602736"/>
+            <a:ext cx="3383280" cy="713232"/>
+          </a:xfrm>
+          <a:prstGeom prst="rect">
+            <a:avLst/>
+          </a:prstGeom>
+          <a:noFill/>
+          <a:ln/>
+        </p:spPr>
+        <p:txBody>
+          <a:bodyPr wrap="square" lIns="0" tIns="0" rIns="0" bIns="0" rtlCol="0" anchor="ctr"/>
+          <a:lstStyle/>
+          <a:p>
+            <a:pPr rtl="1" algn="ctr" indent="0" marL="0">
+              <a:buNone/>
+            </a:pPr>
+            <a:r>
+              <a:rPr lang="en-US" sz="1350" dirty="0">
+                <a:solidFill>
+                  <a:srgbClr val="0C4068"/>
+                </a:solidFill>
+                <a:latin typeface="Arial" pitchFamily="34" charset="0"/>
+                <a:ea typeface="Arial" pitchFamily="34" charset="-122"/>
+                <a:cs typeface="Arial" pitchFamily="34" charset="-120"/>
+              </a:rPr>
+              <a:t>11 סוגי הודעות אוטומטיות</a:t>
+            </a:r>
+            <a:endParaRPr lang="en-US" sz="1350" dirty="0"/>
+          </a:p>
+        </p:txBody>
+      </p:sp>
+      <p:sp>
+        <p:nvSpPr>
+          <p:cNvPr id="13" name="Shape 11"/>
+          <p:cNvSpPr/>
+          <p:nvPr/>
+        </p:nvSpPr>
+        <p:spPr>
+          <a:xfrm>
+            <a:off x="3980383" y="3602736"/>
+            <a:ext cx="3657600" cy="713232"/>
+          </a:xfrm>
+          <a:prstGeom prst="roundRect">
+            <a:avLst>
+              <a:gd name="adj" fmla="val 50000"/>
+            </a:avLst>
+          </a:prstGeom>
+          <a:solidFill>
+            <a:srgbClr val="F4F7FA"/>
+          </a:solidFill>
+          <a:ln w="12700">
+            <a:solidFill>
+              <a:srgbClr val="E6ECF4"/>
+            </a:solidFill>
+            <a:prstDash val="solid"/>
+          </a:ln>
+        </p:spPr>
+      </p:sp>
+      <p:sp>
+        <p:nvSpPr>
+          <p:cNvPr id="14" name="Text 12"/>
+          <p:cNvSpPr txBox="1"/>
+          <p:nvPr/>
+        </p:nvSpPr>
+        <p:spPr>
+          <a:xfrm>
+            <a:off x="4117543" y="3602736"/>
+            <a:ext cx="3383280" cy="713232"/>
+          </a:xfrm>
+          <a:prstGeom prst="rect">
+            <a:avLst/>
+          </a:prstGeom>
+          <a:noFill/>
+          <a:ln/>
+        </p:spPr>
+        <p:txBody>
+          <a:bodyPr wrap="square" lIns="0" tIns="0" rIns="0" bIns="0" rtlCol="0" anchor="ctr"/>
+          <a:lstStyle/>
+          <a:p>
+            <a:pPr rtl="1" algn="ctr" indent="0" marL="0">
+              <a:buNone/>
+            </a:pPr>
+            <a:r>
+              <a:rPr lang="en-US" sz="1350" dirty="0">
+                <a:solidFill>
+                  <a:srgbClr val="0C4068"/>
+                </a:solidFill>
+                <a:latin typeface="Arial" pitchFamily="34" charset="0"/>
+                <a:ea typeface="Arial" pitchFamily="34" charset="-122"/>
+                <a:cs typeface="Arial" pitchFamily="34" charset="-120"/>
+              </a:rPr>
+              <a:t>שיוך מספרי טלפון לחברות</a:t>
+            </a:r>
+            <a:endParaRPr lang="en-US" sz="1350" dirty="0"/>
+          </a:p>
+        </p:txBody>
+      </p:sp>
+      <p:sp>
+        <p:nvSpPr>
+          <p:cNvPr id="15" name="Shape 13"/>
+          <p:cNvSpPr/>
+          <p:nvPr/>
+        </p:nvSpPr>
+        <p:spPr>
+          <a:xfrm>
+            <a:off x="85039" y="3602736"/>
+            <a:ext cx="3657600" cy="713232"/>
+          </a:xfrm>
+          <a:prstGeom prst="roundRect">
+            <a:avLst>
+              <a:gd name="adj" fmla="val 50000"/>
+            </a:avLst>
+          </a:prstGeom>
+          <a:solidFill>
+            <a:srgbClr val="F4F7FA"/>
+          </a:solidFill>
+          <a:ln w="12700">
+            <a:solidFill>
+              <a:srgbClr val="E6ECF4"/>
+            </a:solidFill>
+            <a:prstDash val="solid"/>
+          </a:ln>
+        </p:spPr>
+      </p:sp>
+      <p:sp>
+        <p:nvSpPr>
+          <p:cNvPr id="16" name="Text 14"/>
+          <p:cNvSpPr txBox="1"/>
+          <p:nvPr/>
+        </p:nvSpPr>
+        <p:spPr>
+          <a:xfrm>
+            <a:off x="222199" y="3602736"/>
+            <a:ext cx="3383280" cy="713232"/>
+          </a:xfrm>
+          <a:prstGeom prst="rect">
+            <a:avLst/>
+          </a:prstGeom>
+          <a:noFill/>
+          <a:ln/>
+        </p:spPr>
+        <p:txBody>
+          <a:bodyPr wrap="square" lIns="0" tIns="0" rIns="0" bIns="0" rtlCol="0" anchor="ctr"/>
+          <a:lstStyle/>
+          <a:p>
+            <a:pPr rtl="1" algn="ctr" indent="0" marL="0">
+              <a:buNone/>
+            </a:pPr>
+            <a:r>
+              <a:rPr lang="en-US" sz="1350" dirty="0">
+                <a:solidFill>
+                  <a:srgbClr val="0C4068"/>
+                </a:solidFill>
+                <a:latin typeface="Arial" pitchFamily="34" charset="0"/>
+                <a:ea typeface="Arial" pitchFamily="34" charset="-122"/>
+                <a:cs typeface="Arial" pitchFamily="34" charset="-120"/>
+              </a:rPr>
+              <a:t>קטגוריות קיטלוג ובסיס ידע</a:t>
+            </a:r>
+            <a:endParaRPr lang="en-US" sz="1350" dirty="0"/>
+          </a:p>
+        </p:txBody>
+      </p:sp>
+      <p:sp>
+        <p:nvSpPr>
+          <p:cNvPr id="17" name="Shape 15"/>
+          <p:cNvSpPr/>
+          <p:nvPr/>
+        </p:nvSpPr>
+        <p:spPr>
+          <a:xfrm>
+            <a:off x="7875727" y="4553712"/>
+            <a:ext cx="3657600" cy="713232"/>
+          </a:xfrm>
+          <a:prstGeom prst="roundRect">
+            <a:avLst>
+              <a:gd name="adj" fmla="val 50000"/>
+            </a:avLst>
+          </a:prstGeom>
+          <a:solidFill>
+            <a:srgbClr val="F4F7FA"/>
+          </a:solidFill>
+          <a:ln w="12700">
+            <a:solidFill>
+              <a:srgbClr val="E6ECF4"/>
+            </a:solidFill>
+            <a:prstDash val="solid"/>
+          </a:ln>
+        </p:spPr>
+      </p:sp>
+      <p:sp>
+        <p:nvSpPr>
+          <p:cNvPr id="18" name="Text 16"/>
+          <p:cNvSpPr txBox="1"/>
+          <p:nvPr/>
+        </p:nvSpPr>
+        <p:spPr>
+          <a:xfrm>
+            <a:off x="8012887" y="4553712"/>
+            <a:ext cx="3383280" cy="713232"/>
+          </a:xfrm>
+          <a:prstGeom prst="rect">
+            <a:avLst/>
+          </a:prstGeom>
+          <a:noFill/>
+          <a:ln/>
+        </p:spPr>
+        <p:txBody>
+          <a:bodyPr wrap="square" lIns="0" tIns="0" rIns="0" bIns="0" rtlCol="0" anchor="ctr"/>
+          <a:lstStyle/>
+          <a:p>
+            <a:pPr rtl="1" algn="ctr" indent="0" marL="0">
+              <a:buNone/>
+            </a:pPr>
+            <a:r>
+              <a:rPr lang="en-US" sz="1350" dirty="0">
+                <a:solidFill>
+                  <a:srgbClr val="0C4068"/>
+                </a:solidFill>
+                <a:latin typeface="Arial" pitchFamily="34" charset="0"/>
+                <a:ea typeface="Arial" pitchFamily="34" charset="-122"/>
+                <a:cs typeface="Arial" pitchFamily="34" charset="-120"/>
+              </a:rPr>
+              <a:t>בדיקות איכות על תוצרי ה־AI</a:t>
+            </a:r>
+            <a:endParaRPr lang="en-US" sz="1350" dirty="0"/>
+          </a:p>
+        </p:txBody>
+      </p:sp>
+      <p:sp>
+        <p:nvSpPr>
+          <p:cNvPr id="19" name="Shape 17"/>
+          <p:cNvSpPr/>
+          <p:nvPr/>
+        </p:nvSpPr>
+        <p:spPr>
+          <a:xfrm>
+            <a:off x="3980383" y="4553712"/>
+            <a:ext cx="3657600" cy="713232"/>
+          </a:xfrm>
+          <a:prstGeom prst="roundRect">
+            <a:avLst>
+              <a:gd name="adj" fmla="val 50000"/>
+            </a:avLst>
+          </a:prstGeom>
+          <a:solidFill>
+            <a:srgbClr val="F4F7FA"/>
+          </a:solidFill>
+          <a:ln w="12700">
+            <a:solidFill>
+              <a:srgbClr val="E6ECF4"/>
+            </a:solidFill>
+            <a:prstDash val="solid"/>
+          </a:ln>
+        </p:spPr>
+      </p:sp>
+      <p:sp>
+        <p:nvSpPr>
+          <p:cNvPr id="20" name="Text 18"/>
+          <p:cNvSpPr txBox="1"/>
+          <p:nvPr/>
+        </p:nvSpPr>
+        <p:spPr>
+          <a:xfrm>
+            <a:off x="4117543" y="4553712"/>
+            <a:ext cx="3383280" cy="713232"/>
+          </a:xfrm>
+          <a:prstGeom prst="rect">
+            <a:avLst/>
+          </a:prstGeom>
+          <a:noFill/>
+          <a:ln/>
+        </p:spPr>
+        <p:txBody>
+          <a:bodyPr wrap="square" lIns="0" tIns="0" rIns="0" bIns="0" rtlCol="0" anchor="ctr"/>
+          <a:lstStyle/>
+          <a:p>
+            <a:pPr rtl="1" algn="ctr" indent="0" marL="0">
+              <a:buNone/>
+            </a:pPr>
+            <a:r>
+              <a:rPr lang="en-US" sz="1350" dirty="0">
+                <a:solidFill>
+                  <a:srgbClr val="0C4068"/>
+                </a:solidFill>
+                <a:latin typeface="Arial" pitchFamily="34" charset="0"/>
+                <a:ea typeface="Arial" pitchFamily="34" charset="-122"/>
+                <a:cs typeface="Arial" pitchFamily="34" charset="-120"/>
+              </a:rPr>
+              <a:t>משימות ובקשות ל־HK</a:t>
+            </a:r>
+            <a:endParaRPr lang="en-US" sz="1350" dirty="0"/>
+          </a:p>
+        </p:txBody>
+      </p:sp>
+      <p:sp>
+        <p:nvSpPr>
+          <p:cNvPr id="21" name="Shape 19"/>
+          <p:cNvSpPr/>
+          <p:nvPr/>
+        </p:nvSpPr>
+        <p:spPr>
+          <a:xfrm>
+            <a:off x="85039" y="4553712"/>
+            <a:ext cx="3657600" cy="713232"/>
+          </a:xfrm>
+          <a:prstGeom prst="roundRect">
+            <a:avLst>
+              <a:gd name="adj" fmla="val 50000"/>
+            </a:avLst>
+          </a:prstGeom>
+          <a:solidFill>
+            <a:srgbClr val="F4F7FA"/>
+          </a:solidFill>
+          <a:ln w="12700">
+            <a:solidFill>
+              <a:srgbClr val="E6ECF4"/>
+            </a:solidFill>
+            <a:prstDash val="solid"/>
+          </a:ln>
+        </p:spPr>
+      </p:sp>
+      <p:sp>
+        <p:nvSpPr>
+          <p:cNvPr id="22" name="Text 20"/>
+          <p:cNvSpPr txBox="1"/>
+          <p:nvPr/>
+        </p:nvSpPr>
+        <p:spPr>
+          <a:xfrm>
+            <a:off x="222199" y="4553712"/>
+            <a:ext cx="3383280" cy="713232"/>
+          </a:xfrm>
+          <a:prstGeom prst="rect">
+            <a:avLst/>
+          </a:prstGeom>
+          <a:noFill/>
+          <a:ln/>
+        </p:spPr>
+        <p:txBody>
+          <a:bodyPr wrap="square" lIns="0" tIns="0" rIns="0" bIns="0" rtlCol="0" anchor="ctr"/>
+          <a:lstStyle/>
+          <a:p>
+            <a:pPr rtl="1" algn="ctr" indent="0" marL="0">
+              <a:buNone/>
+            </a:pPr>
+            <a:r>
+              <a:rPr lang="en-US" sz="1350" dirty="0">
+                <a:solidFill>
+                  <a:srgbClr val="0C4068"/>
+                </a:solidFill>
+                <a:latin typeface="Arial" pitchFamily="34" charset="0"/>
+                <a:ea typeface="Arial" pitchFamily="34" charset="-122"/>
+                <a:cs typeface="Arial" pitchFamily="34" charset="-120"/>
+              </a:rPr>
+              <a:t>עזרה מותאמת בכל מסך</a:t>
+            </a:r>
+            <a:endParaRPr lang="en-US" sz="1350" dirty="0"/>
+          </a:p>
+        </p:txBody>
+      </p:sp>
+      <p:sp>
+        <p:nvSpPr>
+          <p:cNvPr id="23" name="Text 21"/>
+          <p:cNvSpPr txBox="1"/>
+          <p:nvPr/>
+        </p:nvSpPr>
+        <p:spPr>
+          <a:xfrm>
+            <a:off x="658368" y="5943600"/>
+            <a:ext cx="10874959" cy="548640"/>
+          </a:xfrm>
+          <a:prstGeom prst="rect">
+            <a:avLst/>
+          </a:prstGeom>
+          <a:noFill/>
+          <a:ln/>
+        </p:spPr>
+        <p:txBody>
+          <a:bodyPr wrap="square" lIns="0" tIns="0" rIns="0" bIns="0" rtlCol="0" anchor="ctr"/>
+          <a:lstStyle/>
+          <a:p>
+            <a:pPr rtl="1" algn="r" indent="0" marL="0">
+              <a:buNone/>
+            </a:pPr>
+            <a:r>
+              <a:rPr lang="en-US" sz="1250" dirty="0">
+                <a:solidFill>
+                  <a:srgbClr val="51677A"/>
+                </a:solidFill>
+                <a:latin typeface="Arial" pitchFamily="34" charset="0"/>
+                <a:ea typeface="Arial" pitchFamily="34" charset="-122"/>
+                <a:cs typeface="Arial" pitchFamily="34" charset="-120"/>
+              </a:rPr>
+              <a:t>השיטה מוגדרת ברמת המשרד — מחזור חודשי, שלבים ויעדים — כך שיועץ חדש נכנס לשיטה קיימת ולא ממציא אותה מחדש.</a:t>
+            </a:r>
+            <a:endParaRPr lang="en-US" sz="1250" dirty="0"/>
           </a:p>
         </p:txBody>
       </p:sp>
@@ -2273,7 +2796,7 @@
     <p:bg>
       <p:bgPr>
         <a:solidFill>
-          <a:srgbClr val="FFFFFF"/>
+          <a:srgbClr val="0C4068"/>
         </a:solidFill>
       </p:bgPr>
     </p:bg>
@@ -2299,24 +2822,24 @@
         </p:nvSpPr>
         <p:spPr>
           <a:xfrm>
-            <a:off x="685800" y="384048"/>
-            <a:ext cx="10820095" cy="310896"/>
-          </a:xfrm>
-          <a:prstGeom prst="rect">
-            <a:avLst/>
-          </a:prstGeom>
-          <a:noFill/>
-          <a:ln/>
-        </p:spPr>
-        <p:txBody>
-          <a:bodyPr wrap="square" lIns="0" tIns="0" rIns="0" bIns="0" rtlCol="0" anchor="ctr"/>
-          <a:lstStyle/>
-          <a:p>
-            <a:pPr rtl="1" algn="r" indent="0" marL="0">
-              <a:buNone/>
-            </a:pPr>
-            <a:r>
-              <a:rPr lang="en-US" sz="1300" b="1" dirty="0">
+            <a:off x="658368" y="457200"/>
+            <a:ext cx="10874959" cy="274320"/>
+          </a:xfrm>
+          <a:prstGeom prst="rect">
+            <a:avLst/>
+          </a:prstGeom>
+          <a:noFill/>
+          <a:ln/>
+        </p:spPr>
+        <p:txBody>
+          <a:bodyPr wrap="square" lIns="0" tIns="0" rIns="0" bIns="0" rtlCol="0" anchor="ctr"/>
+          <a:lstStyle/>
+          <a:p>
+            <a:pPr rtl="1" algn="r" indent="0" marL="0">
+              <a:buNone/>
+            </a:pPr>
+            <a:r>
+              <a:rPr lang="en-US" sz="1250" b="1" dirty="0">
                 <a:solidFill>
                   <a:srgbClr val="E8635A"/>
                 </a:solidFill>
@@ -2324,9 +2847,9 @@
                 <a:ea typeface="Arial" pitchFamily="34" charset="-122"/>
                 <a:cs typeface="Arial" pitchFamily="34" charset="-120"/>
               </a:rPr>
-              <a:t>ומתחת למכסה</a:t>
-            </a:r>
-            <a:endParaRPr lang="en-US" sz="1300" dirty="0"/>
+              <a:t>מה זה משנה בפועל</a:t>
+            </a:r>
+            <a:endParaRPr lang="en-US" sz="1250" dirty="0"/>
           </a:p>
         </p:txBody>
       </p:sp>
@@ -2338,88 +2861,223 @@
         </p:nvSpPr>
         <p:spPr>
           <a:xfrm>
-            <a:off x="685800" y="713232"/>
-            <a:ext cx="10820095" cy="685800"/>
-          </a:xfrm>
-          <a:prstGeom prst="rect">
-            <a:avLst/>
-          </a:prstGeom>
-          <a:noFill/>
-          <a:ln/>
-        </p:spPr>
-        <p:txBody>
-          <a:bodyPr wrap="square" lIns="0" tIns="0" rIns="0" bIns="0" rtlCol="0" anchor="ctr"/>
-          <a:lstStyle/>
-          <a:p>
-            <a:pPr algn="r" indent="0" marL="0">
-              <a:buNone/>
-            </a:pPr>
-            <a:r>
-              <a:rPr lang="en-US" sz="3300" b="1" dirty="0">
-                <a:solidFill>
-                  <a:srgbClr val="0C4068"/>
-                </a:solidFill>
-                <a:latin typeface="Arial" pitchFamily="34" charset="0"/>
-                <a:ea typeface="Arial" pitchFamily="34" charset="-122"/>
-                <a:cs typeface="Arial" pitchFamily="34" charset="-120"/>
-              </a:rPr>
-              <a:t>מוצר שלם. </a:t>
-            </a:r>
-            <a:pPr algn="r" indent="0" marL="0">
-              <a:buNone/>
-            </a:pPr>
-            <a:r>
-              <a:rPr lang="en-US" sz="3300" b="1" dirty="0">
-                <a:solidFill>
-                  <a:srgbClr val="E8635A"/>
-                </a:solidFill>
-                <a:latin typeface="Arial" pitchFamily="34" charset="0"/>
-                <a:ea typeface="Arial" pitchFamily="34" charset="-122"/>
-                <a:cs typeface="Arial" pitchFamily="34" charset="-120"/>
-              </a:rPr>
-              <a:t>לא דמו.</a:t>
-            </a:r>
-            <a:endParaRPr lang="en-US" sz="3300" dirty="0"/>
-          </a:p>
-        </p:txBody>
-      </p:sp>
-      <p:sp>
-        <p:nvSpPr>
-          <p:cNvPr id="4" name="Shape 2"/>
+            <a:off x="658368" y="768096"/>
+            <a:ext cx="10874959" cy="566928"/>
+          </a:xfrm>
+          <a:prstGeom prst="rect">
+            <a:avLst/>
+          </a:prstGeom>
+          <a:noFill/>
+          <a:ln/>
+        </p:spPr>
+        <p:txBody>
+          <a:bodyPr wrap="square" lIns="0" tIns="0" rIns="0" bIns="0" rtlCol="0" anchor="ctr"/>
+          <a:lstStyle/>
+          <a:p>
+            <a:pPr rtl="1" algn="r" indent="0" marL="0">
+              <a:buNone/>
+            </a:pPr>
+            <a:r>
+              <a:rPr lang="en-US" sz="2900" b="1" dirty="0">
+                <a:solidFill>
+                  <a:srgbClr val="FFFFFF"/>
+                </a:solidFill>
+                <a:latin typeface="Arial" pitchFamily="34" charset="0"/>
+                <a:ea typeface="Arial" pitchFamily="34" charset="-122"/>
+                <a:cs typeface="Arial" pitchFamily="34" charset="-120"/>
+              </a:rPr>
+              <a:t>הזמן שיורד מהיועץ, פר לקוח לחודש</a:t>
+            </a:r>
+            <a:endParaRPr lang="en-US" sz="2900" dirty="0"/>
+          </a:p>
+        </p:txBody>
+      </p:sp>
+      <p:sp>
+        <p:nvSpPr>
+          <p:cNvPr id="4" name="Text 2"/>
+          <p:cNvSpPr txBox="1"/>
+          <p:nvPr/>
+        </p:nvSpPr>
+        <p:spPr>
+          <a:xfrm>
+            <a:off x="5870448" y="1691640"/>
+            <a:ext cx="5662879" cy="548640"/>
+          </a:xfrm>
+          <a:prstGeom prst="rect">
+            <a:avLst/>
+          </a:prstGeom>
+          <a:noFill/>
+          <a:ln/>
+        </p:spPr>
+        <p:txBody>
+          <a:bodyPr wrap="square" lIns="0" tIns="0" rIns="0" bIns="0" rtlCol="0" anchor="ctr"/>
+          <a:lstStyle/>
+          <a:p>
+            <a:pPr rtl="1" algn="r" indent="0" marL="0">
+              <a:buNone/>
+            </a:pPr>
+            <a:r>
+              <a:rPr lang="en-US" sz="1150" b="1" dirty="0">
+                <a:solidFill>
+                  <a:srgbClr val="9FC0DA"/>
+                </a:solidFill>
+                <a:latin typeface="Arial" pitchFamily="34" charset="0"/>
+                <a:ea typeface="Arial" pitchFamily="34" charset="-122"/>
+                <a:cs typeface="Arial" pitchFamily="34" charset="-120"/>
+              </a:rPr>
+              <a:t>פעילות</a:t>
+            </a:r>
+            <a:endParaRPr lang="en-US" sz="1150" dirty="0"/>
+          </a:p>
+        </p:txBody>
+      </p:sp>
+      <p:sp>
+        <p:nvSpPr>
+          <p:cNvPr id="5" name="Text 3"/>
+          <p:cNvSpPr txBox="1"/>
+          <p:nvPr/>
+        </p:nvSpPr>
+        <p:spPr>
+          <a:xfrm>
+            <a:off x="3401568" y="1691640"/>
+            <a:ext cx="2377440" cy="548640"/>
+          </a:xfrm>
+          <a:prstGeom prst="rect">
+            <a:avLst/>
+          </a:prstGeom>
+          <a:noFill/>
+          <a:ln/>
+        </p:spPr>
+        <p:txBody>
+          <a:bodyPr wrap="square" lIns="0" tIns="0" rIns="0" bIns="0" rtlCol="0" anchor="ctr"/>
+          <a:lstStyle/>
+          <a:p>
+            <a:pPr rtl="1" algn="ctr" indent="0" marL="0">
+              <a:buNone/>
+            </a:pPr>
+            <a:r>
+              <a:rPr lang="en-US" sz="1150" b="1" dirty="0">
+                <a:solidFill>
+                  <a:srgbClr val="9FC0DA"/>
+                </a:solidFill>
+                <a:latin typeface="Arial" pitchFamily="34" charset="0"/>
+                <a:ea typeface="Arial" pitchFamily="34" charset="-122"/>
+                <a:cs typeface="Arial" pitchFamily="34" charset="-120"/>
+              </a:rPr>
+              <a:t>היום</a:t>
+            </a:r>
+            <a:endParaRPr lang="en-US" sz="1150" dirty="0"/>
+          </a:p>
+        </p:txBody>
+      </p:sp>
+      <p:sp>
+        <p:nvSpPr>
+          <p:cNvPr id="6" name="Text 4"/>
+          <p:cNvSpPr txBox="1"/>
+          <p:nvPr/>
+        </p:nvSpPr>
+        <p:spPr>
+          <a:xfrm>
+            <a:off x="658368" y="1691640"/>
+            <a:ext cx="2651760" cy="548640"/>
+          </a:xfrm>
+          <a:prstGeom prst="rect">
+            <a:avLst/>
+          </a:prstGeom>
+          <a:noFill/>
+          <a:ln/>
+        </p:spPr>
+        <p:txBody>
+          <a:bodyPr wrap="square" lIns="0" tIns="0" rIns="0" bIns="0" rtlCol="0" anchor="ctr"/>
+          <a:lstStyle/>
+          <a:p>
+            <a:pPr rtl="1" algn="ctr" indent="0" marL="0">
+              <a:buNone/>
+            </a:pPr>
+            <a:r>
+              <a:rPr lang="en-US" sz="1150" b="1" dirty="0">
+                <a:solidFill>
+                  <a:srgbClr val="9FC0DA"/>
+                </a:solidFill>
+                <a:latin typeface="Arial" pitchFamily="34" charset="0"/>
+                <a:ea typeface="Arial" pitchFamily="34" charset="-122"/>
+                <a:cs typeface="Arial" pitchFamily="34" charset="-120"/>
+              </a:rPr>
+              <a:t>עם HK</a:t>
+            </a:r>
+            <a:endParaRPr lang="en-US" sz="1150" dirty="0"/>
+          </a:p>
+        </p:txBody>
+      </p:sp>
+      <p:sp>
+        <p:nvSpPr>
+          <p:cNvPr id="7" name="Shape 5"/>
           <p:cNvSpPr/>
           <p:nvPr/>
         </p:nvSpPr>
         <p:spPr>
           <a:xfrm>
-            <a:off x="7964424" y="2377440"/>
-            <a:ext cx="3383280" cy="749808"/>
-          </a:xfrm>
-          <a:prstGeom prst="roundRect">
-            <a:avLst>
-              <a:gd name="adj" fmla="val 50000"/>
-            </a:avLst>
+            <a:off x="658368" y="2240280"/>
+            <a:ext cx="10874959" cy="10973"/>
+          </a:xfrm>
+          <a:prstGeom prst="rect">
+            <a:avLst/>
           </a:prstGeom>
           <a:solidFill>
-            <a:srgbClr val="F4F7FA"/>
+            <a:srgbClr val="3F6E96"/>
           </a:solidFill>
-          <a:ln w="12700">
-            <a:solidFill>
-              <a:srgbClr val="E6ECF4"/>
-            </a:solidFill>
-            <a:prstDash val="solid"/>
-          </a:ln>
-        </p:spPr>
-      </p:sp>
-      <p:sp>
-        <p:nvSpPr>
-          <p:cNvPr id="5" name="Text 3"/>
-          <p:cNvSpPr txBox="1"/>
-          <p:nvPr/>
-        </p:nvSpPr>
-        <p:spPr>
-          <a:xfrm>
-            <a:off x="8101584" y="2377440"/>
-            <a:ext cx="3108960" cy="749808"/>
+          <a:ln/>
+        </p:spPr>
+      </p:sp>
+      <p:sp>
+        <p:nvSpPr>
+          <p:cNvPr id="8" name="Text 6"/>
+          <p:cNvSpPr txBox="1"/>
+          <p:nvPr/>
+        </p:nvSpPr>
+        <p:spPr>
+          <a:xfrm>
+            <a:off x="5870448" y="2286000"/>
+            <a:ext cx="5662879" cy="548640"/>
+          </a:xfrm>
+          <a:prstGeom prst="rect">
+            <a:avLst/>
+          </a:prstGeom>
+          <a:noFill/>
+          <a:ln/>
+        </p:spPr>
+        <p:txBody>
+          <a:bodyPr wrap="square" lIns="0" tIns="0" rIns="0" bIns="0" rtlCol="0" anchor="ctr"/>
+          <a:lstStyle/>
+          <a:p>
+            <a:pPr rtl="1" algn="r" indent="0" marL="0">
+              <a:buNone/>
+            </a:pPr>
+            <a:r>
+              <a:rPr lang="en-US" sz="1350" dirty="0">
+                <a:solidFill>
+                  <a:srgbClr val="DCEBF5"/>
+                </a:solidFill>
+                <a:latin typeface="Arial" pitchFamily="34" charset="0"/>
+                <a:ea typeface="Arial" pitchFamily="34" charset="-122"/>
+                <a:cs typeface="Arial" pitchFamily="34" charset="-120"/>
+              </a:rPr>
+              <a:t>תפעול תזרים — קיטלוג, התאמות, רדיפה אחרי חומר</a:t>
+            </a:r>
+            <a:endParaRPr lang="en-US" sz="1350" dirty="0"/>
+          </a:p>
+        </p:txBody>
+      </p:sp>
+      <p:sp>
+        <p:nvSpPr>
+          <p:cNvPr id="9" name="Text 7"/>
+          <p:cNvSpPr txBox="1"/>
+          <p:nvPr/>
+        </p:nvSpPr>
+        <p:spPr>
+          <a:xfrm>
+            <a:off x="3401568" y="2286000"/>
+            <a:ext cx="2377440" cy="548640"/>
           </a:xfrm>
           <a:prstGeom prst="rect">
             <a:avLst/>
@@ -2435,57 +3093,128 @@
               <a:buNone/>
             </a:pPr>
             <a:r>
-              <a:rPr lang="en-US" sz="1450" dirty="0">
-                <a:solidFill>
-                  <a:srgbClr val="0C4068"/>
-                </a:solidFill>
-                <a:latin typeface="Arial" pitchFamily="34" charset="0"/>
-                <a:ea typeface="Arial" pitchFamily="34" charset="-122"/>
-                <a:cs typeface="Arial" pitchFamily="34" charset="-120"/>
-              </a:rPr>
-              <a:t>ניהול משרד והרשאות</a:t>
-            </a:r>
-            <a:endParaRPr lang="en-US" sz="1450" dirty="0"/>
-          </a:p>
-        </p:txBody>
-      </p:sp>
-      <p:sp>
-        <p:nvSpPr>
-          <p:cNvPr id="6" name="Shape 4"/>
+              <a:rPr lang="en-US" sz="1350" dirty="0">
+                <a:solidFill>
+                  <a:srgbClr val="F2A79E"/>
+                </a:solidFill>
+                <a:latin typeface="Arial" pitchFamily="34" charset="0"/>
+                <a:ea typeface="Arial" pitchFamily="34" charset="-122"/>
+                <a:cs typeface="Arial" pitchFamily="34" charset="-120"/>
+              </a:rPr>
+              <a:t>4–8 שעות</a:t>
+            </a:r>
+            <a:endParaRPr lang="en-US" sz="1350" dirty="0"/>
+          </a:p>
+        </p:txBody>
+      </p:sp>
+      <p:sp>
+        <p:nvSpPr>
+          <p:cNvPr id="10" name="Text 8"/>
+          <p:cNvSpPr txBox="1"/>
+          <p:nvPr/>
+        </p:nvSpPr>
+        <p:spPr>
+          <a:xfrm>
+            <a:off x="658368" y="2286000"/>
+            <a:ext cx="2651760" cy="548640"/>
+          </a:xfrm>
+          <a:prstGeom prst="rect">
+            <a:avLst/>
+          </a:prstGeom>
+          <a:noFill/>
+          <a:ln/>
+        </p:spPr>
+        <p:txBody>
+          <a:bodyPr wrap="square" lIns="0" tIns="0" rIns="0" bIns="0" rtlCol="0" anchor="ctr"/>
+          <a:lstStyle/>
+          <a:p>
+            <a:pPr rtl="1" algn="ctr" indent="0" marL="0">
+              <a:buNone/>
+            </a:pPr>
+            <a:r>
+              <a:rPr lang="en-US" sz="1350" dirty="0">
+                <a:solidFill>
+                  <a:srgbClr val="7FD7B0"/>
+                </a:solidFill>
+                <a:latin typeface="Arial" pitchFamily="34" charset="0"/>
+                <a:ea typeface="Arial" pitchFamily="34" charset="-122"/>
+                <a:cs typeface="Arial" pitchFamily="34" charset="-120"/>
+              </a:rPr>
+              <a:t>0</a:t>
+            </a:r>
+            <a:endParaRPr lang="en-US" sz="1350" dirty="0"/>
+          </a:p>
+        </p:txBody>
+      </p:sp>
+      <p:sp>
+        <p:nvSpPr>
+          <p:cNvPr id="11" name="Shape 9"/>
           <p:cNvSpPr/>
           <p:nvPr/>
         </p:nvSpPr>
         <p:spPr>
           <a:xfrm>
-            <a:off x="4325112" y="2377440"/>
-            <a:ext cx="3383280" cy="749808"/>
-          </a:xfrm>
-          <a:prstGeom prst="roundRect">
-            <a:avLst>
-              <a:gd name="adj" fmla="val 50000"/>
-            </a:avLst>
+            <a:off x="658368" y="2834640"/>
+            <a:ext cx="10874959" cy="10973"/>
+          </a:xfrm>
+          <a:prstGeom prst="rect">
+            <a:avLst/>
           </a:prstGeom>
           <a:solidFill>
-            <a:srgbClr val="F4F7FA"/>
+            <a:srgbClr val="1E5480"/>
           </a:solidFill>
-          <a:ln w="12700">
-            <a:solidFill>
-              <a:srgbClr val="E6ECF4"/>
-            </a:solidFill>
-            <a:prstDash val="solid"/>
-          </a:ln>
-        </p:spPr>
-      </p:sp>
-      <p:sp>
-        <p:nvSpPr>
-          <p:cNvPr id="7" name="Text 5"/>
-          <p:cNvSpPr txBox="1"/>
-          <p:nvPr/>
-        </p:nvSpPr>
-        <p:spPr>
-          <a:xfrm>
-            <a:off x="4462272" y="2377440"/>
-            <a:ext cx="3108960" cy="749808"/>
+          <a:ln/>
+        </p:spPr>
+      </p:sp>
+      <p:sp>
+        <p:nvSpPr>
+          <p:cNvPr id="12" name="Text 10"/>
+          <p:cNvSpPr txBox="1"/>
+          <p:nvPr/>
+        </p:nvSpPr>
+        <p:spPr>
+          <a:xfrm>
+            <a:off x="5870448" y="2880360"/>
+            <a:ext cx="5662879" cy="548640"/>
+          </a:xfrm>
+          <a:prstGeom prst="rect">
+            <a:avLst/>
+          </a:prstGeom>
+          <a:noFill/>
+          <a:ln/>
+        </p:spPr>
+        <p:txBody>
+          <a:bodyPr wrap="square" lIns="0" tIns="0" rIns="0" bIns="0" rtlCol="0" anchor="ctr"/>
+          <a:lstStyle/>
+          <a:p>
+            <a:pPr rtl="1" algn="r" indent="0" marL="0">
+              <a:buNone/>
+            </a:pPr>
+            <a:r>
+              <a:rPr lang="en-US" sz="1350" dirty="0">
+                <a:solidFill>
+                  <a:srgbClr val="DCEBF5"/>
+                </a:solidFill>
+                <a:latin typeface="Arial" pitchFamily="34" charset="0"/>
+                <a:ea typeface="Arial" pitchFamily="34" charset="-122"/>
+                <a:cs typeface="Arial" pitchFamily="34" charset="-120"/>
+              </a:rPr>
+              <a:t>הכנה לפגישה</a:t>
+            </a:r>
+            <a:endParaRPr lang="en-US" sz="1350" dirty="0"/>
+          </a:p>
+        </p:txBody>
+      </p:sp>
+      <p:sp>
+        <p:nvSpPr>
+          <p:cNvPr id="13" name="Text 11"/>
+          <p:cNvSpPr txBox="1"/>
+          <p:nvPr/>
+        </p:nvSpPr>
+        <p:spPr>
+          <a:xfrm>
+            <a:off x="3401568" y="2880360"/>
+            <a:ext cx="2377440" cy="548640"/>
           </a:xfrm>
           <a:prstGeom prst="rect">
             <a:avLst/>
@@ -2501,57 +3230,128 @@
               <a:buNone/>
             </a:pPr>
             <a:r>
-              <a:rPr lang="en-US" sz="1450" dirty="0">
-                <a:solidFill>
-                  <a:srgbClr val="0C4068"/>
-                </a:solidFill>
-                <a:latin typeface="Arial" pitchFamily="34" charset="0"/>
-                <a:ea typeface="Arial" pitchFamily="34" charset="-122"/>
-                <a:cs typeface="Arial" pitchFamily="34" charset="-120"/>
-              </a:rPr>
-              <a:t>חיוב וגבייה</a:t>
-            </a:r>
-            <a:endParaRPr lang="en-US" sz="1450" dirty="0"/>
-          </a:p>
-        </p:txBody>
-      </p:sp>
-      <p:sp>
-        <p:nvSpPr>
-          <p:cNvPr id="8" name="Shape 6"/>
+              <a:rPr lang="en-US" sz="1350" dirty="0">
+                <a:solidFill>
+                  <a:srgbClr val="F2A79E"/>
+                </a:solidFill>
+                <a:latin typeface="Arial" pitchFamily="34" charset="0"/>
+                <a:ea typeface="Arial" pitchFamily="34" charset="-122"/>
+                <a:cs typeface="Arial" pitchFamily="34" charset="-120"/>
+              </a:rPr>
+              <a:t>כשעה</a:t>
+            </a:r>
+            <a:endParaRPr lang="en-US" sz="1350" dirty="0"/>
+          </a:p>
+        </p:txBody>
+      </p:sp>
+      <p:sp>
+        <p:nvSpPr>
+          <p:cNvPr id="14" name="Text 12"/>
+          <p:cNvSpPr txBox="1"/>
+          <p:nvPr/>
+        </p:nvSpPr>
+        <p:spPr>
+          <a:xfrm>
+            <a:off x="658368" y="2880360"/>
+            <a:ext cx="2651760" cy="548640"/>
+          </a:xfrm>
+          <a:prstGeom prst="rect">
+            <a:avLst/>
+          </a:prstGeom>
+          <a:noFill/>
+          <a:ln/>
+        </p:spPr>
+        <p:txBody>
+          <a:bodyPr wrap="square" lIns="0" tIns="0" rIns="0" bIns="0" rtlCol="0" anchor="ctr"/>
+          <a:lstStyle/>
+          <a:p>
+            <a:pPr rtl="1" algn="ctr" indent="0" marL="0">
+              <a:buNone/>
+            </a:pPr>
+            <a:r>
+              <a:rPr lang="en-US" sz="1350" dirty="0">
+                <a:solidFill>
+                  <a:srgbClr val="7FD7B0"/>
+                </a:solidFill>
+                <a:latin typeface="Arial" pitchFamily="34" charset="0"/>
+                <a:ea typeface="Arial" pitchFamily="34" charset="-122"/>
+                <a:cs typeface="Arial" pitchFamily="34" charset="-120"/>
+              </a:rPr>
+              <a:t>דקות</a:t>
+            </a:r>
+            <a:endParaRPr lang="en-US" sz="1350" dirty="0"/>
+          </a:p>
+        </p:txBody>
+      </p:sp>
+      <p:sp>
+        <p:nvSpPr>
+          <p:cNvPr id="15" name="Shape 13"/>
           <p:cNvSpPr/>
           <p:nvPr/>
         </p:nvSpPr>
         <p:spPr>
           <a:xfrm>
-            <a:off x="685800" y="2377440"/>
-            <a:ext cx="3383280" cy="749808"/>
-          </a:xfrm>
-          <a:prstGeom prst="roundRect">
-            <a:avLst>
-              <a:gd name="adj" fmla="val 50000"/>
-            </a:avLst>
+            <a:off x="658368" y="3429000"/>
+            <a:ext cx="10874959" cy="10973"/>
+          </a:xfrm>
+          <a:prstGeom prst="rect">
+            <a:avLst/>
           </a:prstGeom>
           <a:solidFill>
-            <a:srgbClr val="F4F7FA"/>
+            <a:srgbClr val="1E5480"/>
           </a:solidFill>
-          <a:ln w="12700">
-            <a:solidFill>
-              <a:srgbClr val="E6ECF4"/>
-            </a:solidFill>
-            <a:prstDash val="solid"/>
-          </a:ln>
-        </p:spPr>
-      </p:sp>
-      <p:sp>
-        <p:nvSpPr>
-          <p:cNvPr id="9" name="Text 7"/>
-          <p:cNvSpPr txBox="1"/>
-          <p:nvPr/>
-        </p:nvSpPr>
-        <p:spPr>
-          <a:xfrm>
-            <a:off x="822960" y="2377440"/>
-            <a:ext cx="3108960" cy="749808"/>
+          <a:ln/>
+        </p:spPr>
+      </p:sp>
+      <p:sp>
+        <p:nvSpPr>
+          <p:cNvPr id="16" name="Text 14"/>
+          <p:cNvSpPr txBox="1"/>
+          <p:nvPr/>
+        </p:nvSpPr>
+        <p:spPr>
+          <a:xfrm>
+            <a:off x="5870448" y="3474720"/>
+            <a:ext cx="5662879" cy="548640"/>
+          </a:xfrm>
+          <a:prstGeom prst="rect">
+            <a:avLst/>
+          </a:prstGeom>
+          <a:noFill/>
+          <a:ln/>
+        </p:spPr>
+        <p:txBody>
+          <a:bodyPr wrap="square" lIns="0" tIns="0" rIns="0" bIns="0" rtlCol="0" anchor="ctr"/>
+          <a:lstStyle/>
+          <a:p>
+            <a:pPr rtl="1" algn="r" indent="0" marL="0">
+              <a:buNone/>
+            </a:pPr>
+            <a:r>
+              <a:rPr lang="en-US" sz="1350" dirty="0">
+                <a:solidFill>
+                  <a:srgbClr val="DCEBF5"/>
+                </a:solidFill>
+                <a:latin typeface="Arial" pitchFamily="34" charset="0"/>
+                <a:ea typeface="Arial" pitchFamily="34" charset="-122"/>
+                <a:cs typeface="Arial" pitchFamily="34" charset="-120"/>
+              </a:rPr>
+              <a:t>סיכום ומשימות אחרי פגישה</a:t>
+            </a:r>
+            <a:endParaRPr lang="en-US" sz="1350" dirty="0"/>
+          </a:p>
+        </p:txBody>
+      </p:sp>
+      <p:sp>
+        <p:nvSpPr>
+          <p:cNvPr id="17" name="Text 15"/>
+          <p:cNvSpPr txBox="1"/>
+          <p:nvPr/>
+        </p:nvSpPr>
+        <p:spPr>
+          <a:xfrm>
+            <a:off x="3401568" y="3474720"/>
+            <a:ext cx="2377440" cy="548640"/>
           </a:xfrm>
           <a:prstGeom prst="rect">
             <a:avLst/>
@@ -2567,57 +3367,128 @@
               <a:buNone/>
             </a:pPr>
             <a:r>
-              <a:rPr lang="en-US" sz="1450" dirty="0">
-                <a:solidFill>
-                  <a:srgbClr val="0C4068"/>
-                </a:solidFill>
-                <a:latin typeface="Arial" pitchFamily="34" charset="0"/>
-                <a:ea typeface="Arial" pitchFamily="34" charset="-122"/>
-                <a:cs typeface="Arial" pitchFamily="34" charset="-120"/>
-              </a:rPr>
-              <a:t>לידים</a:t>
-            </a:r>
-            <a:endParaRPr lang="en-US" sz="1450" dirty="0"/>
-          </a:p>
-        </p:txBody>
-      </p:sp>
-      <p:sp>
-        <p:nvSpPr>
-          <p:cNvPr id="10" name="Shape 8"/>
+              <a:rPr lang="en-US" sz="1350" dirty="0">
+                <a:solidFill>
+                  <a:srgbClr val="F2A79E"/>
+                </a:solidFill>
+                <a:latin typeface="Arial" pitchFamily="34" charset="0"/>
+                <a:ea typeface="Arial" pitchFamily="34" charset="-122"/>
+                <a:cs typeface="Arial" pitchFamily="34" charset="-120"/>
+              </a:rPr>
+              <a:t>כחצי שעה</a:t>
+            </a:r>
+            <a:endParaRPr lang="en-US" sz="1350" dirty="0"/>
+          </a:p>
+        </p:txBody>
+      </p:sp>
+      <p:sp>
+        <p:nvSpPr>
+          <p:cNvPr id="18" name="Text 16"/>
+          <p:cNvSpPr txBox="1"/>
+          <p:nvPr/>
+        </p:nvSpPr>
+        <p:spPr>
+          <a:xfrm>
+            <a:off x="658368" y="3474720"/>
+            <a:ext cx="2651760" cy="548640"/>
+          </a:xfrm>
+          <a:prstGeom prst="rect">
+            <a:avLst/>
+          </a:prstGeom>
+          <a:noFill/>
+          <a:ln/>
+        </p:spPr>
+        <p:txBody>
+          <a:bodyPr wrap="square" lIns="0" tIns="0" rIns="0" bIns="0" rtlCol="0" anchor="ctr"/>
+          <a:lstStyle/>
+          <a:p>
+            <a:pPr rtl="1" algn="ctr" indent="0" marL="0">
+              <a:buNone/>
+            </a:pPr>
+            <a:r>
+              <a:rPr lang="en-US" sz="1350" dirty="0">
+                <a:solidFill>
+                  <a:srgbClr val="7FD7B0"/>
+                </a:solidFill>
+                <a:latin typeface="Arial" pitchFamily="34" charset="0"/>
+                <a:ea typeface="Arial" pitchFamily="34" charset="-122"/>
+                <a:cs typeface="Arial" pitchFamily="34" charset="-120"/>
+              </a:rPr>
+              <a:t>דקות</a:t>
+            </a:r>
+            <a:endParaRPr lang="en-US" sz="1350" dirty="0"/>
+          </a:p>
+        </p:txBody>
+      </p:sp>
+      <p:sp>
+        <p:nvSpPr>
+          <p:cNvPr id="19" name="Shape 17"/>
           <p:cNvSpPr/>
           <p:nvPr/>
         </p:nvSpPr>
         <p:spPr>
           <a:xfrm>
-            <a:off x="7964424" y="3438144"/>
-            <a:ext cx="3383280" cy="749808"/>
-          </a:xfrm>
-          <a:prstGeom prst="roundRect">
-            <a:avLst>
-              <a:gd name="adj" fmla="val 50000"/>
-            </a:avLst>
+            <a:off x="658368" y="4023360"/>
+            <a:ext cx="10874959" cy="10973"/>
+          </a:xfrm>
+          <a:prstGeom prst="rect">
+            <a:avLst/>
           </a:prstGeom>
           <a:solidFill>
-            <a:srgbClr val="F4F7FA"/>
+            <a:srgbClr val="1E5480"/>
           </a:solidFill>
-          <a:ln w="12700">
-            <a:solidFill>
-              <a:srgbClr val="E6ECF4"/>
-            </a:solidFill>
-            <a:prstDash val="solid"/>
-          </a:ln>
-        </p:spPr>
-      </p:sp>
-      <p:sp>
-        <p:nvSpPr>
-          <p:cNvPr id="11" name="Text 9"/>
-          <p:cNvSpPr txBox="1"/>
-          <p:nvPr/>
-        </p:nvSpPr>
-        <p:spPr>
-          <a:xfrm>
-            <a:off x="8101584" y="3438144"/>
-            <a:ext cx="3108960" cy="749808"/>
+          <a:ln/>
+        </p:spPr>
+      </p:sp>
+      <p:sp>
+        <p:nvSpPr>
+          <p:cNvPr id="20" name="Text 18"/>
+          <p:cNvSpPr txBox="1"/>
+          <p:nvPr/>
+        </p:nvSpPr>
+        <p:spPr>
+          <a:xfrm>
+            <a:off x="5870448" y="4069080"/>
+            <a:ext cx="5662879" cy="548640"/>
+          </a:xfrm>
+          <a:prstGeom prst="rect">
+            <a:avLst/>
+          </a:prstGeom>
+          <a:noFill/>
+          <a:ln/>
+        </p:spPr>
+        <p:txBody>
+          <a:bodyPr wrap="square" lIns="0" tIns="0" rIns="0" bIns="0" rtlCol="0" anchor="ctr"/>
+          <a:lstStyle/>
+          <a:p>
+            <a:pPr rtl="1" algn="r" indent="0" marL="0">
+              <a:buNone/>
+            </a:pPr>
+            <a:r>
+              <a:rPr lang="en-US" sz="1350" dirty="0">
+                <a:solidFill>
+                  <a:srgbClr val="DCEBF5"/>
+                </a:solidFill>
+                <a:latin typeface="Arial" pitchFamily="34" charset="0"/>
+                <a:ea typeface="Arial" pitchFamily="34" charset="-122"/>
+                <a:cs typeface="Arial" pitchFamily="34" charset="-120"/>
+              </a:rPr>
+              <a:t>מענה שוטף בוואטסאפ</a:t>
+            </a:r>
+            <a:endParaRPr lang="en-US" sz="1350" dirty="0"/>
+          </a:p>
+        </p:txBody>
+      </p:sp>
+      <p:sp>
+        <p:nvSpPr>
+          <p:cNvPr id="21" name="Text 19"/>
+          <p:cNvSpPr txBox="1"/>
+          <p:nvPr/>
+        </p:nvSpPr>
+        <p:spPr>
+          <a:xfrm>
+            <a:off x="3401568" y="4069080"/>
+            <a:ext cx="2377440" cy="548640"/>
           </a:xfrm>
           <a:prstGeom prst="rect">
             <a:avLst/>
@@ -2633,57 +3504,148 @@
               <a:buNone/>
             </a:pPr>
             <a:r>
-              <a:rPr lang="en-US" sz="1450" dirty="0">
-                <a:solidFill>
-                  <a:srgbClr val="0C4068"/>
-                </a:solidFill>
-                <a:latin typeface="Arial" pitchFamily="34" charset="0"/>
-                <a:ea typeface="Arial" pitchFamily="34" charset="-122"/>
-                <a:cs typeface="Arial" pitchFamily="34" charset="-120"/>
-              </a:rPr>
-              <a:t>תבניות וואטסאפ מאושרות</a:t>
-            </a:r>
-            <a:endParaRPr lang="en-US" sz="1450" dirty="0"/>
-          </a:p>
-        </p:txBody>
-      </p:sp>
-      <p:sp>
-        <p:nvSpPr>
-          <p:cNvPr id="12" name="Shape 10"/>
+              <a:rPr lang="en-US" sz="1350" dirty="0">
+                <a:solidFill>
+                  <a:srgbClr val="F2A79E"/>
+                </a:solidFill>
+                <a:latin typeface="Arial" pitchFamily="34" charset="0"/>
+                <a:ea typeface="Arial" pitchFamily="34" charset="-122"/>
+                <a:cs typeface="Arial" pitchFamily="34" charset="-120"/>
+              </a:rPr>
+              <a:t>1–2 שעות</a:t>
+            </a:r>
+            <a:endParaRPr lang="en-US" sz="1350" dirty="0"/>
+          </a:p>
+        </p:txBody>
+      </p:sp>
+      <p:sp>
+        <p:nvSpPr>
+          <p:cNvPr id="22" name="Text 20"/>
+          <p:cNvSpPr txBox="1"/>
+          <p:nvPr/>
+        </p:nvSpPr>
+        <p:spPr>
+          <a:xfrm>
+            <a:off x="658368" y="4069080"/>
+            <a:ext cx="2651760" cy="548640"/>
+          </a:xfrm>
+          <a:prstGeom prst="rect">
+            <a:avLst/>
+          </a:prstGeom>
+          <a:noFill/>
+          <a:ln/>
+        </p:spPr>
+        <p:txBody>
+          <a:bodyPr wrap="square" lIns="0" tIns="0" rIns="0" bIns="0" rtlCol="0" anchor="ctr"/>
+          <a:lstStyle/>
+          <a:p>
+            <a:pPr rtl="1" algn="ctr" indent="0" marL="0">
+              <a:buNone/>
+            </a:pPr>
+            <a:r>
+              <a:rPr lang="en-US" sz="1350" dirty="0">
+                <a:solidFill>
+                  <a:srgbClr val="7FD7B0"/>
+                </a:solidFill>
+                <a:latin typeface="Arial" pitchFamily="34" charset="0"/>
+                <a:ea typeface="Arial" pitchFamily="34" charset="-122"/>
+                <a:cs typeface="Arial" pitchFamily="34" charset="-120"/>
+              </a:rPr>
+              <a:t>רק מה שדורש יועץ</a:t>
+            </a:r>
+            <a:endParaRPr lang="en-US" sz="1350" dirty="0"/>
+          </a:p>
+        </p:txBody>
+      </p:sp>
+      <p:sp>
+        <p:nvSpPr>
+          <p:cNvPr id="23" name="Shape 21"/>
           <p:cNvSpPr/>
           <p:nvPr/>
         </p:nvSpPr>
         <p:spPr>
           <a:xfrm>
-            <a:off x="4325112" y="3438144"/>
-            <a:ext cx="3383280" cy="749808"/>
-          </a:xfrm>
-          <a:prstGeom prst="roundRect">
-            <a:avLst>
-              <a:gd name="adj" fmla="val 50000"/>
-            </a:avLst>
+            <a:off x="658368" y="4617720"/>
+            <a:ext cx="10874959" cy="10973"/>
+          </a:xfrm>
+          <a:prstGeom prst="rect">
+            <a:avLst/>
           </a:prstGeom>
           <a:solidFill>
-            <a:srgbClr val="F4F7FA"/>
+            <a:srgbClr val="1E5480"/>
           </a:solidFill>
-          <a:ln w="12700">
-            <a:solidFill>
-              <a:srgbClr val="E6ECF4"/>
-            </a:solidFill>
-            <a:prstDash val="solid"/>
-          </a:ln>
-        </p:spPr>
-      </p:sp>
-      <p:sp>
-        <p:nvSpPr>
-          <p:cNvPr id="13" name="Text 11"/>
-          <p:cNvSpPr txBox="1"/>
-          <p:nvPr/>
-        </p:nvSpPr>
-        <p:spPr>
-          <a:xfrm>
-            <a:off x="4462272" y="3438144"/>
-            <a:ext cx="3108960" cy="749808"/>
+          <a:ln/>
+        </p:spPr>
+      </p:sp>
+      <p:sp>
+        <p:nvSpPr>
+          <p:cNvPr id="24" name="Shape 22"/>
+          <p:cNvSpPr/>
+          <p:nvPr/>
+        </p:nvSpPr>
+        <p:spPr>
+          <a:xfrm>
+            <a:off x="658368" y="4608576"/>
+            <a:ext cx="10874959" cy="27432"/>
+          </a:xfrm>
+          <a:prstGeom prst="rect">
+            <a:avLst/>
+          </a:prstGeom>
+          <a:solidFill>
+            <a:srgbClr val="3F6E96"/>
+          </a:solidFill>
+          <a:ln/>
+        </p:spPr>
+      </p:sp>
+      <p:sp>
+        <p:nvSpPr>
+          <p:cNvPr id="25" name="Text 23"/>
+          <p:cNvSpPr txBox="1"/>
+          <p:nvPr/>
+        </p:nvSpPr>
+        <p:spPr>
+          <a:xfrm>
+            <a:off x="5870448" y="4663440"/>
+            <a:ext cx="5662879" cy="658368"/>
+          </a:xfrm>
+          <a:prstGeom prst="rect">
+            <a:avLst/>
+          </a:prstGeom>
+          <a:noFill/>
+          <a:ln/>
+        </p:spPr>
+        <p:txBody>
+          <a:bodyPr wrap="square" lIns="0" tIns="0" rIns="0" bIns="0" rtlCol="0" anchor="ctr"/>
+          <a:lstStyle/>
+          <a:p>
+            <a:pPr rtl="1" algn="r" indent="0" marL="0">
+              <a:buNone/>
+            </a:pPr>
+            <a:r>
+              <a:rPr lang="en-US" sz="1500" b="1" dirty="0">
+                <a:solidFill>
+                  <a:srgbClr val="DCEBF5"/>
+                </a:solidFill>
+                <a:latin typeface="Arial" pitchFamily="34" charset="0"/>
+                <a:ea typeface="Arial" pitchFamily="34" charset="-122"/>
+                <a:cs typeface="Arial" pitchFamily="34" charset="-120"/>
+              </a:rPr>
+              <a:t>סה״כ פר לקוח לחודש</a:t>
+            </a:r>
+            <a:endParaRPr lang="en-US" sz="1500" dirty="0"/>
+          </a:p>
+        </p:txBody>
+      </p:sp>
+      <p:sp>
+        <p:nvSpPr>
+          <p:cNvPr id="26" name="Text 24"/>
+          <p:cNvSpPr txBox="1"/>
+          <p:nvPr/>
+        </p:nvSpPr>
+        <p:spPr>
+          <a:xfrm>
+            <a:off x="3401568" y="4663440"/>
+            <a:ext cx="2377440" cy="658368"/>
           </a:xfrm>
           <a:prstGeom prst="rect">
             <a:avLst/>
@@ -2699,57 +3661,30 @@
               <a:buNone/>
             </a:pPr>
             <a:r>
-              <a:rPr lang="en-US" sz="1450" dirty="0">
-                <a:solidFill>
-                  <a:srgbClr val="0C4068"/>
-                </a:solidFill>
-                <a:latin typeface="Arial" pitchFamily="34" charset="0"/>
-                <a:ea typeface="Arial" pitchFamily="34" charset="-122"/>
-                <a:cs typeface="Arial" pitchFamily="34" charset="-120"/>
-              </a:rPr>
-              <a:t>שיוך מספרי טלפון</a:t>
-            </a:r>
-            <a:endParaRPr lang="en-US" sz="1450" dirty="0"/>
-          </a:p>
-        </p:txBody>
-      </p:sp>
-      <p:sp>
-        <p:nvSpPr>
-          <p:cNvPr id="14" name="Shape 12"/>
-          <p:cNvSpPr/>
-          <p:nvPr/>
-        </p:nvSpPr>
-        <p:spPr>
-          <a:xfrm>
-            <a:off x="685800" y="3438144"/>
-            <a:ext cx="3383280" cy="749808"/>
-          </a:xfrm>
-          <a:prstGeom prst="roundRect">
-            <a:avLst>
-              <a:gd name="adj" fmla="val 50000"/>
-            </a:avLst>
-          </a:prstGeom>
-          <a:solidFill>
-            <a:srgbClr val="F4F7FA"/>
-          </a:solidFill>
-          <a:ln w="12700">
-            <a:solidFill>
-              <a:srgbClr val="E6ECF4"/>
-            </a:solidFill>
-            <a:prstDash val="solid"/>
-          </a:ln>
-        </p:spPr>
-      </p:sp>
-      <p:sp>
-        <p:nvSpPr>
-          <p:cNvPr id="15" name="Text 13"/>
-          <p:cNvSpPr txBox="1"/>
-          <p:nvPr/>
-        </p:nvSpPr>
-        <p:spPr>
-          <a:xfrm>
-            <a:off x="822960" y="3438144"/>
-            <a:ext cx="3108960" cy="749808"/>
+              <a:rPr lang="en-US" sz="1500" b="1" dirty="0">
+                <a:solidFill>
+                  <a:srgbClr val="F2A79E"/>
+                </a:solidFill>
+                <a:latin typeface="Arial" pitchFamily="34" charset="0"/>
+                <a:ea typeface="Arial" pitchFamily="34" charset="-122"/>
+                <a:cs typeface="Arial" pitchFamily="34" charset="-120"/>
+              </a:rPr>
+              <a:t>7–10 שעות</a:t>
+            </a:r>
+            <a:endParaRPr lang="en-US" sz="1500" dirty="0"/>
+          </a:p>
+        </p:txBody>
+      </p:sp>
+      <p:sp>
+        <p:nvSpPr>
+          <p:cNvPr id="27" name="Text 25"/>
+          <p:cNvSpPr txBox="1"/>
+          <p:nvPr/>
+        </p:nvSpPr>
+        <p:spPr>
+          <a:xfrm>
+            <a:off x="658368" y="4663440"/>
+            <a:ext cx="2651760" cy="658368"/>
           </a:xfrm>
           <a:prstGeom prst="rect">
             <a:avLst/>
@@ -2765,215 +3700,56 @@
               <a:buNone/>
             </a:pPr>
             <a:r>
-              <a:rPr lang="en-US" sz="1450" dirty="0">
-                <a:solidFill>
-                  <a:srgbClr val="0C4068"/>
-                </a:solidFill>
-                <a:latin typeface="Arial" pitchFamily="34" charset="0"/>
-                <a:ea typeface="Arial" pitchFamily="34" charset="-122"/>
-                <a:cs typeface="Arial" pitchFamily="34" charset="-120"/>
-              </a:rPr>
-              <a:t>קטגוריות ובסיס ידע</a:t>
-            </a:r>
-            <a:endParaRPr lang="en-US" sz="1450" dirty="0"/>
-          </a:p>
-        </p:txBody>
-      </p:sp>
-      <p:sp>
-        <p:nvSpPr>
-          <p:cNvPr id="16" name="Shape 14"/>
-          <p:cNvSpPr/>
-          <p:nvPr/>
-        </p:nvSpPr>
-        <p:spPr>
-          <a:xfrm>
-            <a:off x="7964424" y="4498848"/>
-            <a:ext cx="3383280" cy="749808"/>
-          </a:xfrm>
-          <a:prstGeom prst="roundRect">
-            <a:avLst>
-              <a:gd name="adj" fmla="val 50000"/>
-            </a:avLst>
-          </a:prstGeom>
-          <a:solidFill>
-            <a:srgbClr val="F4F7FA"/>
-          </a:solidFill>
-          <a:ln w="12700">
-            <a:solidFill>
-              <a:srgbClr val="E6ECF4"/>
-            </a:solidFill>
-            <a:prstDash val="solid"/>
-          </a:ln>
-        </p:spPr>
-      </p:sp>
-      <p:sp>
-        <p:nvSpPr>
-          <p:cNvPr id="17" name="Text 15"/>
-          <p:cNvSpPr txBox="1"/>
-          <p:nvPr/>
-        </p:nvSpPr>
-        <p:spPr>
-          <a:xfrm>
-            <a:off x="8101584" y="4498848"/>
-            <a:ext cx="3108960" cy="749808"/>
-          </a:xfrm>
-          <a:prstGeom prst="rect">
-            <a:avLst/>
-          </a:prstGeom>
-          <a:noFill/>
-          <a:ln/>
-        </p:spPr>
-        <p:txBody>
-          <a:bodyPr wrap="square" lIns="0" tIns="0" rIns="0" bIns="0" rtlCol="0" anchor="ctr"/>
-          <a:lstStyle/>
-          <a:p>
-            <a:pPr rtl="1" algn="ctr" indent="0" marL="0">
-              <a:buNone/>
-            </a:pPr>
-            <a:r>
-              <a:rPr lang="en-US" sz="1450" dirty="0">
-                <a:solidFill>
-                  <a:srgbClr val="0C4068"/>
-                </a:solidFill>
-                <a:latin typeface="Arial" pitchFamily="34" charset="0"/>
-                <a:ea typeface="Arial" pitchFamily="34" charset="-122"/>
-                <a:cs typeface="Arial" pitchFamily="34" charset="-120"/>
-              </a:rPr>
-              <a:t>בדיקות AI על התוצרים</a:t>
-            </a:r>
-            <a:endParaRPr lang="en-US" sz="1450" dirty="0"/>
-          </a:p>
-        </p:txBody>
-      </p:sp>
-      <p:sp>
-        <p:nvSpPr>
-          <p:cNvPr id="18" name="Shape 16"/>
-          <p:cNvSpPr/>
-          <p:nvPr/>
-        </p:nvSpPr>
-        <p:spPr>
-          <a:xfrm>
-            <a:off x="4325112" y="4498848"/>
-            <a:ext cx="3383280" cy="749808"/>
-          </a:xfrm>
-          <a:prstGeom prst="roundRect">
-            <a:avLst>
-              <a:gd name="adj" fmla="val 50000"/>
-            </a:avLst>
-          </a:prstGeom>
-          <a:solidFill>
-            <a:srgbClr val="F4F7FA"/>
-          </a:solidFill>
-          <a:ln w="12700">
-            <a:solidFill>
-              <a:srgbClr val="E6ECF4"/>
-            </a:solidFill>
-            <a:prstDash val="solid"/>
-          </a:ln>
-        </p:spPr>
-      </p:sp>
-      <p:sp>
-        <p:nvSpPr>
-          <p:cNvPr id="19" name="Text 17"/>
-          <p:cNvSpPr txBox="1"/>
-          <p:nvPr/>
-        </p:nvSpPr>
-        <p:spPr>
-          <a:xfrm>
-            <a:off x="4462272" y="4498848"/>
-            <a:ext cx="3108960" cy="749808"/>
-          </a:xfrm>
-          <a:prstGeom prst="rect">
-            <a:avLst/>
-          </a:prstGeom>
-          <a:noFill/>
-          <a:ln/>
-        </p:spPr>
-        <p:txBody>
-          <a:bodyPr wrap="square" lIns="0" tIns="0" rIns="0" bIns="0" rtlCol="0" anchor="ctr"/>
-          <a:lstStyle/>
-          <a:p>
-            <a:pPr rtl="1" algn="ctr" indent="0" marL="0">
-              <a:buNone/>
-            </a:pPr>
-            <a:r>
-              <a:rPr lang="en-US" sz="1450" dirty="0">
-                <a:solidFill>
-                  <a:srgbClr val="0C4068"/>
-                </a:solidFill>
-                <a:latin typeface="Arial" pitchFamily="34" charset="0"/>
-                <a:ea typeface="Arial" pitchFamily="34" charset="-122"/>
-                <a:cs typeface="Arial" pitchFamily="34" charset="-120"/>
-              </a:rPr>
-              <a:t>עזרה מותאמת בכל מסך</a:t>
-            </a:r>
-            <a:endParaRPr lang="en-US" sz="1450" dirty="0"/>
-          </a:p>
-        </p:txBody>
-      </p:sp>
-      <p:sp>
-        <p:nvSpPr>
-          <p:cNvPr id="20" name="Shape 18"/>
-          <p:cNvSpPr/>
-          <p:nvPr/>
-        </p:nvSpPr>
-        <p:spPr>
-          <a:xfrm>
-            <a:off x="685800" y="4498848"/>
-            <a:ext cx="3383280" cy="749808"/>
-          </a:xfrm>
-          <a:prstGeom prst="roundRect">
-            <a:avLst>
-              <a:gd name="adj" fmla="val 50000"/>
-            </a:avLst>
-          </a:prstGeom>
-          <a:solidFill>
-            <a:srgbClr val="F4F7FA"/>
-          </a:solidFill>
-          <a:ln w="12700">
-            <a:solidFill>
-              <a:srgbClr val="E6ECF4"/>
-            </a:solidFill>
-            <a:prstDash val="solid"/>
-          </a:ln>
-        </p:spPr>
-      </p:sp>
-      <p:sp>
-        <p:nvSpPr>
-          <p:cNvPr id="21" name="Text 19"/>
-          <p:cNvSpPr txBox="1"/>
-          <p:nvPr/>
-        </p:nvSpPr>
-        <p:spPr>
-          <a:xfrm>
-            <a:off x="822960" y="4498848"/>
-            <a:ext cx="3108960" cy="749808"/>
-          </a:xfrm>
-          <a:prstGeom prst="rect">
-            <a:avLst/>
-          </a:prstGeom>
-          <a:noFill/>
-          <a:ln/>
-        </p:spPr>
-        <p:txBody>
-          <a:bodyPr wrap="square" lIns="0" tIns="0" rIns="0" bIns="0" rtlCol="0" anchor="ctr"/>
-          <a:lstStyle/>
-          <a:p>
-            <a:pPr rtl="1" algn="ctr" indent="0" marL="0">
-              <a:buNone/>
-            </a:pPr>
-            <a:r>
-              <a:rPr lang="en-US" sz="1450" dirty="0">
-                <a:solidFill>
-                  <a:srgbClr val="0C4068"/>
-                </a:solidFill>
-                <a:latin typeface="Arial" pitchFamily="34" charset="0"/>
-                <a:ea typeface="Arial" pitchFamily="34" charset="-122"/>
-                <a:cs typeface="Arial" pitchFamily="34" charset="-120"/>
-              </a:rPr>
-              <a:t>משימות ובקשות מ־HK</a:t>
-            </a:r>
-            <a:endParaRPr lang="en-US" sz="1450" dirty="0"/>
+              <a:rPr lang="en-US" sz="1500" b="1" dirty="0">
+                <a:solidFill>
+                  <a:srgbClr val="7FD7B0"/>
+                </a:solidFill>
+                <a:latin typeface="Arial" pitchFamily="34" charset="0"/>
+                <a:ea typeface="Arial" pitchFamily="34" charset="-122"/>
+                <a:cs typeface="Arial" pitchFamily="34" charset="-120"/>
+              </a:rPr>
+              <a:t>1–1.5 שעות</a:t>
+            </a:r>
+            <a:endParaRPr lang="en-US" sz="1500" dirty="0"/>
+          </a:p>
+        </p:txBody>
+      </p:sp>
+      <p:sp>
+        <p:nvSpPr>
+          <p:cNvPr id="28" name="Text 26"/>
+          <p:cNvSpPr txBox="1"/>
+          <p:nvPr/>
+        </p:nvSpPr>
+        <p:spPr>
+          <a:xfrm>
+            <a:off x="658368" y="5989320"/>
+            <a:ext cx="10874959" cy="548640"/>
+          </a:xfrm>
+          <a:prstGeom prst="rect">
+            <a:avLst/>
+          </a:prstGeom>
+          <a:noFill/>
+          <a:ln/>
+        </p:spPr>
+        <p:txBody>
+          <a:bodyPr wrap="square" lIns="0" tIns="0" rIns="0" bIns="0" rtlCol="0" anchor="ctr"/>
+          <a:lstStyle/>
+          <a:p>
+            <a:pPr rtl="1" algn="r" indent="0" marL="0">
+              <a:buNone/>
+            </a:pPr>
+            <a:r>
+              <a:rPr lang="en-US" sz="1350" dirty="0">
+                <a:solidFill>
+                  <a:srgbClr val="9FC0DA"/>
+                </a:solidFill>
+                <a:latin typeface="Arial" pitchFamily="34" charset="0"/>
+                <a:ea typeface="Arial" pitchFamily="34" charset="-122"/>
+                <a:cs typeface="Arial" pitchFamily="34" charset="-120"/>
+              </a:rPr>
+              <a:t>80 שעות עבודת לקוחות בחודש מכסות היום 8–10 לקוחות. כשהתפעול יורד — אותן שעות מכסות 25–30.</a:t>
+            </a:r>
+            <a:endParaRPr lang="en-US" sz="1350" dirty="0"/>
           </a:p>
         </p:txBody>
       </p:sp>
@@ -3017,24 +3793,24 @@
         </p:nvSpPr>
         <p:spPr>
           <a:xfrm>
-            <a:off x="685800" y="548640"/>
-            <a:ext cx="10820095" cy="329184"/>
-          </a:xfrm>
-          <a:prstGeom prst="rect">
-            <a:avLst/>
-          </a:prstGeom>
-          <a:noFill/>
-          <a:ln/>
-        </p:spPr>
-        <p:txBody>
-          <a:bodyPr wrap="square" lIns="0" tIns="0" rIns="0" bIns="0" rtlCol="0" anchor="ctr"/>
-          <a:lstStyle/>
-          <a:p>
-            <a:pPr rtl="1" algn="r" indent="0" marL="0">
-              <a:buNone/>
-            </a:pPr>
-            <a:r>
-              <a:rPr lang="en-US" sz="1400" b="1" dirty="0">
+            <a:off x="658368" y="457200"/>
+            <a:ext cx="10874959" cy="274320"/>
+          </a:xfrm>
+          <a:prstGeom prst="rect">
+            <a:avLst/>
+          </a:prstGeom>
+          <a:noFill/>
+          <a:ln/>
+        </p:spPr>
+        <p:txBody>
+          <a:bodyPr wrap="square" lIns="0" tIns="0" rIns="0" bIns="0" rtlCol="0" anchor="ctr"/>
+          <a:lstStyle/>
+          <a:p>
+            <a:pPr rtl="1" algn="r" indent="0" marL="0">
+              <a:buNone/>
+            </a:pPr>
+            <a:r>
+              <a:rPr lang="en-US" sz="1250" b="1" dirty="0">
                 <a:solidFill>
                   <a:srgbClr val="E8635A"/>
                 </a:solidFill>
@@ -3042,9 +3818,9 @@
                 <a:ea typeface="Arial" pitchFamily="34" charset="-122"/>
                 <a:cs typeface="Arial" pitchFamily="34" charset="-120"/>
               </a:rPr>
-              <a:t>השורה התחתונה</a:t>
-            </a:r>
-            <a:endParaRPr lang="en-US" sz="1400" dirty="0"/>
+              <a:t>איך מתחילים</a:t>
+            </a:r>
+            <a:endParaRPr lang="en-US" sz="1250" dirty="0"/>
           </a:p>
         </p:txBody>
       </p:sp>
@@ -3056,24 +3832,24 @@
         </p:nvSpPr>
         <p:spPr>
           <a:xfrm>
-            <a:off x="685800" y="914400"/>
-            <a:ext cx="10820095" cy="777240"/>
-          </a:xfrm>
-          <a:prstGeom prst="rect">
-            <a:avLst/>
-          </a:prstGeom>
-          <a:noFill/>
-          <a:ln/>
-        </p:spPr>
-        <p:txBody>
-          <a:bodyPr wrap="square" lIns="0" tIns="0" rIns="0" bIns="0" rtlCol="0" anchor="ctr"/>
-          <a:lstStyle/>
-          <a:p>
-            <a:pPr rtl="1" algn="r" indent="0" marL="0">
-              <a:buNone/>
-            </a:pPr>
-            <a:r>
-              <a:rPr lang="en-US" sz="3600" b="1" dirty="0">
+            <a:off x="658368" y="768096"/>
+            <a:ext cx="10874959" cy="566928"/>
+          </a:xfrm>
+          <a:prstGeom prst="rect">
+            <a:avLst/>
+          </a:prstGeom>
+          <a:noFill/>
+          <a:ln/>
+        </p:spPr>
+        <p:txBody>
+          <a:bodyPr wrap="square" lIns="0" tIns="0" rIns="0" bIns="0" rtlCol="0" anchor="ctr"/>
+          <a:lstStyle/>
+          <a:p>
+            <a:pPr rtl="1" algn="r" indent="0" marL="0">
+              <a:buNone/>
+            </a:pPr>
+            <a:r>
+              <a:rPr lang="en-US" sz="2900" b="1" dirty="0">
                 <a:solidFill>
                   <a:srgbClr val="FFFFFF"/>
                 </a:solidFill>
@@ -3081,301 +3857,85 @@
                 <a:ea typeface="Arial" pitchFamily="34" charset="-122"/>
                 <a:cs typeface="Arial" pitchFamily="34" charset="-120"/>
               </a:rPr>
-              <a:t>כל מה שאינו ייעוץ — יורד ממך.</a:t>
-            </a:r>
-            <a:endParaRPr lang="en-US" sz="3600" dirty="0"/>
-          </a:p>
-        </p:txBody>
-      </p:sp>
-      <p:sp>
-        <p:nvSpPr>
-          <p:cNvPr id="4" name="Text 2"/>
-          <p:cNvSpPr txBox="1"/>
-          <p:nvPr/>
-        </p:nvSpPr>
-        <p:spPr>
-          <a:xfrm>
-            <a:off x="8214055" y="2103120"/>
-            <a:ext cx="3291840" cy="1005840"/>
-          </a:xfrm>
-          <a:prstGeom prst="rect">
-            <a:avLst/>
-          </a:prstGeom>
-          <a:noFill/>
-          <a:ln/>
-        </p:spPr>
-        <p:txBody>
-          <a:bodyPr wrap="square" lIns="0" tIns="0" rIns="0" bIns="0" rtlCol="0" anchor="ctr"/>
-          <a:lstStyle/>
-          <a:p>
-            <a:pPr algn="ctr" indent="0" marL="0">
-              <a:buNone/>
-            </a:pPr>
-            <a:r>
-              <a:rPr lang="en-US" sz="5200" b="1" dirty="0">
-                <a:solidFill>
-                  <a:srgbClr val="39ABE2"/>
-                </a:solidFill>
-                <a:latin typeface="Arial" pitchFamily="34" charset="0"/>
-                <a:ea typeface="Arial" pitchFamily="34" charset="-122"/>
-                <a:cs typeface="Arial" pitchFamily="34" charset="-120"/>
-              </a:rPr>
-              <a:t>0</a:t>
-            </a:r>
-            <a:endParaRPr lang="en-US" sz="5200" dirty="0"/>
-          </a:p>
-        </p:txBody>
-      </p:sp>
-      <p:sp>
-        <p:nvSpPr>
-          <p:cNvPr id="5" name="Text 3"/>
-          <p:cNvSpPr txBox="1"/>
-          <p:nvPr/>
-        </p:nvSpPr>
-        <p:spPr>
-          <a:xfrm>
-            <a:off x="8488375" y="3108960"/>
-            <a:ext cx="2743200" cy="640080"/>
-          </a:xfrm>
-          <a:prstGeom prst="rect">
-            <a:avLst/>
-          </a:prstGeom>
-          <a:noFill/>
-          <a:ln/>
-        </p:spPr>
-        <p:txBody>
-          <a:bodyPr wrap="square" lIns="0" tIns="0" rIns="0" bIns="0" rtlCol="0" anchor="ctr"/>
-          <a:lstStyle/>
-          <a:p>
-            <a:pPr rtl="1" algn="ctr" indent="0" marL="0">
-              <a:buNone/>
-            </a:pPr>
-            <a:r>
-              <a:rPr lang="en-US" sz="1350" dirty="0">
-                <a:solidFill>
-                  <a:srgbClr val="9FC0DA"/>
-                </a:solidFill>
-                <a:latin typeface="Arial" pitchFamily="34" charset="0"/>
-                <a:ea typeface="Arial" pitchFamily="34" charset="-122"/>
-                <a:cs typeface="Arial" pitchFamily="34" charset="-120"/>
-              </a:rPr>
-              <a:t>שעות תפעול פר לקוח</a:t>
-            </a:r>
-            <a:endParaRPr lang="en-US" sz="1350" dirty="0"/>
-          </a:p>
-        </p:txBody>
-      </p:sp>
-      <p:sp>
-        <p:nvSpPr>
-          <p:cNvPr id="6" name="Text 4"/>
-          <p:cNvSpPr txBox="1"/>
-          <p:nvPr/>
-        </p:nvSpPr>
-        <p:spPr>
-          <a:xfrm>
-            <a:off x="4647895" y="2103120"/>
-            <a:ext cx="3291840" cy="1005840"/>
-          </a:xfrm>
-          <a:prstGeom prst="rect">
-            <a:avLst/>
-          </a:prstGeom>
-          <a:noFill/>
-          <a:ln/>
-        </p:spPr>
-        <p:txBody>
-          <a:bodyPr wrap="square" lIns="0" tIns="0" rIns="0" bIns="0" rtlCol="0" anchor="ctr"/>
-          <a:lstStyle/>
-          <a:p>
-            <a:pPr algn="ctr" indent="0" marL="0">
-              <a:buNone/>
-            </a:pPr>
-            <a:r>
-              <a:rPr lang="en-US" sz="5200" b="1" dirty="0">
-                <a:solidFill>
-                  <a:srgbClr val="39ABE2"/>
-                </a:solidFill>
-                <a:latin typeface="Arial" pitchFamily="34" charset="0"/>
-                <a:ea typeface="Arial" pitchFamily="34" charset="-122"/>
-                <a:cs typeface="Arial" pitchFamily="34" charset="-120"/>
-              </a:rPr>
-              <a:t>25–30</a:t>
-            </a:r>
-            <a:endParaRPr lang="en-US" sz="5200" dirty="0"/>
-          </a:p>
-        </p:txBody>
-      </p:sp>
-      <p:sp>
-        <p:nvSpPr>
-          <p:cNvPr id="7" name="Text 5"/>
-          <p:cNvSpPr txBox="1"/>
-          <p:nvPr/>
-        </p:nvSpPr>
-        <p:spPr>
-          <a:xfrm>
-            <a:off x="4922215" y="3108960"/>
-            <a:ext cx="2743200" cy="640080"/>
-          </a:xfrm>
-          <a:prstGeom prst="rect">
-            <a:avLst/>
-          </a:prstGeom>
-          <a:noFill/>
-          <a:ln/>
-        </p:spPr>
-        <p:txBody>
-          <a:bodyPr wrap="square" lIns="0" tIns="0" rIns="0" bIns="0" rtlCol="0" anchor="ctr"/>
-          <a:lstStyle/>
-          <a:p>
-            <a:pPr rtl="1" algn="ctr" indent="0" marL="0">
-              <a:buNone/>
-            </a:pPr>
-            <a:r>
-              <a:rPr lang="en-US" sz="1350" dirty="0">
-                <a:solidFill>
-                  <a:srgbClr val="9FC0DA"/>
-                </a:solidFill>
-                <a:latin typeface="Arial" pitchFamily="34" charset="0"/>
-                <a:ea typeface="Arial" pitchFamily="34" charset="-122"/>
-                <a:cs typeface="Arial" pitchFamily="34" charset="-120"/>
-              </a:rPr>
-              <a:t>לקוחות באותו יום עבודה</a:t>
-            </a:r>
-            <a:endParaRPr lang="en-US" sz="1350" dirty="0"/>
-          </a:p>
-        </p:txBody>
-      </p:sp>
-      <p:sp>
-        <p:nvSpPr>
-          <p:cNvPr id="8" name="Text 6"/>
-          <p:cNvSpPr txBox="1"/>
-          <p:nvPr/>
-        </p:nvSpPr>
-        <p:spPr>
-          <a:xfrm>
-            <a:off x="1081735" y="2103120"/>
-            <a:ext cx="3291840" cy="1005840"/>
-          </a:xfrm>
-          <a:prstGeom prst="rect">
-            <a:avLst/>
-          </a:prstGeom>
-          <a:noFill/>
-          <a:ln/>
-        </p:spPr>
-        <p:txBody>
-          <a:bodyPr wrap="square" lIns="0" tIns="0" rIns="0" bIns="0" rtlCol="0" anchor="ctr"/>
-          <a:lstStyle/>
-          <a:p>
-            <a:pPr algn="ctr" indent="0" marL="0">
-              <a:buNone/>
-            </a:pPr>
-            <a:r>
-              <a:rPr lang="en-US" sz="5200" b="1" dirty="0">
-                <a:solidFill>
-                  <a:srgbClr val="39ABE2"/>
-                </a:solidFill>
-                <a:latin typeface="Arial" pitchFamily="34" charset="0"/>
-                <a:ea typeface="Arial" pitchFamily="34" charset="-122"/>
-                <a:cs typeface="Arial" pitchFamily="34" charset="-120"/>
-              </a:rPr>
-              <a:t>כל בוקר</a:t>
-            </a:r>
-            <a:endParaRPr lang="en-US" sz="5200" dirty="0"/>
-          </a:p>
-        </p:txBody>
-      </p:sp>
-      <p:sp>
-        <p:nvSpPr>
-          <p:cNvPr id="9" name="Text 7"/>
-          <p:cNvSpPr txBox="1"/>
-          <p:nvPr/>
-        </p:nvSpPr>
-        <p:spPr>
-          <a:xfrm>
-            <a:off x="1356055" y="3108960"/>
-            <a:ext cx="2743200" cy="640080"/>
-          </a:xfrm>
-          <a:prstGeom prst="rect">
-            <a:avLst/>
-          </a:prstGeom>
-          <a:noFill/>
-          <a:ln/>
-        </p:spPr>
-        <p:txBody>
-          <a:bodyPr wrap="square" lIns="0" tIns="0" rIns="0" bIns="0" rtlCol="0" anchor="ctr"/>
-          <a:lstStyle/>
-          <a:p>
-            <a:pPr rtl="1" algn="ctr" indent="0" marL="0">
-              <a:buNone/>
-            </a:pPr>
-            <a:r>
-              <a:rPr lang="en-US" sz="1350" dirty="0">
-                <a:solidFill>
-                  <a:srgbClr val="9FC0DA"/>
-                </a:solidFill>
-                <a:latin typeface="Arial" pitchFamily="34" charset="0"/>
-                <a:ea typeface="Arial" pitchFamily="34" charset="-122"/>
-                <a:cs typeface="Arial" pitchFamily="34" charset="-120"/>
-              </a:rPr>
-              <a:t>הלקוח מטופל בשם המשרד שלך</a:t>
-            </a:r>
-            <a:endParaRPr lang="en-US" sz="1350" dirty="0"/>
-          </a:p>
-        </p:txBody>
-      </p:sp>
-      <p:sp>
-        <p:nvSpPr>
-          <p:cNvPr id="10" name="Shape 8"/>
+              <a:t>לקוח אחד, חודש הרצה</a:t>
+            </a:r>
+            <a:endParaRPr lang="en-US" sz="2900" dirty="0"/>
+          </a:p>
+        </p:txBody>
+      </p:sp>
+      <p:sp>
+        <p:nvSpPr>
+          <p:cNvPr id="4" name="Shape 2"/>
           <p:cNvSpPr/>
           <p:nvPr/>
         </p:nvSpPr>
         <p:spPr>
           <a:xfrm>
-            <a:off x="6568135" y="4206240"/>
-            <a:ext cx="4937760" cy="960120"/>
+            <a:off x="8003743" y="2011680"/>
+            <a:ext cx="3529584" cy="2743200"/>
           </a:xfrm>
           <a:prstGeom prst="roundRect">
             <a:avLst>
-              <a:gd name="adj" fmla="val 9524"/>
+              <a:gd name="adj" fmla="val 2333"/>
             </a:avLst>
+          </a:prstGeom>
+          <a:solidFill>
+            <a:srgbClr val="104A76"/>
+          </a:solidFill>
+          <a:ln w="12700">
+            <a:solidFill>
+              <a:srgbClr val="2A6491"/>
+            </a:solidFill>
+            <a:prstDash val="solid"/>
+          </a:ln>
+        </p:spPr>
+      </p:sp>
+      <p:sp>
+        <p:nvSpPr>
+          <p:cNvPr id="5" name="Shape 3"/>
+          <p:cNvSpPr/>
+          <p:nvPr/>
+        </p:nvSpPr>
+        <p:spPr>
+          <a:xfrm>
+            <a:off x="10710367" y="2395728"/>
+            <a:ext cx="475488" cy="475488"/>
+          </a:xfrm>
+          <a:prstGeom prst="ellipse">
+            <a:avLst/>
           </a:prstGeom>
           <a:solidFill>
             <a:srgbClr val="E8635A"/>
           </a:solidFill>
           <a:ln/>
-          <a:effectLst>
-            <a:outerShdw sx="100000" sy="100000" kx="0" ky="0" algn="bl" rotWithShape="0" blurRad="177800" dist="50800" dir="5400000">
-              <a:srgbClr val="0A3557">
-                <a:alpha val="40000"/>
-              </a:srgbClr>
-            </a:outerShdw>
-          </a:effectLst>
-        </p:spPr>
-      </p:sp>
-      <p:sp>
-        <p:nvSpPr>
-          <p:cNvPr id="11" name="Text 9"/>
-          <p:cNvSpPr txBox="1"/>
-          <p:nvPr/>
-        </p:nvSpPr>
-        <p:spPr>
-          <a:xfrm>
-            <a:off x="6568135" y="4206240"/>
-            <a:ext cx="4937760" cy="960120"/>
-          </a:xfrm>
-          <a:prstGeom prst="rect">
-            <a:avLst/>
-          </a:prstGeom>
-          <a:noFill/>
-          <a:ln/>
-        </p:spPr>
-        <p:txBody>
-          <a:bodyPr wrap="square" lIns="0" tIns="0" rIns="0" bIns="0" rtlCol="0" anchor="ctr"/>
-          <a:lstStyle/>
-          <a:p>
-            <a:pPr rtl="1" algn="ctr" indent="0" marL="0">
-              <a:buNone/>
-            </a:pPr>
-            <a:r>
-              <a:rPr lang="en-US" sz="2600" b="1" dirty="0">
+        </p:spPr>
+      </p:sp>
+      <p:sp>
+        <p:nvSpPr>
+          <p:cNvPr id="6" name="Text 4"/>
+          <p:cNvSpPr txBox="1"/>
+          <p:nvPr/>
+        </p:nvSpPr>
+        <p:spPr>
+          <a:xfrm>
+            <a:off x="10710367" y="2395728"/>
+            <a:ext cx="475488" cy="475488"/>
+          </a:xfrm>
+          <a:prstGeom prst="rect">
+            <a:avLst/>
+          </a:prstGeom>
+          <a:noFill/>
+          <a:ln/>
+        </p:spPr>
+        <p:txBody>
+          <a:bodyPr wrap="square" lIns="0" tIns="0" rIns="0" bIns="0" rtlCol="0" anchor="ctr"/>
+          <a:lstStyle/>
+          <a:p>
+            <a:pPr algn="ctr" indent="0" marL="0">
+              <a:buNone/>
+            </a:pPr>
+            <a:r>
+              <a:rPr lang="en-US" sz="1500" b="1" dirty="0">
                 <a:solidFill>
                   <a:srgbClr val="FFFFFF"/>
                 </a:solidFill>
@@ -3383,22 +3943,61 @@
                 <a:ea typeface="Arial" pitchFamily="34" charset="-122"/>
                 <a:cs typeface="Arial" pitchFamily="34" charset="-120"/>
               </a:rPr>
-              <a:t>נתחיל מלקוח אחד.</a:t>
-            </a:r>
-            <a:endParaRPr lang="en-US" sz="2600" dirty="0"/>
-          </a:p>
-        </p:txBody>
-      </p:sp>
-      <p:sp>
-        <p:nvSpPr>
-          <p:cNvPr id="12" name="Text 10"/>
-          <p:cNvSpPr txBox="1"/>
-          <p:nvPr/>
-        </p:nvSpPr>
-        <p:spPr>
-          <a:xfrm>
-            <a:off x="685800" y="5440680"/>
-            <a:ext cx="10820095" cy="868680"/>
+              <a:t>1</a:t>
+            </a:r>
+            <a:endParaRPr lang="en-US" sz="1500" dirty="0"/>
+          </a:p>
+        </p:txBody>
+      </p:sp>
+      <p:sp>
+        <p:nvSpPr>
+          <p:cNvPr id="7" name="Text 5"/>
+          <p:cNvSpPr txBox="1"/>
+          <p:nvPr/>
+        </p:nvSpPr>
+        <p:spPr>
+          <a:xfrm>
+            <a:off x="8241487" y="3063240"/>
+            <a:ext cx="3054096" cy="411480"/>
+          </a:xfrm>
+          <a:prstGeom prst="rect">
+            <a:avLst/>
+          </a:prstGeom>
+          <a:noFill/>
+          <a:ln/>
+        </p:spPr>
+        <p:txBody>
+          <a:bodyPr wrap="square" lIns="0" tIns="0" rIns="0" bIns="0" rtlCol="0" anchor="ctr"/>
+          <a:lstStyle/>
+          <a:p>
+            <a:pPr rtl="1" algn="r" indent="0" marL="0">
+              <a:buNone/>
+            </a:pPr>
+            <a:r>
+              <a:rPr lang="en-US" sz="1900" b="1" dirty="0">
+                <a:solidFill>
+                  <a:srgbClr val="FFFFFF"/>
+                </a:solidFill>
+                <a:latin typeface="Arial" pitchFamily="34" charset="0"/>
+                <a:ea typeface="Arial" pitchFamily="34" charset="-122"/>
+                <a:cs typeface="Arial" pitchFamily="34" charset="-120"/>
+              </a:rPr>
+              <a:t>בוחרים לקוח</a:t>
+            </a:r>
+            <a:endParaRPr lang="en-US" sz="1900" dirty="0"/>
+          </a:p>
+        </p:txBody>
+      </p:sp>
+      <p:sp>
+        <p:nvSpPr>
+          <p:cNvPr id="8" name="Text 6"/>
+          <p:cNvSpPr txBox="1"/>
+          <p:nvPr/>
+        </p:nvSpPr>
+        <p:spPr>
+          <a:xfrm>
+            <a:off x="8241487" y="3529584"/>
+            <a:ext cx="3054096" cy="1005840"/>
           </a:xfrm>
           <a:prstGeom prst="rect">
             <a:avLst/>
@@ -3417,7 +4016,7 @@
               <a:buNone/>
             </a:pPr>
             <a:r>
-              <a:rPr lang="en-US" sz="1600" dirty="0">
+              <a:rPr lang="en-US" sz="1200" dirty="0">
                 <a:solidFill>
                   <a:srgbClr val="9FC0DA"/>
                 </a:solidFill>
@@ -3425,10 +4024,157 @@
                 <a:ea typeface="Arial" pitchFamily="34" charset="-122"/>
                 <a:cs typeface="Arial" pitchFamily="34" charset="-120"/>
               </a:rPr>
-              <a:t>נבחר יחד לקוח שהתפעול שלו כבד, ו־HK תריץ לו חודש מלא.</a:t>
-            </a:r>
-            <a:endParaRPr lang="en-US" sz="1600" dirty="0"/>
-          </a:p>
+              <a:t>עדיף כזה שהתפעול שלו כבד — שם ההבדל נראה כבר בחודש הראשון</a:t>
+            </a:r>
+            <a:endParaRPr lang="en-US" sz="1200" dirty="0"/>
+          </a:p>
+        </p:txBody>
+      </p:sp>
+      <p:sp>
+        <p:nvSpPr>
+          <p:cNvPr id="9" name="Shape 7"/>
+          <p:cNvSpPr/>
+          <p:nvPr/>
+        </p:nvSpPr>
+        <p:spPr>
+          <a:xfrm>
+            <a:off x="4218127" y="2011680"/>
+            <a:ext cx="3529584" cy="2743200"/>
+          </a:xfrm>
+          <a:prstGeom prst="roundRect">
+            <a:avLst>
+              <a:gd name="adj" fmla="val 2333"/>
+            </a:avLst>
+          </a:prstGeom>
+          <a:solidFill>
+            <a:srgbClr val="104A76"/>
+          </a:solidFill>
+          <a:ln w="12700">
+            <a:solidFill>
+              <a:srgbClr val="2A6491"/>
+            </a:solidFill>
+            <a:prstDash val="solid"/>
+          </a:ln>
+        </p:spPr>
+      </p:sp>
+      <p:sp>
+        <p:nvSpPr>
+          <p:cNvPr id="10" name="Shape 8"/>
+          <p:cNvSpPr/>
+          <p:nvPr/>
+        </p:nvSpPr>
+        <p:spPr>
+          <a:xfrm>
+            <a:off x="6924751" y="2395728"/>
+            <a:ext cx="475488" cy="475488"/>
+          </a:xfrm>
+          <a:prstGeom prst="ellipse">
+            <a:avLst/>
+          </a:prstGeom>
+          <a:solidFill>
+            <a:srgbClr val="E8635A"/>
+          </a:solidFill>
+          <a:ln/>
+        </p:spPr>
+      </p:sp>
+      <p:sp>
+        <p:nvSpPr>
+          <p:cNvPr id="11" name="Text 9"/>
+          <p:cNvSpPr txBox="1"/>
+          <p:nvPr/>
+        </p:nvSpPr>
+        <p:spPr>
+          <a:xfrm>
+            <a:off x="6924751" y="2395728"/>
+            <a:ext cx="475488" cy="475488"/>
+          </a:xfrm>
+          <a:prstGeom prst="rect">
+            <a:avLst/>
+          </a:prstGeom>
+          <a:noFill/>
+          <a:ln/>
+        </p:spPr>
+        <p:txBody>
+          <a:bodyPr wrap="square" lIns="0" tIns="0" rIns="0" bIns="0" rtlCol="0" anchor="ctr"/>
+          <a:lstStyle/>
+          <a:p>
+            <a:pPr algn="ctr" indent="0" marL="0">
+              <a:buNone/>
+            </a:pPr>
+            <a:r>
+              <a:rPr lang="en-US" sz="1500" b="1" dirty="0">
+                <a:solidFill>
+                  <a:srgbClr val="FFFFFF"/>
+                </a:solidFill>
+                <a:latin typeface="Arial" pitchFamily="34" charset="0"/>
+                <a:ea typeface="Arial" pitchFamily="34" charset="-122"/>
+                <a:cs typeface="Arial" pitchFamily="34" charset="-120"/>
+              </a:rPr>
+              <a:t>2</a:t>
+            </a:r>
+            <a:endParaRPr lang="en-US" sz="1500" dirty="0"/>
+          </a:p>
+        </p:txBody>
+      </p:sp>
+      <p:sp>
+        <p:nvSpPr>
+          <p:cNvPr id="12" name="Text 10"/>
+          <p:cNvSpPr txBox="1"/>
+          <p:nvPr/>
+        </p:nvSpPr>
+        <p:spPr>
+          <a:xfrm>
+            <a:off x="4455871" y="3063240"/>
+            <a:ext cx="3054096" cy="411480"/>
+          </a:xfrm>
+          <a:prstGeom prst="rect">
+            <a:avLst/>
+          </a:prstGeom>
+          <a:noFill/>
+          <a:ln/>
+        </p:spPr>
+        <p:txBody>
+          <a:bodyPr wrap="square" lIns="0" tIns="0" rIns="0" bIns="0" rtlCol="0" anchor="ctr"/>
+          <a:lstStyle/>
+          <a:p>
+            <a:pPr rtl="1" algn="r" indent="0" marL="0">
+              <a:buNone/>
+            </a:pPr>
+            <a:r>
+              <a:rPr lang="en-US" sz="1900" b="1" dirty="0">
+                <a:solidFill>
+                  <a:srgbClr val="FFFFFF"/>
+                </a:solidFill>
+                <a:latin typeface="Arial" pitchFamily="34" charset="0"/>
+                <a:ea typeface="Arial" pitchFamily="34" charset="-122"/>
+                <a:cs typeface="Arial" pitchFamily="34" charset="-120"/>
+              </a:rPr>
+              <a:t>ישיבת פתיחה אחת</a:t>
+            </a:r>
+            <a:endParaRPr lang="en-US" sz="1900" dirty="0"/>
+          </a:p>
+        </p:txBody>
+      </p:sp>
+      <p:sp>
+        <p:nvSpPr>
+          <p:cNvPr id="13" name="Text 11"/>
+          <p:cNvSpPr txBox="1"/>
+          <p:nvPr/>
+        </p:nvSpPr>
+        <p:spPr>
+          <a:xfrm>
+            <a:off x="4455871" y="3529584"/>
+            <a:ext cx="3054096" cy="1005840"/>
+          </a:xfrm>
+          <a:prstGeom prst="rect">
+            <a:avLst/>
+          </a:prstGeom>
+          <a:noFill/>
+          <a:ln/>
+        </p:spPr>
+        <p:txBody>
+          <a:bodyPr wrap="square" lIns="0" tIns="0" rIns="0" bIns="0" rtlCol="0" anchor="ctr"/>
+          <a:lstStyle/>
           <a:p>
             <a:pPr rtl="1" algn="r" indent="0" marL="0">
               <a:lnSpc>
@@ -3437,7 +4183,7 @@
               <a:buNone/>
             </a:pPr>
             <a:r>
-              <a:rPr lang="en-US" sz="1600" dirty="0">
+              <a:rPr lang="en-US" sz="1200" dirty="0">
                 <a:solidFill>
                   <a:srgbClr val="9FC0DA"/>
                 </a:solidFill>
@@ -3445,9 +4191,215 @@
                 <a:ea typeface="Arial" pitchFamily="34" charset="-122"/>
                 <a:cs typeface="Arial" pitchFamily="34" charset="-120"/>
               </a:rPr>
-              <a:t>אתה תגיע לפגישה איתו — ותראה מה השתנה.</a:t>
-            </a:r>
-            <a:endParaRPr lang="en-US" sz="1600" dirty="0"/>
+              <a:t>חשבונות בנק, כרטסת אם יש, קטגוריות ואנשי הקשר שמקבלים הודעות</a:t>
+            </a:r>
+            <a:endParaRPr lang="en-US" sz="1200" dirty="0"/>
+          </a:p>
+        </p:txBody>
+      </p:sp>
+      <p:sp>
+        <p:nvSpPr>
+          <p:cNvPr id="14" name="Shape 12"/>
+          <p:cNvSpPr/>
+          <p:nvPr/>
+        </p:nvSpPr>
+        <p:spPr>
+          <a:xfrm>
+            <a:off x="432511" y="2011680"/>
+            <a:ext cx="3529584" cy="2743200"/>
+          </a:xfrm>
+          <a:prstGeom prst="roundRect">
+            <a:avLst>
+              <a:gd name="adj" fmla="val 2333"/>
+            </a:avLst>
+          </a:prstGeom>
+          <a:solidFill>
+            <a:srgbClr val="104A76"/>
+          </a:solidFill>
+          <a:ln w="12700">
+            <a:solidFill>
+              <a:srgbClr val="2A6491"/>
+            </a:solidFill>
+            <a:prstDash val="solid"/>
+          </a:ln>
+        </p:spPr>
+      </p:sp>
+      <p:sp>
+        <p:nvSpPr>
+          <p:cNvPr id="15" name="Shape 13"/>
+          <p:cNvSpPr/>
+          <p:nvPr/>
+        </p:nvSpPr>
+        <p:spPr>
+          <a:xfrm>
+            <a:off x="3139135" y="2395728"/>
+            <a:ext cx="475488" cy="475488"/>
+          </a:xfrm>
+          <a:prstGeom prst="ellipse">
+            <a:avLst/>
+          </a:prstGeom>
+          <a:solidFill>
+            <a:srgbClr val="E8635A"/>
+          </a:solidFill>
+          <a:ln/>
+        </p:spPr>
+      </p:sp>
+      <p:sp>
+        <p:nvSpPr>
+          <p:cNvPr id="16" name="Text 14"/>
+          <p:cNvSpPr txBox="1"/>
+          <p:nvPr/>
+        </p:nvSpPr>
+        <p:spPr>
+          <a:xfrm>
+            <a:off x="3139135" y="2395728"/>
+            <a:ext cx="475488" cy="475488"/>
+          </a:xfrm>
+          <a:prstGeom prst="rect">
+            <a:avLst/>
+          </a:prstGeom>
+          <a:noFill/>
+          <a:ln/>
+        </p:spPr>
+        <p:txBody>
+          <a:bodyPr wrap="square" lIns="0" tIns="0" rIns="0" bIns="0" rtlCol="0" anchor="ctr"/>
+          <a:lstStyle/>
+          <a:p>
+            <a:pPr algn="ctr" indent="0" marL="0">
+              <a:buNone/>
+            </a:pPr>
+            <a:r>
+              <a:rPr lang="en-US" sz="1500" b="1" dirty="0">
+                <a:solidFill>
+                  <a:srgbClr val="FFFFFF"/>
+                </a:solidFill>
+                <a:latin typeface="Arial" pitchFamily="34" charset="0"/>
+                <a:ea typeface="Arial" pitchFamily="34" charset="-122"/>
+                <a:cs typeface="Arial" pitchFamily="34" charset="-120"/>
+              </a:rPr>
+              <a:t>3</a:t>
+            </a:r>
+            <a:endParaRPr lang="en-US" sz="1500" dirty="0"/>
+          </a:p>
+        </p:txBody>
+      </p:sp>
+      <p:sp>
+        <p:nvSpPr>
+          <p:cNvPr id="17" name="Text 15"/>
+          <p:cNvSpPr txBox="1"/>
+          <p:nvPr/>
+        </p:nvSpPr>
+        <p:spPr>
+          <a:xfrm>
+            <a:off x="670255" y="3063240"/>
+            <a:ext cx="3054096" cy="411480"/>
+          </a:xfrm>
+          <a:prstGeom prst="rect">
+            <a:avLst/>
+          </a:prstGeom>
+          <a:noFill/>
+          <a:ln/>
+        </p:spPr>
+        <p:txBody>
+          <a:bodyPr wrap="square" lIns="0" tIns="0" rIns="0" bIns="0" rtlCol="0" anchor="ctr"/>
+          <a:lstStyle/>
+          <a:p>
+            <a:pPr rtl="1" algn="r" indent="0" marL="0">
+              <a:buNone/>
+            </a:pPr>
+            <a:r>
+              <a:rPr lang="en-US" sz="1900" b="1" dirty="0">
+                <a:solidFill>
+                  <a:srgbClr val="FFFFFF"/>
+                </a:solidFill>
+                <a:latin typeface="Arial" pitchFamily="34" charset="0"/>
+                <a:ea typeface="Arial" pitchFamily="34" charset="-122"/>
+                <a:cs typeface="Arial" pitchFamily="34" charset="-120"/>
+              </a:rPr>
+              <a:t>HK מריצה לו חודש</a:t>
+            </a:r>
+            <a:endParaRPr lang="en-US" sz="1900" dirty="0"/>
+          </a:p>
+        </p:txBody>
+      </p:sp>
+      <p:sp>
+        <p:nvSpPr>
+          <p:cNvPr id="18" name="Text 16"/>
+          <p:cNvSpPr txBox="1"/>
+          <p:nvPr/>
+        </p:nvSpPr>
+        <p:spPr>
+          <a:xfrm>
+            <a:off x="670255" y="3529584"/>
+            <a:ext cx="3054096" cy="1005840"/>
+          </a:xfrm>
+          <a:prstGeom prst="rect">
+            <a:avLst/>
+          </a:prstGeom>
+          <a:noFill/>
+          <a:ln/>
+        </p:spPr>
+        <p:txBody>
+          <a:bodyPr wrap="square" lIns="0" tIns="0" rIns="0" bIns="0" rtlCol="0" anchor="ctr"/>
+          <a:lstStyle/>
+          <a:p>
+            <a:pPr rtl="1" algn="r" indent="0" marL="0">
+              <a:lnSpc>
+                <a:spcPct val="135000"/>
+              </a:lnSpc>
+              <a:buNone/>
+            </a:pPr>
+            <a:r>
+              <a:rPr lang="en-US" sz="1200" dirty="0">
+                <a:solidFill>
+                  <a:srgbClr val="9FC0DA"/>
+                </a:solidFill>
+                <a:latin typeface="Arial" pitchFamily="34" charset="0"/>
+                <a:ea typeface="Arial" pitchFamily="34" charset="-122"/>
+                <a:cs typeface="Arial" pitchFamily="34" charset="-120"/>
+              </a:rPr>
+              <a:t>קיטלוג, בדיקות, תזרים מוכן — ואתה מגיע לפגישה ורואה מה השתנה</a:t>
+            </a:r>
+            <a:endParaRPr lang="en-US" sz="1200" dirty="0"/>
+          </a:p>
+        </p:txBody>
+      </p:sp>
+      <p:sp>
+        <p:nvSpPr>
+          <p:cNvPr id="19" name="Text 17"/>
+          <p:cNvSpPr txBox="1"/>
+          <p:nvPr/>
+        </p:nvSpPr>
+        <p:spPr>
+          <a:xfrm>
+            <a:off x="658368" y="5852160"/>
+            <a:ext cx="10874959" cy="548640"/>
+          </a:xfrm>
+          <a:prstGeom prst="rect">
+            <a:avLst/>
+          </a:prstGeom>
+          <a:noFill/>
+          <a:ln/>
+        </p:spPr>
+        <p:txBody>
+          <a:bodyPr wrap="square" lIns="0" tIns="0" rIns="0" bIns="0" rtlCol="0" anchor="ctr"/>
+          <a:lstStyle/>
+          <a:p>
+            <a:pPr rtl="1" algn="r" indent="0" marL="0">
+              <a:buNone/>
+            </a:pPr>
+            <a:r>
+              <a:rPr lang="en-US" sz="1350" dirty="0">
+                <a:solidFill>
+                  <a:srgbClr val="9FC0DA"/>
+                </a:solidFill>
+                <a:latin typeface="Arial" pitchFamily="34" charset="0"/>
+                <a:ea typeface="Arial" pitchFamily="34" charset="-122"/>
+                <a:cs typeface="Arial" pitchFamily="34" charset="-120"/>
+              </a:rPr>
+              <a:t>אין פרויקט הטמעה ואין חודש שבו עובדים כפול. אפשר להריץ במקביל לשיטה הקיימת, כמה זמן שתרצה.</a:t>
+            </a:r>
+            <a:endParaRPr lang="en-US" sz="1350" dirty="0"/>
           </a:p>
         </p:txBody>
       </p:sp>
@@ -3491,24 +4443,24 @@
         </p:nvSpPr>
         <p:spPr>
           <a:xfrm>
-            <a:off x="685800" y="777240"/>
-            <a:ext cx="10820095" cy="365760"/>
-          </a:xfrm>
-          <a:prstGeom prst="rect">
-            <a:avLst/>
-          </a:prstGeom>
-          <a:noFill/>
-          <a:ln/>
-        </p:spPr>
-        <p:txBody>
-          <a:bodyPr wrap="square" lIns="0" tIns="0" rIns="0" bIns="0" rtlCol="0" anchor="ctr"/>
-          <a:lstStyle/>
-          <a:p>
-            <a:pPr rtl="1" algn="r" indent="0" marL="0">
-              <a:buNone/>
-            </a:pPr>
-            <a:r>
-              <a:rPr lang="en-US" sz="1400" b="1" dirty="0">
+            <a:off x="658368" y="457200"/>
+            <a:ext cx="10874959" cy="274320"/>
+          </a:xfrm>
+          <a:prstGeom prst="rect">
+            <a:avLst/>
+          </a:prstGeom>
+          <a:noFill/>
+          <a:ln/>
+        </p:spPr>
+        <p:txBody>
+          <a:bodyPr wrap="square" lIns="0" tIns="0" rIns="0" bIns="0" rtlCol="0" anchor="ctr"/>
+          <a:lstStyle/>
+          <a:p>
+            <a:pPr rtl="1" algn="r" indent="0" marL="0">
+              <a:buNone/>
+            </a:pPr>
+            <a:r>
+              <a:rPr lang="en-US" sz="1250" b="1" dirty="0">
                 <a:solidFill>
                   <a:srgbClr val="E8635A"/>
                 </a:solidFill>
@@ -3516,9 +4468,9 @@
                 <a:ea typeface="Arial" pitchFamily="34" charset="-122"/>
                 <a:cs typeface="Arial" pitchFamily="34" charset="-120"/>
               </a:rPr>
-              <a:t>הבוקר שלך, היום</a:t>
-            </a:r>
-            <a:endParaRPr lang="en-US" sz="1400" dirty="0"/>
+              <a:t>מבנה המערכת</a:t>
+            </a:r>
+            <a:endParaRPr lang="en-US" sz="1250" dirty="0"/>
           </a:p>
         </p:txBody>
       </p:sp>
@@ -3530,27 +4482,316 @@
         </p:nvSpPr>
         <p:spPr>
           <a:xfrm>
-            <a:off x="685800" y="1371600"/>
-            <a:ext cx="10820095" cy="3108960"/>
-          </a:xfrm>
-          <a:prstGeom prst="rect">
-            <a:avLst/>
-          </a:prstGeom>
-          <a:noFill/>
-          <a:ln/>
-        </p:spPr>
-        <p:txBody>
-          <a:bodyPr wrap="square" lIns="0" tIns="0" rIns="0" bIns="0" rtlCol="0" anchor="ctr"/>
-          <a:lstStyle/>
-          <a:p>
-            <a:pPr algn="r" indent="0" marL="0">
+            <a:off x="658368" y="768096"/>
+            <a:ext cx="10874959" cy="566928"/>
+          </a:xfrm>
+          <a:prstGeom prst="rect">
+            <a:avLst/>
+          </a:prstGeom>
+          <a:noFill/>
+          <a:ln/>
+        </p:spPr>
+        <p:txBody>
+          <a:bodyPr wrap="square" lIns="0" tIns="0" rIns="0" bIns="0" rtlCol="0" anchor="ctr"/>
+          <a:lstStyle/>
+          <a:p>
+            <a:pPr rtl="1" algn="r" indent="0" marL="0">
+              <a:buNone/>
+            </a:pPr>
+            <a:r>
+              <a:rPr lang="en-US" sz="2900" b="1" dirty="0">
+                <a:solidFill>
+                  <a:srgbClr val="FFFFFF"/>
+                </a:solidFill>
+                <a:latin typeface="Arial" pitchFamily="34" charset="0"/>
+                <a:ea typeface="Arial" pitchFamily="34" charset="-122"/>
+                <a:cs typeface="Arial" pitchFamily="34" charset="-120"/>
+              </a:rPr>
+              <a:t>חמישה חלקים, מערכת אחת</a:t>
+            </a:r>
+            <a:endParaRPr lang="en-US" sz="2900" dirty="0"/>
+          </a:p>
+        </p:txBody>
+      </p:sp>
+      <p:sp>
+        <p:nvSpPr>
+          <p:cNvPr id="4" name="Shape 2"/>
+          <p:cNvSpPr/>
+          <p:nvPr/>
+        </p:nvSpPr>
+        <p:spPr>
+          <a:xfrm>
+            <a:off x="8003743" y="1572768"/>
+            <a:ext cx="3529584" cy="2057400"/>
+          </a:xfrm>
+          <a:prstGeom prst="roundRect">
+            <a:avLst>
+              <a:gd name="adj" fmla="val 3111"/>
+            </a:avLst>
+          </a:prstGeom>
+          <a:solidFill>
+            <a:srgbClr val="104A76"/>
+          </a:solidFill>
+          <a:ln w="12700">
+            <a:solidFill>
+              <a:srgbClr val="2A6491"/>
+            </a:solidFill>
+            <a:prstDash val="solid"/>
+          </a:ln>
+        </p:spPr>
+      </p:sp>
+      <p:sp>
+        <p:nvSpPr>
+          <p:cNvPr id="5" name="Shape 3"/>
+          <p:cNvSpPr/>
+          <p:nvPr/>
+        </p:nvSpPr>
+        <p:spPr>
+          <a:xfrm>
+            <a:off x="10911535" y="1828800"/>
+            <a:ext cx="365760" cy="365760"/>
+          </a:xfrm>
+          <a:prstGeom prst="ellipse">
+            <a:avLst/>
+          </a:prstGeom>
+          <a:solidFill>
+            <a:srgbClr val="39ABE2"/>
+          </a:solidFill>
+          <a:ln/>
+        </p:spPr>
+      </p:sp>
+      <p:sp>
+        <p:nvSpPr>
+          <p:cNvPr id="6" name="Text 4"/>
+          <p:cNvSpPr txBox="1"/>
+          <p:nvPr/>
+        </p:nvSpPr>
+        <p:spPr>
+          <a:xfrm>
+            <a:off x="10911535" y="1828800"/>
+            <a:ext cx="365760" cy="365760"/>
+          </a:xfrm>
+          <a:prstGeom prst="rect">
+            <a:avLst/>
+          </a:prstGeom>
+          <a:noFill/>
+          <a:ln/>
+        </p:spPr>
+        <p:txBody>
+          <a:bodyPr wrap="square" lIns="0" tIns="0" rIns="0" bIns="0" rtlCol="0" anchor="ctr"/>
+          <a:lstStyle/>
+          <a:p>
+            <a:pPr algn="ctr" indent="0" marL="0">
+              <a:buNone/>
+            </a:pPr>
+            <a:r>
+              <a:rPr lang="en-US" sz="1200" b="1" dirty="0">
+                <a:solidFill>
+                  <a:srgbClr val="0A3557"/>
+                </a:solidFill>
+                <a:latin typeface="Arial" pitchFamily="34" charset="0"/>
+                <a:ea typeface="Arial" pitchFamily="34" charset="-122"/>
+                <a:cs typeface="Arial" pitchFamily="34" charset="-120"/>
+              </a:rPr>
+              <a:t>1</a:t>
+            </a:r>
+            <a:endParaRPr lang="en-US" sz="1200" dirty="0"/>
+          </a:p>
+        </p:txBody>
+      </p:sp>
+      <p:sp>
+        <p:nvSpPr>
+          <p:cNvPr id="7" name="Text 5"/>
+          <p:cNvSpPr txBox="1"/>
+          <p:nvPr/>
+        </p:nvSpPr>
+        <p:spPr>
+          <a:xfrm>
+            <a:off x="8223199" y="2286000"/>
+            <a:ext cx="3090672" cy="365760"/>
+          </a:xfrm>
+          <a:prstGeom prst="rect">
+            <a:avLst/>
+          </a:prstGeom>
+          <a:noFill/>
+          <a:ln/>
+        </p:spPr>
+        <p:txBody>
+          <a:bodyPr wrap="square" lIns="0" tIns="0" rIns="0" bIns="0" rtlCol="0" anchor="ctr"/>
+          <a:lstStyle/>
+          <a:p>
+            <a:pPr rtl="1" algn="r" indent="0" marL="0">
+              <a:buNone/>
+            </a:pPr>
+            <a:r>
+              <a:rPr lang="en-US" sz="1700" b="1" dirty="0">
+                <a:solidFill>
+                  <a:srgbClr val="FFFFFF"/>
+                </a:solidFill>
+                <a:latin typeface="Arial" pitchFamily="34" charset="0"/>
+                <a:ea typeface="Arial" pitchFamily="34" charset="-122"/>
+                <a:cs typeface="Arial" pitchFamily="34" charset="-120"/>
+              </a:rPr>
+              <a:t>תפעול חודשי</a:t>
+            </a:r>
+            <a:endParaRPr lang="en-US" sz="1700" dirty="0"/>
+          </a:p>
+        </p:txBody>
+      </p:sp>
+      <p:sp>
+        <p:nvSpPr>
+          <p:cNvPr id="8" name="Text 6"/>
+          <p:cNvSpPr txBox="1"/>
+          <p:nvPr/>
+        </p:nvSpPr>
+        <p:spPr>
+          <a:xfrm>
+            <a:off x="8223199" y="2670048"/>
+            <a:ext cx="3090672" cy="822960"/>
+          </a:xfrm>
+          <a:prstGeom prst="rect">
+            <a:avLst/>
+          </a:prstGeom>
+          <a:noFill/>
+          <a:ln/>
+        </p:spPr>
+        <p:txBody>
+          <a:bodyPr wrap="square" lIns="0" tIns="0" rIns="0" bIns="0" rtlCol="0" anchor="ctr"/>
+          <a:lstStyle/>
+          <a:p>
+            <a:pPr rtl="1" algn="r" indent="0" marL="0">
               <a:lnSpc>
-                <a:spcPct val="115000"/>
+                <a:spcPct val="130000"/>
               </a:lnSpc>
               <a:buNone/>
             </a:pPr>
             <a:r>
-              <a:rPr lang="en-US" sz="5300" b="1" dirty="0">
+              <a:rPr lang="en-US" sz="1100" dirty="0">
+                <a:solidFill>
+                  <a:srgbClr val="9FC0DA"/>
+                </a:solidFill>
+                <a:latin typeface="Arial" pitchFamily="34" charset="0"/>
+                <a:ea typeface="Arial" pitchFamily="34" charset="-122"/>
+                <a:cs typeface="Arial" pitchFamily="34" charset="-120"/>
+              </a:rPr>
+              <a:t>מנהל תזרים של HK מריץ לכל לקוח שלך חמישה שלבי עבודה וחמש בדיקות, כל חודש</a:t>
+            </a:r>
+            <a:endParaRPr lang="en-US" sz="1100" dirty="0"/>
+          </a:p>
+        </p:txBody>
+      </p:sp>
+      <p:sp>
+        <p:nvSpPr>
+          <p:cNvPr id="9" name="Shape 7"/>
+          <p:cNvSpPr/>
+          <p:nvPr/>
+        </p:nvSpPr>
+        <p:spPr>
+          <a:xfrm>
+            <a:off x="4218127" y="1572768"/>
+            <a:ext cx="3529584" cy="2057400"/>
+          </a:xfrm>
+          <a:prstGeom prst="roundRect">
+            <a:avLst>
+              <a:gd name="adj" fmla="val 3111"/>
+            </a:avLst>
+          </a:prstGeom>
+          <a:solidFill>
+            <a:srgbClr val="104A76"/>
+          </a:solidFill>
+          <a:ln w="12700">
+            <a:solidFill>
+              <a:srgbClr val="2A6491"/>
+            </a:solidFill>
+            <a:prstDash val="solid"/>
+          </a:ln>
+        </p:spPr>
+      </p:sp>
+      <p:sp>
+        <p:nvSpPr>
+          <p:cNvPr id="10" name="Shape 8"/>
+          <p:cNvSpPr/>
+          <p:nvPr/>
+        </p:nvSpPr>
+        <p:spPr>
+          <a:xfrm>
+            <a:off x="7125919" y="1828800"/>
+            <a:ext cx="365760" cy="365760"/>
+          </a:xfrm>
+          <a:prstGeom prst="ellipse">
+            <a:avLst/>
+          </a:prstGeom>
+          <a:solidFill>
+            <a:srgbClr val="39ABE2"/>
+          </a:solidFill>
+          <a:ln/>
+        </p:spPr>
+      </p:sp>
+      <p:sp>
+        <p:nvSpPr>
+          <p:cNvPr id="11" name="Text 9"/>
+          <p:cNvSpPr txBox="1"/>
+          <p:nvPr/>
+        </p:nvSpPr>
+        <p:spPr>
+          <a:xfrm>
+            <a:off x="7125919" y="1828800"/>
+            <a:ext cx="365760" cy="365760"/>
+          </a:xfrm>
+          <a:prstGeom prst="rect">
+            <a:avLst/>
+          </a:prstGeom>
+          <a:noFill/>
+          <a:ln/>
+        </p:spPr>
+        <p:txBody>
+          <a:bodyPr wrap="square" lIns="0" tIns="0" rIns="0" bIns="0" rtlCol="0" anchor="ctr"/>
+          <a:lstStyle/>
+          <a:p>
+            <a:pPr algn="ctr" indent="0" marL="0">
+              <a:buNone/>
+            </a:pPr>
+            <a:r>
+              <a:rPr lang="en-US" sz="1200" b="1" dirty="0">
+                <a:solidFill>
+                  <a:srgbClr val="0A3557"/>
+                </a:solidFill>
+                <a:latin typeface="Arial" pitchFamily="34" charset="0"/>
+                <a:ea typeface="Arial" pitchFamily="34" charset="-122"/>
+                <a:cs typeface="Arial" pitchFamily="34" charset="-120"/>
+              </a:rPr>
+              <a:t>2</a:t>
+            </a:r>
+            <a:endParaRPr lang="en-US" sz="1200" dirty="0"/>
+          </a:p>
+        </p:txBody>
+      </p:sp>
+      <p:sp>
+        <p:nvSpPr>
+          <p:cNvPr id="12" name="Text 10"/>
+          <p:cNvSpPr txBox="1"/>
+          <p:nvPr/>
+        </p:nvSpPr>
+        <p:spPr>
+          <a:xfrm>
+            <a:off x="4437583" y="2286000"/>
+            <a:ext cx="3090672" cy="365760"/>
+          </a:xfrm>
+          <a:prstGeom prst="rect">
+            <a:avLst/>
+          </a:prstGeom>
+          <a:noFill/>
+          <a:ln/>
+        </p:spPr>
+        <p:txBody>
+          <a:bodyPr wrap="square" lIns="0" tIns="0" rIns="0" bIns="0" rtlCol="0" anchor="ctr"/>
+          <a:lstStyle/>
+          <a:p>
+            <a:pPr rtl="1" algn="r" indent="0" marL="0">
+              <a:buNone/>
+            </a:pPr>
+            <a:r>
+              <a:rPr lang="en-US" sz="1700" b="1" dirty="0">
                 <a:solidFill>
                   <a:srgbClr val="FFFFFF"/>
                 </a:solidFill>
@@ -3558,56 +4799,41 @@
                 <a:ea typeface="Arial" pitchFamily="34" charset="-122"/>
                 <a:cs typeface="Arial" pitchFamily="34" charset="-120"/>
               </a:rPr>
-              <a:t>14 הודעות בוואטסאפ.
-</a:t>
-            </a:r>
-            <a:pPr algn="r" indent="0" marL="0">
+              <a:t>זיכרון לקוח</a:t>
+            </a:r>
+            <a:endParaRPr lang="en-US" sz="1700" dirty="0"/>
+          </a:p>
+        </p:txBody>
+      </p:sp>
+      <p:sp>
+        <p:nvSpPr>
+          <p:cNvPr id="13" name="Text 11"/>
+          <p:cNvSpPr txBox="1"/>
+          <p:nvPr/>
+        </p:nvSpPr>
+        <p:spPr>
+          <a:xfrm>
+            <a:off x="4437583" y="2670048"/>
+            <a:ext cx="3090672" cy="822960"/>
+          </a:xfrm>
+          <a:prstGeom prst="rect">
+            <a:avLst/>
+          </a:prstGeom>
+          <a:noFill/>
+          <a:ln/>
+        </p:spPr>
+        <p:txBody>
+          <a:bodyPr wrap="square" lIns="0" tIns="0" rIns="0" bIns="0" rtlCol="0" anchor="ctr"/>
+          <a:lstStyle/>
+          <a:p>
+            <a:pPr rtl="1" algn="r" indent="0" marL="0">
               <a:lnSpc>
-                <a:spcPct val="115000"/>
+                <a:spcPct val="130000"/>
               </a:lnSpc>
               <a:buNone/>
             </a:pPr>
             <a:r>
-              <a:rPr lang="en-US" sz="5300" b="1" dirty="0">
-                <a:solidFill>
-                  <a:srgbClr val="39ABE2"/>
-                </a:solidFill>
-                <a:latin typeface="Arial" pitchFamily="34" charset="0"/>
-                <a:ea typeface="Arial" pitchFamily="34" charset="-122"/>
-                <a:cs typeface="Arial" pitchFamily="34" charset="-120"/>
-              </a:rPr>
-              <a:t>אף אחת מהן אינה ייעוץ.</a:t>
-            </a:r>
-            <a:endParaRPr lang="en-US" sz="5300" dirty="0"/>
-          </a:p>
-        </p:txBody>
-      </p:sp>
-      <p:sp>
-        <p:nvSpPr>
-          <p:cNvPr id="4" name="Text 2"/>
-          <p:cNvSpPr txBox="1"/>
-          <p:nvPr/>
-        </p:nvSpPr>
-        <p:spPr>
-          <a:xfrm>
-            <a:off x="685800" y="4892040"/>
-            <a:ext cx="10820095" cy="548640"/>
-          </a:xfrm>
-          <a:prstGeom prst="rect">
-            <a:avLst/>
-          </a:prstGeom>
-          <a:noFill/>
-          <a:ln/>
-        </p:spPr>
-        <p:txBody>
-          <a:bodyPr wrap="square" lIns="0" tIns="0" rIns="0" bIns="0" rtlCol="0" anchor="ctr"/>
-          <a:lstStyle/>
-          <a:p>
-            <a:pPr rtl="1" algn="r" indent="0" marL="0">
-              <a:buNone/>
-            </a:pPr>
-            <a:r>
-              <a:rPr lang="en-US" sz="1600" dirty="0">
+              <a:rPr lang="en-US" sz="1100" dirty="0">
                 <a:solidFill>
                   <a:srgbClr val="9FC0DA"/>
                 </a:solidFill>
@@ -3615,9 +4841,677 @@
                 <a:ea typeface="Arial" pitchFamily="34" charset="-122"/>
                 <a:cs typeface="Arial" pitchFamily="34" charset="-120"/>
               </a:rPr>
-              <a:t>צילום של שיק · "עדכנת את התשלומים?" · שני אקסלים · לקוח שכועס שלא חזרת אליו</a:t>
-            </a:r>
-            <a:endParaRPr lang="en-US" sz="1600" dirty="0"/>
+              <a:t>12 קטגוריות שמתעדכנות אוטומטית מכל פגישה, שיחה והודעה</a:t>
+            </a:r>
+            <a:endParaRPr lang="en-US" sz="1100" dirty="0"/>
+          </a:p>
+        </p:txBody>
+      </p:sp>
+      <p:sp>
+        <p:nvSpPr>
+          <p:cNvPr id="14" name="Shape 12"/>
+          <p:cNvSpPr/>
+          <p:nvPr/>
+        </p:nvSpPr>
+        <p:spPr>
+          <a:xfrm>
+            <a:off x="432511" y="1572768"/>
+            <a:ext cx="3529584" cy="2057400"/>
+          </a:xfrm>
+          <a:prstGeom prst="roundRect">
+            <a:avLst>
+              <a:gd name="adj" fmla="val 3111"/>
+            </a:avLst>
+          </a:prstGeom>
+          <a:solidFill>
+            <a:srgbClr val="104A76"/>
+          </a:solidFill>
+          <a:ln w="12700">
+            <a:solidFill>
+              <a:srgbClr val="2A6491"/>
+            </a:solidFill>
+            <a:prstDash val="solid"/>
+          </a:ln>
+        </p:spPr>
+      </p:sp>
+      <p:sp>
+        <p:nvSpPr>
+          <p:cNvPr id="15" name="Shape 13"/>
+          <p:cNvSpPr/>
+          <p:nvPr/>
+        </p:nvSpPr>
+        <p:spPr>
+          <a:xfrm>
+            <a:off x="3340303" y="1828800"/>
+            <a:ext cx="365760" cy="365760"/>
+          </a:xfrm>
+          <a:prstGeom prst="ellipse">
+            <a:avLst/>
+          </a:prstGeom>
+          <a:solidFill>
+            <a:srgbClr val="39ABE2"/>
+          </a:solidFill>
+          <a:ln/>
+        </p:spPr>
+      </p:sp>
+      <p:sp>
+        <p:nvSpPr>
+          <p:cNvPr id="16" name="Text 14"/>
+          <p:cNvSpPr txBox="1"/>
+          <p:nvPr/>
+        </p:nvSpPr>
+        <p:spPr>
+          <a:xfrm>
+            <a:off x="3340303" y="1828800"/>
+            <a:ext cx="365760" cy="365760"/>
+          </a:xfrm>
+          <a:prstGeom prst="rect">
+            <a:avLst/>
+          </a:prstGeom>
+          <a:noFill/>
+          <a:ln/>
+        </p:spPr>
+        <p:txBody>
+          <a:bodyPr wrap="square" lIns="0" tIns="0" rIns="0" bIns="0" rtlCol="0" anchor="ctr"/>
+          <a:lstStyle/>
+          <a:p>
+            <a:pPr algn="ctr" indent="0" marL="0">
+              <a:buNone/>
+            </a:pPr>
+            <a:r>
+              <a:rPr lang="en-US" sz="1200" b="1" dirty="0">
+                <a:solidFill>
+                  <a:srgbClr val="0A3557"/>
+                </a:solidFill>
+                <a:latin typeface="Arial" pitchFamily="34" charset="0"/>
+                <a:ea typeface="Arial" pitchFamily="34" charset="-122"/>
+                <a:cs typeface="Arial" pitchFamily="34" charset="-120"/>
+              </a:rPr>
+              <a:t>3</a:t>
+            </a:r>
+            <a:endParaRPr lang="en-US" sz="1200" dirty="0"/>
+          </a:p>
+        </p:txBody>
+      </p:sp>
+      <p:sp>
+        <p:nvSpPr>
+          <p:cNvPr id="17" name="Text 15"/>
+          <p:cNvSpPr txBox="1"/>
+          <p:nvPr/>
+        </p:nvSpPr>
+        <p:spPr>
+          <a:xfrm>
+            <a:off x="651967" y="2286000"/>
+            <a:ext cx="3090672" cy="365760"/>
+          </a:xfrm>
+          <a:prstGeom prst="rect">
+            <a:avLst/>
+          </a:prstGeom>
+          <a:noFill/>
+          <a:ln/>
+        </p:spPr>
+        <p:txBody>
+          <a:bodyPr wrap="square" lIns="0" tIns="0" rIns="0" bIns="0" rtlCol="0" anchor="ctr"/>
+          <a:lstStyle/>
+          <a:p>
+            <a:pPr rtl="1" algn="r" indent="0" marL="0">
+              <a:buNone/>
+            </a:pPr>
+            <a:r>
+              <a:rPr lang="en-US" sz="1700" b="1" dirty="0">
+                <a:solidFill>
+                  <a:srgbClr val="FFFFFF"/>
+                </a:solidFill>
+                <a:latin typeface="Arial" pitchFamily="34" charset="0"/>
+                <a:ea typeface="Arial" pitchFamily="34" charset="-122"/>
+                <a:cs typeface="Arial" pitchFamily="34" charset="-120"/>
+              </a:rPr>
+              <a:t>תקשורת</a:t>
+            </a:r>
+            <a:endParaRPr lang="en-US" sz="1700" dirty="0"/>
+          </a:p>
+        </p:txBody>
+      </p:sp>
+      <p:sp>
+        <p:nvSpPr>
+          <p:cNvPr id="18" name="Text 16"/>
+          <p:cNvSpPr txBox="1"/>
+          <p:nvPr/>
+        </p:nvSpPr>
+        <p:spPr>
+          <a:xfrm>
+            <a:off x="651967" y="2670048"/>
+            <a:ext cx="3090672" cy="822960"/>
+          </a:xfrm>
+          <a:prstGeom prst="rect">
+            <a:avLst/>
+          </a:prstGeom>
+          <a:noFill/>
+          <a:ln/>
+        </p:spPr>
+        <p:txBody>
+          <a:bodyPr wrap="square" lIns="0" tIns="0" rIns="0" bIns="0" rtlCol="0" anchor="ctr"/>
+          <a:lstStyle/>
+          <a:p>
+            <a:pPr rtl="1" algn="r" indent="0" marL="0">
+              <a:lnSpc>
+                <a:spcPct val="130000"/>
+              </a:lnSpc>
+              <a:buNone/>
+            </a:pPr>
+            <a:r>
+              <a:rPr lang="en-US" sz="1100" dirty="0">
+                <a:solidFill>
+                  <a:srgbClr val="9FC0DA"/>
+                </a:solidFill>
+                <a:latin typeface="Arial" pitchFamily="34" charset="0"/>
+                <a:ea typeface="Arial" pitchFamily="34" charset="-122"/>
+                <a:cs typeface="Arial" pitchFamily="34" charset="-120"/>
+              </a:rPr>
+              <a:t>פגישות, שיחות טלפון, קבוצת וואטסאפ והעוזר — במסך אחד עם אותם תוצרים</a:t>
+            </a:r>
+            <a:endParaRPr lang="en-US" sz="1100" dirty="0"/>
+          </a:p>
+        </p:txBody>
+      </p:sp>
+      <p:sp>
+        <p:nvSpPr>
+          <p:cNvPr id="19" name="Shape 17"/>
+          <p:cNvSpPr/>
+          <p:nvPr/>
+        </p:nvSpPr>
+        <p:spPr>
+          <a:xfrm>
+            <a:off x="8003743" y="3904488"/>
+            <a:ext cx="3529584" cy="2057400"/>
+          </a:xfrm>
+          <a:prstGeom prst="roundRect">
+            <a:avLst>
+              <a:gd name="adj" fmla="val 3111"/>
+            </a:avLst>
+          </a:prstGeom>
+          <a:solidFill>
+            <a:srgbClr val="104A76"/>
+          </a:solidFill>
+          <a:ln w="12700">
+            <a:solidFill>
+              <a:srgbClr val="2A6491"/>
+            </a:solidFill>
+            <a:prstDash val="solid"/>
+          </a:ln>
+        </p:spPr>
+      </p:sp>
+      <p:sp>
+        <p:nvSpPr>
+          <p:cNvPr id="20" name="Shape 18"/>
+          <p:cNvSpPr/>
+          <p:nvPr/>
+        </p:nvSpPr>
+        <p:spPr>
+          <a:xfrm>
+            <a:off x="10911535" y="4160520"/>
+            <a:ext cx="365760" cy="365760"/>
+          </a:xfrm>
+          <a:prstGeom prst="ellipse">
+            <a:avLst/>
+          </a:prstGeom>
+          <a:solidFill>
+            <a:srgbClr val="39ABE2"/>
+          </a:solidFill>
+          <a:ln/>
+        </p:spPr>
+      </p:sp>
+      <p:sp>
+        <p:nvSpPr>
+          <p:cNvPr id="21" name="Text 19"/>
+          <p:cNvSpPr txBox="1"/>
+          <p:nvPr/>
+        </p:nvSpPr>
+        <p:spPr>
+          <a:xfrm>
+            <a:off x="10911535" y="4160520"/>
+            <a:ext cx="365760" cy="365760"/>
+          </a:xfrm>
+          <a:prstGeom prst="rect">
+            <a:avLst/>
+          </a:prstGeom>
+          <a:noFill/>
+          <a:ln/>
+        </p:spPr>
+        <p:txBody>
+          <a:bodyPr wrap="square" lIns="0" tIns="0" rIns="0" bIns="0" rtlCol="0" anchor="ctr"/>
+          <a:lstStyle/>
+          <a:p>
+            <a:pPr algn="ctr" indent="0" marL="0">
+              <a:buNone/>
+            </a:pPr>
+            <a:r>
+              <a:rPr lang="en-US" sz="1200" b="1" dirty="0">
+                <a:solidFill>
+                  <a:srgbClr val="0A3557"/>
+                </a:solidFill>
+                <a:latin typeface="Arial" pitchFamily="34" charset="0"/>
+                <a:ea typeface="Arial" pitchFamily="34" charset="-122"/>
+                <a:cs typeface="Arial" pitchFamily="34" charset="-120"/>
+              </a:rPr>
+              <a:t>4</a:t>
+            </a:r>
+            <a:endParaRPr lang="en-US" sz="1200" dirty="0"/>
+          </a:p>
+        </p:txBody>
+      </p:sp>
+      <p:sp>
+        <p:nvSpPr>
+          <p:cNvPr id="22" name="Text 20"/>
+          <p:cNvSpPr txBox="1"/>
+          <p:nvPr/>
+        </p:nvSpPr>
+        <p:spPr>
+          <a:xfrm>
+            <a:off x="8223199" y="4617720"/>
+            <a:ext cx="3090672" cy="365760"/>
+          </a:xfrm>
+          <a:prstGeom prst="rect">
+            <a:avLst/>
+          </a:prstGeom>
+          <a:noFill/>
+          <a:ln/>
+        </p:spPr>
+        <p:txBody>
+          <a:bodyPr wrap="square" lIns="0" tIns="0" rIns="0" bIns="0" rtlCol="0" anchor="ctr"/>
+          <a:lstStyle/>
+          <a:p>
+            <a:pPr rtl="1" algn="r" indent="0" marL="0">
+              <a:buNone/>
+            </a:pPr>
+            <a:r>
+              <a:rPr lang="en-US" sz="1700" b="1" dirty="0">
+                <a:solidFill>
+                  <a:srgbClr val="FFFFFF"/>
+                </a:solidFill>
+                <a:latin typeface="Arial" pitchFamily="34" charset="0"/>
+                <a:ea typeface="Arial" pitchFamily="34" charset="-122"/>
+                <a:cs typeface="Arial" pitchFamily="34" charset="-120"/>
+              </a:rPr>
+              <a:t>דוחות פיננסיים</a:t>
+            </a:r>
+            <a:endParaRPr lang="en-US" sz="1700" dirty="0"/>
+          </a:p>
+        </p:txBody>
+      </p:sp>
+      <p:sp>
+        <p:nvSpPr>
+          <p:cNvPr id="23" name="Text 21"/>
+          <p:cNvSpPr txBox="1"/>
+          <p:nvPr/>
+        </p:nvSpPr>
+        <p:spPr>
+          <a:xfrm>
+            <a:off x="8223199" y="5001768"/>
+            <a:ext cx="3090672" cy="822960"/>
+          </a:xfrm>
+          <a:prstGeom prst="rect">
+            <a:avLst/>
+          </a:prstGeom>
+          <a:noFill/>
+          <a:ln/>
+        </p:spPr>
+        <p:txBody>
+          <a:bodyPr wrap="square" lIns="0" tIns="0" rIns="0" bIns="0" rtlCol="0" anchor="ctr"/>
+          <a:lstStyle/>
+          <a:p>
+            <a:pPr rtl="1" algn="r" indent="0" marL="0">
+              <a:lnSpc>
+                <a:spcPct val="130000"/>
+              </a:lnSpc>
+              <a:buNone/>
+            </a:pPr>
+            <a:r>
+              <a:rPr lang="en-US" sz="1100" dirty="0">
+                <a:solidFill>
+                  <a:srgbClr val="9FC0DA"/>
+                </a:solidFill>
+                <a:latin typeface="Arial" pitchFamily="34" charset="0"/>
+                <a:ea typeface="Arial" pitchFamily="34" charset="-122"/>
+                <a:cs typeface="Arial" pitchFamily="34" charset="-120"/>
+              </a:rPr>
+              <a:t>תכנון תזרימי קדימה, דוח רווח והפסד מהכרטסת, מעקב תקציב ומדדים</a:t>
+            </a:r>
+            <a:endParaRPr lang="en-US" sz="1100" dirty="0"/>
+          </a:p>
+        </p:txBody>
+      </p:sp>
+      <p:sp>
+        <p:nvSpPr>
+          <p:cNvPr id="24" name="Shape 22"/>
+          <p:cNvSpPr/>
+          <p:nvPr/>
+        </p:nvSpPr>
+        <p:spPr>
+          <a:xfrm>
+            <a:off x="4218127" y="3904488"/>
+            <a:ext cx="3529584" cy="2057400"/>
+          </a:xfrm>
+          <a:prstGeom prst="roundRect">
+            <a:avLst>
+              <a:gd name="adj" fmla="val 3111"/>
+            </a:avLst>
+          </a:prstGeom>
+          <a:solidFill>
+            <a:srgbClr val="104A76"/>
+          </a:solidFill>
+          <a:ln w="12700">
+            <a:solidFill>
+              <a:srgbClr val="2A6491"/>
+            </a:solidFill>
+            <a:prstDash val="solid"/>
+          </a:ln>
+        </p:spPr>
+      </p:sp>
+      <p:sp>
+        <p:nvSpPr>
+          <p:cNvPr id="25" name="Shape 23"/>
+          <p:cNvSpPr/>
+          <p:nvPr/>
+        </p:nvSpPr>
+        <p:spPr>
+          <a:xfrm>
+            <a:off x="7125919" y="4160520"/>
+            <a:ext cx="365760" cy="365760"/>
+          </a:xfrm>
+          <a:prstGeom prst="ellipse">
+            <a:avLst/>
+          </a:prstGeom>
+          <a:solidFill>
+            <a:srgbClr val="39ABE2"/>
+          </a:solidFill>
+          <a:ln/>
+        </p:spPr>
+      </p:sp>
+      <p:sp>
+        <p:nvSpPr>
+          <p:cNvPr id="26" name="Text 24"/>
+          <p:cNvSpPr txBox="1"/>
+          <p:nvPr/>
+        </p:nvSpPr>
+        <p:spPr>
+          <a:xfrm>
+            <a:off x="7125919" y="4160520"/>
+            <a:ext cx="365760" cy="365760"/>
+          </a:xfrm>
+          <a:prstGeom prst="rect">
+            <a:avLst/>
+          </a:prstGeom>
+          <a:noFill/>
+          <a:ln/>
+        </p:spPr>
+        <p:txBody>
+          <a:bodyPr wrap="square" lIns="0" tIns="0" rIns="0" bIns="0" rtlCol="0" anchor="ctr"/>
+          <a:lstStyle/>
+          <a:p>
+            <a:pPr algn="ctr" indent="0" marL="0">
+              <a:buNone/>
+            </a:pPr>
+            <a:r>
+              <a:rPr lang="en-US" sz="1200" b="1" dirty="0">
+                <a:solidFill>
+                  <a:srgbClr val="0A3557"/>
+                </a:solidFill>
+                <a:latin typeface="Arial" pitchFamily="34" charset="0"/>
+                <a:ea typeface="Arial" pitchFamily="34" charset="-122"/>
+                <a:cs typeface="Arial" pitchFamily="34" charset="-120"/>
+              </a:rPr>
+              <a:t>5</a:t>
+            </a:r>
+            <a:endParaRPr lang="en-US" sz="1200" dirty="0"/>
+          </a:p>
+        </p:txBody>
+      </p:sp>
+      <p:sp>
+        <p:nvSpPr>
+          <p:cNvPr id="27" name="Text 25"/>
+          <p:cNvSpPr txBox="1"/>
+          <p:nvPr/>
+        </p:nvSpPr>
+        <p:spPr>
+          <a:xfrm>
+            <a:off x="4437583" y="4617720"/>
+            <a:ext cx="3090672" cy="365760"/>
+          </a:xfrm>
+          <a:prstGeom prst="rect">
+            <a:avLst/>
+          </a:prstGeom>
+          <a:noFill/>
+          <a:ln/>
+        </p:spPr>
+        <p:txBody>
+          <a:bodyPr wrap="square" lIns="0" tIns="0" rIns="0" bIns="0" rtlCol="0" anchor="ctr"/>
+          <a:lstStyle/>
+          <a:p>
+            <a:pPr rtl="1" algn="r" indent="0" marL="0">
+              <a:buNone/>
+            </a:pPr>
+            <a:r>
+              <a:rPr lang="en-US" sz="1700" b="1" dirty="0">
+                <a:solidFill>
+                  <a:srgbClr val="FFFFFF"/>
+                </a:solidFill>
+                <a:latin typeface="Arial" pitchFamily="34" charset="0"/>
+                <a:ea typeface="Arial" pitchFamily="34" charset="-122"/>
+                <a:cs typeface="Arial" pitchFamily="34" charset="-120"/>
+              </a:rPr>
+              <a:t>הצד של הלקוח</a:t>
+            </a:r>
+            <a:endParaRPr lang="en-US" sz="1700" dirty="0"/>
+          </a:p>
+        </p:txBody>
+      </p:sp>
+      <p:sp>
+        <p:nvSpPr>
+          <p:cNvPr id="28" name="Text 26"/>
+          <p:cNvSpPr txBox="1"/>
+          <p:nvPr/>
+        </p:nvSpPr>
+        <p:spPr>
+          <a:xfrm>
+            <a:off x="4437583" y="5001768"/>
+            <a:ext cx="3090672" cy="822960"/>
+          </a:xfrm>
+          <a:prstGeom prst="rect">
+            <a:avLst/>
+          </a:prstGeom>
+          <a:noFill/>
+          <a:ln/>
+        </p:spPr>
+        <p:txBody>
+          <a:bodyPr wrap="square" lIns="0" tIns="0" rIns="0" bIns="0" rtlCol="0" anchor="ctr"/>
+          <a:lstStyle/>
+          <a:p>
+            <a:pPr rtl="1" algn="r" indent="0" marL="0">
+              <a:lnSpc>
+                <a:spcPct val="130000"/>
+              </a:lnSpc>
+              <a:buNone/>
+            </a:pPr>
+            <a:r>
+              <a:rPr lang="en-US" sz="1100" dirty="0">
+                <a:solidFill>
+                  <a:srgbClr val="9FC0DA"/>
+                </a:solidFill>
+                <a:latin typeface="Arial" pitchFamily="34" charset="0"/>
+                <a:ea typeface="Arial" pitchFamily="34" charset="-122"/>
+                <a:cs typeface="Arial" pitchFamily="34" charset="-120"/>
+              </a:rPr>
+              <a:t>דשבורד, תקציר בוקר ועוזר בוואטסאפ — הכל בשם המשרד שלך</a:t>
+            </a:r>
+            <a:endParaRPr lang="en-US" sz="1100" dirty="0"/>
+          </a:p>
+        </p:txBody>
+      </p:sp>
+      <p:sp>
+        <p:nvSpPr>
+          <p:cNvPr id="29" name="Shape 27"/>
+          <p:cNvSpPr/>
+          <p:nvPr/>
+        </p:nvSpPr>
+        <p:spPr>
+          <a:xfrm>
+            <a:off x="432511" y="3904488"/>
+            <a:ext cx="3529584" cy="2057400"/>
+          </a:xfrm>
+          <a:prstGeom prst="roundRect">
+            <a:avLst>
+              <a:gd name="adj" fmla="val 3111"/>
+            </a:avLst>
+          </a:prstGeom>
+          <a:solidFill>
+            <a:srgbClr val="104A76"/>
+          </a:solidFill>
+          <a:ln w="12700">
+            <a:solidFill>
+              <a:srgbClr val="2A6491"/>
+            </a:solidFill>
+            <a:prstDash val="solid"/>
+          </a:ln>
+        </p:spPr>
+      </p:sp>
+      <p:sp>
+        <p:nvSpPr>
+          <p:cNvPr id="30" name="Shape 28"/>
+          <p:cNvSpPr/>
+          <p:nvPr/>
+        </p:nvSpPr>
+        <p:spPr>
+          <a:xfrm>
+            <a:off x="3340303" y="4160520"/>
+            <a:ext cx="365760" cy="365760"/>
+          </a:xfrm>
+          <a:prstGeom prst="ellipse">
+            <a:avLst/>
+          </a:prstGeom>
+          <a:solidFill>
+            <a:srgbClr val="2A6491"/>
+          </a:solidFill>
+          <a:ln/>
+        </p:spPr>
+      </p:sp>
+      <p:sp>
+        <p:nvSpPr>
+          <p:cNvPr id="31" name="Text 29"/>
+          <p:cNvSpPr txBox="1"/>
+          <p:nvPr/>
+        </p:nvSpPr>
+        <p:spPr>
+          <a:xfrm>
+            <a:off x="3340303" y="4160520"/>
+            <a:ext cx="365760" cy="365760"/>
+          </a:xfrm>
+          <a:prstGeom prst="rect">
+            <a:avLst/>
+          </a:prstGeom>
+          <a:noFill/>
+          <a:ln/>
+        </p:spPr>
+        <p:txBody>
+          <a:bodyPr wrap="square" lIns="0" tIns="0" rIns="0" bIns="0" rtlCol="0" anchor="ctr"/>
+          <a:lstStyle/>
+          <a:p>
+            <a:pPr algn="ctr" indent="0" marL="0">
+              <a:buNone/>
+            </a:pPr>
+            <a:r>
+              <a:rPr lang="en-US" sz="1200" b="1" dirty="0">
+                <a:solidFill>
+                  <a:srgbClr val="FFFFFF"/>
+                </a:solidFill>
+                <a:latin typeface="Arial" pitchFamily="34" charset="0"/>
+                <a:ea typeface="Arial" pitchFamily="34" charset="-122"/>
+                <a:cs typeface="Arial" pitchFamily="34" charset="-120"/>
+              </a:rPr>
+              <a:t>+</a:t>
+            </a:r>
+            <a:endParaRPr lang="en-US" sz="1200" dirty="0"/>
+          </a:p>
+        </p:txBody>
+      </p:sp>
+      <p:sp>
+        <p:nvSpPr>
+          <p:cNvPr id="32" name="Text 30"/>
+          <p:cNvSpPr txBox="1"/>
+          <p:nvPr/>
+        </p:nvSpPr>
+        <p:spPr>
+          <a:xfrm>
+            <a:off x="651967" y="4617720"/>
+            <a:ext cx="3090672" cy="365760"/>
+          </a:xfrm>
+          <a:prstGeom prst="rect">
+            <a:avLst/>
+          </a:prstGeom>
+          <a:noFill/>
+          <a:ln/>
+        </p:spPr>
+        <p:txBody>
+          <a:bodyPr wrap="square" lIns="0" tIns="0" rIns="0" bIns="0" rtlCol="0" anchor="ctr"/>
+          <a:lstStyle/>
+          <a:p>
+            <a:pPr rtl="1" algn="r" indent="0" marL="0">
+              <a:buNone/>
+            </a:pPr>
+            <a:r>
+              <a:rPr lang="en-US" sz="1700" b="1" dirty="0">
+                <a:solidFill>
+                  <a:srgbClr val="FFFFFF"/>
+                </a:solidFill>
+                <a:latin typeface="Arial" pitchFamily="34" charset="0"/>
+                <a:ea typeface="Arial" pitchFamily="34" charset="-122"/>
+                <a:cs typeface="Arial" pitchFamily="34" charset="-120"/>
+              </a:rPr>
+              <a:t>ניהול המשרד</a:t>
+            </a:r>
+            <a:endParaRPr lang="en-US" sz="1700" dirty="0"/>
+          </a:p>
+        </p:txBody>
+      </p:sp>
+      <p:sp>
+        <p:nvSpPr>
+          <p:cNvPr id="33" name="Text 31"/>
+          <p:cNvSpPr txBox="1"/>
+          <p:nvPr/>
+        </p:nvSpPr>
+        <p:spPr>
+          <a:xfrm>
+            <a:off x="651967" y="5001768"/>
+            <a:ext cx="3090672" cy="822960"/>
+          </a:xfrm>
+          <a:prstGeom prst="rect">
+            <a:avLst/>
+          </a:prstGeom>
+          <a:noFill/>
+          <a:ln/>
+        </p:spPr>
+        <p:txBody>
+          <a:bodyPr wrap="square" lIns="0" tIns="0" rIns="0" bIns="0" rtlCol="0" anchor="ctr"/>
+          <a:lstStyle/>
+          <a:p>
+            <a:pPr rtl="1" algn="r" indent="0" marL="0">
+              <a:lnSpc>
+                <a:spcPct val="130000"/>
+              </a:lnSpc>
+              <a:buNone/>
+            </a:pPr>
+            <a:r>
+              <a:rPr lang="en-US" sz="1100" dirty="0">
+                <a:solidFill>
+                  <a:srgbClr val="9FC0DA"/>
+                </a:solidFill>
+                <a:latin typeface="Arial" pitchFamily="34" charset="0"/>
+                <a:ea typeface="Arial" pitchFamily="34" charset="-122"/>
+                <a:cs typeface="Arial" pitchFamily="34" charset="-120"/>
+              </a:rPr>
+              <a:t>יועצים והרשאות, חיוב, לידים, תבניות הודעות ובקרת איכות</a:t>
+            </a:r>
+            <a:endParaRPr lang="en-US" sz="1100" dirty="0"/>
           </a:p>
         </p:txBody>
       </p:sp>
@@ -3635,7 +5529,7 @@
     <p:bg>
       <p:bgPr>
         <a:solidFill>
-          <a:srgbClr val="0C4068"/>
+          <a:srgbClr val="FFFFFF"/>
         </a:solidFill>
       </p:bgPr>
     </p:bg>
@@ -3661,24 +5555,24 @@
         </p:nvSpPr>
         <p:spPr>
           <a:xfrm>
-            <a:off x="685800" y="777240"/>
-            <a:ext cx="10820095" cy="365760"/>
-          </a:xfrm>
-          <a:prstGeom prst="rect">
-            <a:avLst/>
-          </a:prstGeom>
-          <a:noFill/>
-          <a:ln/>
-        </p:spPr>
-        <p:txBody>
-          <a:bodyPr wrap="square" lIns="0" tIns="0" rIns="0" bIns="0" rtlCol="0" anchor="ctr"/>
-          <a:lstStyle/>
-          <a:p>
-            <a:pPr rtl="1" algn="r" indent="0" marL="0">
-              <a:buNone/>
-            </a:pPr>
-            <a:r>
-              <a:rPr lang="en-US" sz="1400" b="1" dirty="0">
+            <a:off x="658368" y="365760"/>
+            <a:ext cx="10874959" cy="274320"/>
+          </a:xfrm>
+          <a:prstGeom prst="rect">
+            <a:avLst/>
+          </a:prstGeom>
+          <a:noFill/>
+          <a:ln/>
+        </p:spPr>
+        <p:txBody>
+          <a:bodyPr wrap="square" lIns="0" tIns="0" rIns="0" bIns="0" rtlCol="0" anchor="ctr"/>
+          <a:lstStyle/>
+          <a:p>
+            <a:pPr rtl="1" algn="r" indent="0" marL="0">
+              <a:buNone/>
+            </a:pPr>
+            <a:r>
+              <a:rPr lang="en-US" sz="1250" b="1" dirty="0">
                 <a:solidFill>
                   <a:srgbClr val="E8635A"/>
                 </a:solidFill>
@@ -3686,9 +5580,9 @@
                 <a:ea typeface="Arial" pitchFamily="34" charset="-122"/>
                 <a:cs typeface="Arial" pitchFamily="34" charset="-120"/>
               </a:rPr>
-              <a:t>המתמטיקה שנועלת אותך</a:t>
-            </a:r>
-            <a:endParaRPr lang="en-US" sz="1400" dirty="0"/>
+              <a:t>חלק 1 · תפעול חודשי</a:t>
+            </a:r>
+            <a:endParaRPr lang="en-US" sz="1250" dirty="0"/>
           </a:p>
         </p:txBody>
       </p:sp>
@@ -3700,24 +5594,184 @@
         </p:nvSpPr>
         <p:spPr>
           <a:xfrm>
-            <a:off x="8625535" y="2148840"/>
-            <a:ext cx="2880360" cy="1234440"/>
-          </a:xfrm>
-          <a:prstGeom prst="rect">
-            <a:avLst/>
-          </a:prstGeom>
-          <a:noFill/>
-          <a:ln/>
-        </p:spPr>
-        <p:txBody>
-          <a:bodyPr wrap="square" lIns="0" tIns="0" rIns="0" bIns="0" rtlCol="0" anchor="ctr"/>
-          <a:lstStyle/>
-          <a:p>
-            <a:pPr algn="ctr" indent="0" marL="0">
-              <a:buNone/>
-            </a:pPr>
-            <a:r>
-              <a:rPr lang="en-US" sz="6400" b="1" dirty="0">
+            <a:off x="658368" y="658368"/>
+            <a:ext cx="10874959" cy="566928"/>
+          </a:xfrm>
+          <a:prstGeom prst="rect">
+            <a:avLst/>
+          </a:prstGeom>
+          <a:noFill/>
+          <a:ln/>
+        </p:spPr>
+        <p:txBody>
+          <a:bodyPr wrap="square" lIns="0" tIns="0" rIns="0" bIns="0" rtlCol="0" anchor="ctr"/>
+          <a:lstStyle/>
+          <a:p>
+            <a:pPr rtl="1" algn="r" indent="0" marL="0">
+              <a:buNone/>
+            </a:pPr>
+            <a:r>
+              <a:rPr lang="en-US" sz="2900" b="1" dirty="0">
+                <a:solidFill>
+                  <a:srgbClr val="0C4068"/>
+                </a:solidFill>
+                <a:latin typeface="Arial" pitchFamily="34" charset="0"/>
+                <a:ea typeface="Arial" pitchFamily="34" charset="-122"/>
+                <a:cs typeface="Arial" pitchFamily="34" charset="-120"/>
+              </a:rPr>
+              <a:t>התפעול מבוצע על ידי HK, לא על ידך</a:t>
+            </a:r>
+            <a:endParaRPr lang="en-US" sz="2900" dirty="0"/>
+          </a:p>
+        </p:txBody>
+      </p:sp>
+      <p:sp>
+        <p:nvSpPr>
+          <p:cNvPr id="4" name="Text 2"/>
+          <p:cNvSpPr txBox="1"/>
+          <p:nvPr/>
+        </p:nvSpPr>
+        <p:spPr>
+          <a:xfrm>
+            <a:off x="658368" y="1261872"/>
+            <a:ext cx="10874959" cy="786384"/>
+          </a:xfrm>
+          <a:prstGeom prst="rect">
+            <a:avLst/>
+          </a:prstGeom>
+          <a:noFill/>
+          <a:ln/>
+        </p:spPr>
+        <p:txBody>
+          <a:bodyPr wrap="square" lIns="0" tIns="0" rIns="0" bIns="0" rtlCol="0" anchor="ctr"/>
+          <a:lstStyle/>
+          <a:p>
+            <a:pPr rtl="1" algn="r" indent="0" marL="0">
+              <a:lnSpc>
+                <a:spcPct val="135000"/>
+              </a:lnSpc>
+              <a:buNone/>
+            </a:pPr>
+            <a:r>
+              <a:rPr lang="en-US" sz="1300" dirty="0">
+                <a:solidFill>
+                  <a:srgbClr val="51677A"/>
+                </a:solidFill>
+                <a:latin typeface="Arial" pitchFamily="34" charset="0"/>
+                <a:ea typeface="Arial" pitchFamily="34" charset="-122"/>
+                <a:cs typeface="Arial" pitchFamily="34" charset="-120"/>
+              </a:rPr>
+              <a:t>מנהל תזרים של HK מריץ לכל חברה חמישה שלבי עבודה — קיטלוג תנועות, מוטבי שיקים, נגררות ולא־צפויות, הודעות מהלקוח והזנות עתידיות — ואחריהם חמש בדיקות שסוגרות את החודש.</a:t>
+            </a:r>
+            <a:endParaRPr lang="en-US" sz="1300" dirty="0"/>
+          </a:p>
+        </p:txBody>
+      </p:sp>
+      <p:sp>
+        <p:nvSpPr>
+          <p:cNvPr id="5" name="Shape 3"/>
+          <p:cNvSpPr/>
+          <p:nvPr/>
+        </p:nvSpPr>
+        <p:spPr>
+          <a:xfrm>
+            <a:off x="4069080" y="2130552"/>
+            <a:ext cx="7509967" cy="4389120"/>
+          </a:xfrm>
+          <a:prstGeom prst="roundRect">
+            <a:avLst>
+              <a:gd name="adj" fmla="val 1458"/>
+            </a:avLst>
+          </a:prstGeom>
+          <a:solidFill>
+            <a:srgbClr val="FFFFFF"/>
+          </a:solidFill>
+          <a:ln w="12700">
+            <a:solidFill>
+              <a:srgbClr val="D5DEE8"/>
+            </a:solidFill>
+            <a:prstDash val="solid"/>
+          </a:ln>
+          <a:effectLst>
+            <a:outerShdw sx="100000" sy="100000" kx="0" ky="0" algn="bl" rotWithShape="0" blurRad="228600" dist="50800" dir="5400000">
+              <a:srgbClr val="0C4068">
+                <a:alpha val="24000"/>
+              </a:srgbClr>
+            </a:outerShdw>
+          </a:effectLst>
+        </p:spPr>
+      </p:sp>
+      <p:pic>
+        <p:nvPicPr>
+          <p:cNvPr id="6" name="Image 0" descr="/Users/eyalhazut/Documents/Claude/Projects/hk/mainScreen/docs/shots/mgr-opsmode.png">    </p:cNvPr>
+          <p:cNvPicPr>
+            <a:picLocks noChangeAspect="1"/>
+          </p:cNvPicPr>
+          <p:nvPr/>
+        </p:nvPicPr>
+        <p:blipFill>
+          <a:blip r:embed="rId1"/>
+          <a:srcRect l="0" r="0" t="0" b="0"/>
+          <a:stretch/>
+        </p:blipFill>
+        <p:spPr>
+          <a:xfrm>
+            <a:off x="4114800" y="2176272"/>
+            <a:ext cx="7418527" cy="4297680"/>
+          </a:xfrm>
+          <a:prstGeom prst="rect">
+            <a:avLst/>
+          </a:prstGeom>
+        </p:spPr>
+      </p:pic>
+      <p:sp>
+        <p:nvSpPr>
+          <p:cNvPr id="7" name="Shape 4"/>
+          <p:cNvSpPr/>
+          <p:nvPr/>
+        </p:nvSpPr>
+        <p:spPr>
+          <a:xfrm>
+            <a:off x="4370832" y="2560320"/>
+            <a:ext cx="2926080" cy="621792"/>
+          </a:xfrm>
+          <a:prstGeom prst="roundRect">
+            <a:avLst>
+              <a:gd name="adj" fmla="val 8824"/>
+            </a:avLst>
+          </a:prstGeom>
+          <a:solidFill>
+            <a:srgbClr val="0C4068"/>
+          </a:solidFill>
+          <a:ln/>
+        </p:spPr>
+      </p:sp>
+      <p:sp>
+        <p:nvSpPr>
+          <p:cNvPr id="8" name="Text 5"/>
+          <p:cNvSpPr txBox="1"/>
+          <p:nvPr/>
+        </p:nvSpPr>
+        <p:spPr>
+          <a:xfrm>
+            <a:off x="4480560" y="2560320"/>
+            <a:ext cx="2706624" cy="621792"/>
+          </a:xfrm>
+          <a:prstGeom prst="rect">
+            <a:avLst/>
+          </a:prstGeom>
+          <a:noFill/>
+          <a:ln/>
+        </p:spPr>
+        <p:txBody>
+          <a:bodyPr wrap="square" lIns="0" tIns="0" rIns="0" bIns="0" rtlCol="0" anchor="ctr"/>
+          <a:lstStyle/>
+          <a:p>
+            <a:pPr rtl="1" algn="r" indent="0" marL="0">
+              <a:buNone/>
+            </a:pPr>
+            <a:r>
+              <a:rPr lang="en-US" sz="1050" dirty="0">
                 <a:solidFill>
                   <a:srgbClr val="FFFFFF"/>
                 </a:solidFill>
@@ -3725,46 +5779,112 @@
                 <a:ea typeface="Arial" pitchFamily="34" charset="-122"/>
                 <a:cs typeface="Arial" pitchFamily="34" charset="-120"/>
               </a:rPr>
-              <a:t>7–10</a:t>
-            </a:r>
-            <a:endParaRPr lang="en-US" sz="6400" dirty="0"/>
-          </a:p>
-        </p:txBody>
-      </p:sp>
-      <p:sp>
-        <p:nvSpPr>
-          <p:cNvPr id="4" name="Text 2"/>
-          <p:cNvSpPr txBox="1"/>
-          <p:nvPr/>
-        </p:nvSpPr>
-        <p:spPr>
-          <a:xfrm>
-            <a:off x="8808415" y="3474720"/>
-            <a:ext cx="2514600" cy="640080"/>
-          </a:xfrm>
-          <a:prstGeom prst="rect">
-            <a:avLst/>
-          </a:prstGeom>
-          <a:noFill/>
-          <a:ln/>
-        </p:spPr>
-        <p:txBody>
-          <a:bodyPr wrap="square" lIns="0" tIns="0" rIns="0" bIns="0" rtlCol="0" anchor="ctr"/>
-          <a:lstStyle/>
-          <a:p>
-            <a:pPr rtl="1" algn="ctr" indent="0" marL="0">
-              <a:buNone/>
-            </a:pPr>
-            <a:r>
-              <a:rPr lang="en-US" sz="1350" dirty="0">
-                <a:solidFill>
-                  <a:srgbClr val="9FC0DA"/>
-                </a:solidFill>
-                <a:latin typeface="Arial" pitchFamily="34" charset="0"/>
-                <a:ea typeface="Arial" pitchFamily="34" charset="-122"/>
-                <a:cs typeface="Arial" pitchFamily="34" charset="-120"/>
-              </a:rPr>
-              <a:t>שעות עבודה פר לקוח בחודש</a:t>
+              <a:t>חמישה שלבי עבודה · חמש בדיקות · כל חודש</a:t>
+            </a:r>
+            <a:endParaRPr lang="en-US" sz="1050" dirty="0"/>
+          </a:p>
+        </p:txBody>
+      </p:sp>
+      <p:sp>
+        <p:nvSpPr>
+          <p:cNvPr id="9" name="Shape 6"/>
+          <p:cNvSpPr/>
+          <p:nvPr/>
+        </p:nvSpPr>
+        <p:spPr>
+          <a:xfrm>
+            <a:off x="658368" y="2176272"/>
+            <a:ext cx="3200400" cy="4297680"/>
+          </a:xfrm>
+          <a:prstGeom prst="roundRect">
+            <a:avLst>
+              <a:gd name="adj" fmla="val 2000"/>
+            </a:avLst>
+          </a:prstGeom>
+          <a:solidFill>
+            <a:srgbClr val="F4F7FA"/>
+          </a:solidFill>
+          <a:ln w="12700">
+            <a:solidFill>
+              <a:srgbClr val="E6ECF4"/>
+            </a:solidFill>
+            <a:prstDash val="solid"/>
+          </a:ln>
+        </p:spPr>
+      </p:sp>
+      <p:sp>
+        <p:nvSpPr>
+          <p:cNvPr id="10" name="Text 7"/>
+          <p:cNvSpPr txBox="1"/>
+          <p:nvPr/>
+        </p:nvSpPr>
+        <p:spPr>
+          <a:xfrm>
+            <a:off x="859536" y="2395728"/>
+            <a:ext cx="2798064" cy="274320"/>
+          </a:xfrm>
+          <a:prstGeom prst="rect">
+            <a:avLst/>
+          </a:prstGeom>
+          <a:noFill/>
+          <a:ln/>
+        </p:spPr>
+        <p:txBody>
+          <a:bodyPr wrap="square" lIns="0" tIns="0" rIns="0" bIns="0" rtlCol="0" anchor="ctr"/>
+          <a:lstStyle/>
+          <a:p>
+            <a:pPr rtl="1" algn="r" indent="0" marL="0">
+              <a:buNone/>
+            </a:pPr>
+            <a:r>
+              <a:rPr lang="en-US" sz="1050" b="1" dirty="0">
+                <a:solidFill>
+                  <a:srgbClr val="E8635A"/>
+                </a:solidFill>
+                <a:latin typeface="Arial" pitchFamily="34" charset="0"/>
+                <a:ea typeface="Arial" pitchFamily="34" charset="-122"/>
+                <a:cs typeface="Arial" pitchFamily="34" charset="-120"/>
+              </a:rPr>
+              <a:t>היתרון ליועץ</a:t>
+            </a:r>
+            <a:endParaRPr lang="en-US" sz="1050" dirty="0"/>
+          </a:p>
+        </p:txBody>
+      </p:sp>
+      <p:sp>
+        <p:nvSpPr>
+          <p:cNvPr id="11" name="Text 8"/>
+          <p:cNvSpPr txBox="1"/>
+          <p:nvPr/>
+        </p:nvSpPr>
+        <p:spPr>
+          <a:xfrm>
+            <a:off x="859536" y="2779776"/>
+            <a:ext cx="2798064" cy="310896"/>
+          </a:xfrm>
+          <a:prstGeom prst="rect">
+            <a:avLst/>
+          </a:prstGeom>
+          <a:noFill/>
+          <a:ln/>
+        </p:spPr>
+        <p:txBody>
+          <a:bodyPr wrap="square" lIns="0" tIns="0" rIns="0" bIns="0" rtlCol="0" anchor="ctr"/>
+          <a:lstStyle/>
+          <a:p>
+            <a:pPr rtl="1" algn="r" indent="0" marL="0">
+              <a:buNone/>
+            </a:pPr>
+            <a:r>
+              <a:rPr lang="en-US" sz="1350" b="1" dirty="0">
+                <a:solidFill>
+                  <a:srgbClr val="0C4068"/>
+                </a:solidFill>
+                <a:latin typeface="Arial" pitchFamily="34" charset="0"/>
+                <a:ea typeface="Arial" pitchFamily="34" charset="-122"/>
+                <a:cs typeface="Arial" pitchFamily="34" charset="-120"/>
+              </a:rPr>
+              <a:t>אפס שעות הקלדה</a:t>
             </a:r>
             <a:endParaRPr lang="en-US" sz="1350" dirty="0"/>
           </a:p>
@@ -3772,116 +5892,80 @@
       </p:sp>
       <p:sp>
         <p:nvSpPr>
-          <p:cNvPr id="5" name="Text 3"/>
-          <p:cNvSpPr txBox="1"/>
-          <p:nvPr/>
-        </p:nvSpPr>
-        <p:spPr>
-          <a:xfrm>
-            <a:off x="7848295" y="2240280"/>
-            <a:ext cx="777240" cy="1097280"/>
-          </a:xfrm>
-          <a:prstGeom prst="rect">
-            <a:avLst/>
-          </a:prstGeom>
-          <a:noFill/>
-          <a:ln/>
-        </p:spPr>
-        <p:txBody>
-          <a:bodyPr wrap="square" lIns="0" tIns="0" rIns="0" bIns="0" rtlCol="0" anchor="ctr"/>
-          <a:lstStyle/>
-          <a:p>
-            <a:pPr algn="ctr" indent="0" marL="0">
-              <a:buNone/>
-            </a:pPr>
-            <a:r>
-              <a:rPr lang="en-US" sz="4000" dirty="0">
-                <a:solidFill>
-                  <a:srgbClr val="3F6E96"/>
-                </a:solidFill>
-                <a:latin typeface="Arial" pitchFamily="34" charset="0"/>
-                <a:ea typeface="Arial" pitchFamily="34" charset="-122"/>
-                <a:cs typeface="Arial" pitchFamily="34" charset="-120"/>
-              </a:rPr>
-              <a:t>×</a:t>
-            </a:r>
-            <a:endParaRPr lang="en-US" sz="4000" dirty="0"/>
-          </a:p>
-        </p:txBody>
-      </p:sp>
-      <p:sp>
-        <p:nvSpPr>
-          <p:cNvPr id="6" name="Text 4"/>
-          <p:cNvSpPr txBox="1"/>
-          <p:nvPr/>
-        </p:nvSpPr>
-        <p:spPr>
-          <a:xfrm>
-            <a:off x="4967935" y="2148840"/>
-            <a:ext cx="2880360" cy="1234440"/>
-          </a:xfrm>
-          <a:prstGeom prst="rect">
-            <a:avLst/>
-          </a:prstGeom>
-          <a:noFill/>
-          <a:ln/>
-        </p:spPr>
-        <p:txBody>
-          <a:bodyPr wrap="square" lIns="0" tIns="0" rIns="0" bIns="0" rtlCol="0" anchor="ctr"/>
-          <a:lstStyle/>
-          <a:p>
-            <a:pPr algn="ctr" indent="0" marL="0">
-              <a:buNone/>
-            </a:pPr>
-            <a:r>
-              <a:rPr lang="en-US" sz="6400" b="1" dirty="0">
-                <a:solidFill>
-                  <a:srgbClr val="FFFFFF"/>
-                </a:solidFill>
-                <a:latin typeface="Arial" pitchFamily="34" charset="0"/>
-                <a:ea typeface="Arial" pitchFamily="34" charset="-122"/>
-                <a:cs typeface="Arial" pitchFamily="34" charset="-120"/>
-              </a:rPr>
-              <a:t>10</a:t>
-            </a:r>
-            <a:endParaRPr lang="en-US" sz="6400" dirty="0"/>
-          </a:p>
-        </p:txBody>
-      </p:sp>
-      <p:sp>
-        <p:nvSpPr>
-          <p:cNvPr id="7" name="Text 5"/>
-          <p:cNvSpPr txBox="1"/>
-          <p:nvPr/>
-        </p:nvSpPr>
-        <p:spPr>
-          <a:xfrm>
-            <a:off x="5150815" y="3474720"/>
-            <a:ext cx="2514600" cy="640080"/>
-          </a:xfrm>
-          <a:prstGeom prst="rect">
-            <a:avLst/>
-          </a:prstGeom>
-          <a:noFill/>
-          <a:ln/>
-        </p:spPr>
-        <p:txBody>
-          <a:bodyPr wrap="square" lIns="0" tIns="0" rIns="0" bIns="0" rtlCol="0" anchor="ctr"/>
-          <a:lstStyle/>
-          <a:p>
-            <a:pPr rtl="1" algn="ctr" indent="0" marL="0">
-              <a:buNone/>
-            </a:pPr>
-            <a:r>
-              <a:rPr lang="en-US" sz="1350" dirty="0">
-                <a:solidFill>
-                  <a:srgbClr val="9FC0DA"/>
-                </a:solidFill>
-                <a:latin typeface="Arial" pitchFamily="34" charset="0"/>
-                <a:ea typeface="Arial" pitchFamily="34" charset="-122"/>
-                <a:cs typeface="Arial" pitchFamily="34" charset="-120"/>
-              </a:rPr>
-              <a:t>לקוחות</a:t>
+          <p:cNvPr id="12" name="Text 9"/>
+          <p:cNvSpPr txBox="1"/>
+          <p:nvPr/>
+        </p:nvSpPr>
+        <p:spPr>
+          <a:xfrm>
+            <a:off x="859536" y="3108960"/>
+            <a:ext cx="2798064" cy="810768"/>
+          </a:xfrm>
+          <a:prstGeom prst="rect">
+            <a:avLst/>
+          </a:prstGeom>
+          <a:noFill/>
+          <a:ln/>
+        </p:spPr>
+        <p:txBody>
+          <a:bodyPr wrap="square" lIns="0" tIns="0" rIns="0" bIns="0" rtlCol="0" anchor="ctr"/>
+          <a:lstStyle/>
+          <a:p>
+            <a:pPr rtl="1" algn="r" indent="0" marL="0">
+              <a:lnSpc>
+                <a:spcPct val="130000"/>
+              </a:lnSpc>
+              <a:buNone/>
+            </a:pPr>
+            <a:r>
+              <a:rPr lang="en-US" sz="1100" dirty="0">
+                <a:solidFill>
+                  <a:srgbClr val="51677A"/>
+                </a:solidFill>
+                <a:latin typeface="Arial" pitchFamily="34" charset="0"/>
+                <a:ea typeface="Arial" pitchFamily="34" charset="-122"/>
+                <a:cs typeface="Arial" pitchFamily="34" charset="-120"/>
+              </a:rPr>
+              <a:t>העבודה שנעשית היום ידנית — קיטלוג, התאמות, רדיפה אחרי חומר — יורדת ממך במלואה.</a:t>
+            </a:r>
+            <a:endParaRPr lang="en-US" sz="1100" dirty="0"/>
+          </a:p>
+        </p:txBody>
+      </p:sp>
+      <p:sp>
+        <p:nvSpPr>
+          <p:cNvPr id="13" name="Text 10"/>
+          <p:cNvSpPr txBox="1"/>
+          <p:nvPr/>
+        </p:nvSpPr>
+        <p:spPr>
+          <a:xfrm>
+            <a:off x="859536" y="3992880"/>
+            <a:ext cx="2798064" cy="310896"/>
+          </a:xfrm>
+          <a:prstGeom prst="rect">
+            <a:avLst/>
+          </a:prstGeom>
+          <a:noFill/>
+          <a:ln/>
+        </p:spPr>
+        <p:txBody>
+          <a:bodyPr wrap="square" lIns="0" tIns="0" rIns="0" bIns="0" rtlCol="0" anchor="ctr"/>
+          <a:lstStyle/>
+          <a:p>
+            <a:pPr rtl="1" algn="r" indent="0" marL="0">
+              <a:buNone/>
+            </a:pPr>
+            <a:r>
+              <a:rPr lang="en-US" sz="1350" b="1" dirty="0">
+                <a:solidFill>
+                  <a:srgbClr val="0C4068"/>
+                </a:solidFill>
+                <a:latin typeface="Arial" pitchFamily="34" charset="0"/>
+                <a:ea typeface="Arial" pitchFamily="34" charset="-122"/>
+                <a:cs typeface="Arial" pitchFamily="34" charset="-120"/>
+              </a:rPr>
+              <a:t>תזרים בדוק, לא רק מוכן</a:t>
             </a:r>
             <a:endParaRPr lang="en-US" sz="1350" dirty="0"/>
           </a:p>
@@ -3889,116 +5973,80 @@
       </p:sp>
       <p:sp>
         <p:nvSpPr>
-          <p:cNvPr id="8" name="Text 6"/>
-          <p:cNvSpPr txBox="1"/>
-          <p:nvPr/>
-        </p:nvSpPr>
-        <p:spPr>
-          <a:xfrm>
-            <a:off x="4190695" y="2240280"/>
-            <a:ext cx="777240" cy="1097280"/>
-          </a:xfrm>
-          <a:prstGeom prst="rect">
-            <a:avLst/>
-          </a:prstGeom>
-          <a:noFill/>
-          <a:ln/>
-        </p:spPr>
-        <p:txBody>
-          <a:bodyPr wrap="square" lIns="0" tIns="0" rIns="0" bIns="0" rtlCol="0" anchor="ctr"/>
-          <a:lstStyle/>
-          <a:p>
-            <a:pPr algn="ctr" indent="0" marL="0">
-              <a:buNone/>
-            </a:pPr>
-            <a:r>
-              <a:rPr lang="en-US" sz="4000" dirty="0">
-                <a:solidFill>
-                  <a:srgbClr val="3F6E96"/>
-                </a:solidFill>
-                <a:latin typeface="Arial" pitchFamily="34" charset="0"/>
-                <a:ea typeface="Arial" pitchFamily="34" charset="-122"/>
-                <a:cs typeface="Arial" pitchFamily="34" charset="-120"/>
-              </a:rPr>
-              <a:t>=</a:t>
-            </a:r>
-            <a:endParaRPr lang="en-US" sz="4000" dirty="0"/>
-          </a:p>
-        </p:txBody>
-      </p:sp>
-      <p:sp>
-        <p:nvSpPr>
-          <p:cNvPr id="9" name="Text 7"/>
-          <p:cNvSpPr txBox="1"/>
-          <p:nvPr/>
-        </p:nvSpPr>
-        <p:spPr>
-          <a:xfrm>
-            <a:off x="1310335" y="2148840"/>
-            <a:ext cx="2880360" cy="1234440"/>
-          </a:xfrm>
-          <a:prstGeom prst="rect">
-            <a:avLst/>
-          </a:prstGeom>
-          <a:noFill/>
-          <a:ln/>
-        </p:spPr>
-        <p:txBody>
-          <a:bodyPr wrap="square" lIns="0" tIns="0" rIns="0" bIns="0" rtlCol="0" anchor="ctr"/>
-          <a:lstStyle/>
-          <a:p>
-            <a:pPr algn="ctr" indent="0" marL="0">
-              <a:buNone/>
-            </a:pPr>
-            <a:r>
-              <a:rPr lang="en-US" sz="6400" b="1" dirty="0">
-                <a:solidFill>
-                  <a:srgbClr val="E8635A"/>
-                </a:solidFill>
-                <a:latin typeface="Arial" pitchFamily="34" charset="0"/>
-                <a:ea typeface="Arial" pitchFamily="34" charset="-122"/>
-                <a:cs typeface="Arial" pitchFamily="34" charset="-120"/>
-              </a:rPr>
-              <a:t>משרה</a:t>
-            </a:r>
-            <a:endParaRPr lang="en-US" sz="6400" dirty="0"/>
-          </a:p>
-        </p:txBody>
-      </p:sp>
-      <p:sp>
-        <p:nvSpPr>
-          <p:cNvPr id="10" name="Text 8"/>
-          <p:cNvSpPr txBox="1"/>
-          <p:nvPr/>
-        </p:nvSpPr>
-        <p:spPr>
-          <a:xfrm>
-            <a:off x="1493215" y="3474720"/>
-            <a:ext cx="2514600" cy="640080"/>
-          </a:xfrm>
-          <a:prstGeom prst="rect">
-            <a:avLst/>
-          </a:prstGeom>
-          <a:noFill/>
-          <a:ln/>
-        </p:spPr>
-        <p:txBody>
-          <a:bodyPr wrap="square" lIns="0" tIns="0" rIns="0" bIns="0" rtlCol="0" anchor="ctr"/>
-          <a:lstStyle/>
-          <a:p>
-            <a:pPr rtl="1" algn="ctr" indent="0" marL="0">
-              <a:buNone/>
-            </a:pPr>
-            <a:r>
-              <a:rPr lang="en-US" sz="1350" dirty="0">
-                <a:solidFill>
-                  <a:srgbClr val="9FC0DA"/>
-                </a:solidFill>
-                <a:latin typeface="Arial" pitchFamily="34" charset="0"/>
-                <a:ea typeface="Arial" pitchFamily="34" charset="-122"/>
-                <a:cs typeface="Arial" pitchFamily="34" charset="-120"/>
-              </a:rPr>
-              <a:t>של פקיד</a:t>
+          <p:cNvPr id="14" name="Text 11"/>
+          <p:cNvSpPr txBox="1"/>
+          <p:nvPr/>
+        </p:nvSpPr>
+        <p:spPr>
+          <a:xfrm>
+            <a:off x="859536" y="4322064"/>
+            <a:ext cx="2798064" cy="810768"/>
+          </a:xfrm>
+          <a:prstGeom prst="rect">
+            <a:avLst/>
+          </a:prstGeom>
+          <a:noFill/>
+          <a:ln/>
+        </p:spPr>
+        <p:txBody>
+          <a:bodyPr wrap="square" lIns="0" tIns="0" rIns="0" bIns="0" rtlCol="0" anchor="ctr"/>
+          <a:lstStyle/>
+          <a:p>
+            <a:pPr rtl="1" algn="r" indent="0" marL="0">
+              <a:lnSpc>
+                <a:spcPct val="130000"/>
+              </a:lnSpc>
+              <a:buNone/>
+            </a:pPr>
+            <a:r>
+              <a:rPr lang="en-US" sz="1100" dirty="0">
+                <a:solidFill>
+                  <a:srgbClr val="51677A"/>
+                </a:solidFill>
+                <a:latin typeface="Arial" pitchFamily="34" charset="0"/>
+                <a:ea typeface="Arial" pitchFamily="34" charset="-122"/>
+                <a:cs typeface="Arial" pitchFamily="34" charset="-120"/>
+              </a:rPr>
+              <a:t>הבדיקה מוודאת שהרווח הנקי יושב על תנועת הבנקים בסבילות 300 ₪, והתזרים לא נשלח עד שכל חריגה הוכרעה.</a:t>
+            </a:r>
+            <a:endParaRPr lang="en-US" sz="1100" dirty="0"/>
+          </a:p>
+        </p:txBody>
+      </p:sp>
+      <p:sp>
+        <p:nvSpPr>
+          <p:cNvPr id="15" name="Text 12"/>
+          <p:cNvSpPr txBox="1"/>
+          <p:nvPr/>
+        </p:nvSpPr>
+        <p:spPr>
+          <a:xfrm>
+            <a:off x="859536" y="5205984"/>
+            <a:ext cx="2798064" cy="310896"/>
+          </a:xfrm>
+          <a:prstGeom prst="rect">
+            <a:avLst/>
+          </a:prstGeom>
+          <a:noFill/>
+          <a:ln/>
+        </p:spPr>
+        <p:txBody>
+          <a:bodyPr wrap="square" lIns="0" tIns="0" rIns="0" bIns="0" rtlCol="0" anchor="ctr"/>
+          <a:lstStyle/>
+          <a:p>
+            <a:pPr rtl="1" algn="r" indent="0" marL="0">
+              <a:buNone/>
+            </a:pPr>
+            <a:r>
+              <a:rPr lang="en-US" sz="1350" b="1" dirty="0">
+                <a:solidFill>
+                  <a:srgbClr val="0C4068"/>
+                </a:solidFill>
+                <a:latin typeface="Arial" pitchFamily="34" charset="0"/>
+                <a:ea typeface="Arial" pitchFamily="34" charset="-122"/>
+                <a:cs typeface="Arial" pitchFamily="34" charset="-120"/>
+              </a:rPr>
+              <a:t>עלות ידועה פר לקוח</a:t>
             </a:r>
             <a:endParaRPr lang="en-US" sz="1350" dirty="0"/>
           </a:p>
@@ -4006,54 +6054,43 @@
       </p:sp>
       <p:sp>
         <p:nvSpPr>
-          <p:cNvPr id="11" name="Text 9"/>
-          <p:cNvSpPr txBox="1"/>
-          <p:nvPr/>
-        </p:nvSpPr>
-        <p:spPr>
-          <a:xfrm>
-            <a:off x="685800" y="5394960"/>
-            <a:ext cx="10820095" cy="731520"/>
-          </a:xfrm>
-          <a:prstGeom prst="rect">
-            <a:avLst/>
-          </a:prstGeom>
-          <a:noFill/>
-          <a:ln/>
-        </p:spPr>
-        <p:txBody>
-          <a:bodyPr wrap="square" lIns="0" tIns="0" rIns="0" bIns="0" rtlCol="0" anchor="ctr"/>
-          <a:lstStyle/>
-          <a:p>
-            <a:pPr algn="r" indent="0" marL="0">
-              <a:buNone/>
-            </a:pPr>
-            <a:r>
-              <a:rPr lang="en-US" sz="3000" b="1" dirty="0">
-                <a:solidFill>
-                  <a:srgbClr val="FFFFFF"/>
-                </a:solidFill>
-                <a:latin typeface="Arial" pitchFamily="34" charset="0"/>
-                <a:ea typeface="Arial" pitchFamily="34" charset="-122"/>
-                <a:cs typeface="Arial" pitchFamily="34" charset="-120"/>
-              </a:rPr>
-              <a:t>התקרה שלך היא שעות. </a:t>
-            </a:r>
-            <a:pPr algn="r" indent="0" marL="0">
-              <a:buNone/>
-            </a:pPr>
-            <a:r>
-              <a:rPr lang="en-US" sz="3000" b="1" dirty="0">
-                <a:solidFill>
-                  <a:srgbClr val="E8635A"/>
-                </a:solidFill>
-                <a:latin typeface="Arial" pitchFamily="34" charset="0"/>
-                <a:ea typeface="Arial" pitchFamily="34" charset="-122"/>
-                <a:cs typeface="Arial" pitchFamily="34" charset="-120"/>
-              </a:rPr>
-              <a:t>לא יכולת ייעוץ.</a:t>
-            </a:r>
-            <a:endParaRPr lang="en-US" sz="3000" dirty="0"/>
+          <p:cNvPr id="16" name="Text 13"/>
+          <p:cNvSpPr txBox="1"/>
+          <p:nvPr/>
+        </p:nvSpPr>
+        <p:spPr>
+          <a:xfrm>
+            <a:off x="859536" y="5535168"/>
+            <a:ext cx="2798064" cy="810768"/>
+          </a:xfrm>
+          <a:prstGeom prst="rect">
+            <a:avLst/>
+          </a:prstGeom>
+          <a:noFill/>
+          <a:ln/>
+        </p:spPr>
+        <p:txBody>
+          <a:bodyPr wrap="square" lIns="0" tIns="0" rIns="0" bIns="0" rtlCol="0" anchor="ctr"/>
+          <a:lstStyle/>
+          <a:p>
+            <a:pPr rtl="1" algn="r" indent="0" marL="0">
+              <a:lnSpc>
+                <a:spcPct val="130000"/>
+              </a:lnSpc>
+              <a:buNone/>
+            </a:pPr>
+            <a:r>
+              <a:rPr lang="en-US" sz="1100" dirty="0">
+                <a:solidFill>
+                  <a:srgbClr val="51677A"/>
+                </a:solidFill>
+                <a:latin typeface="Arial" pitchFamily="34" charset="0"/>
+                <a:ea typeface="Arial" pitchFamily="34" charset="-122"/>
+                <a:cs typeface="Arial" pitchFamily="34" charset="-120"/>
+              </a:rPr>
+              <a:t>זמן התפעול נמדד פר חברה, כך שידוע כמה כל לקוח עולה בפועל.</a:t>
+            </a:r>
+            <a:endParaRPr lang="en-US" sz="1100" dirty="0"/>
           </a:p>
         </p:txBody>
       </p:sp>
@@ -4097,24 +6134,24 @@
         </p:nvSpPr>
         <p:spPr>
           <a:xfrm>
-            <a:off x="685800" y="384048"/>
-            <a:ext cx="10820095" cy="310896"/>
-          </a:xfrm>
-          <a:prstGeom prst="rect">
-            <a:avLst/>
-          </a:prstGeom>
-          <a:noFill/>
-          <a:ln/>
-        </p:spPr>
-        <p:txBody>
-          <a:bodyPr wrap="square" lIns="0" tIns="0" rIns="0" bIns="0" rtlCol="0" anchor="ctr"/>
-          <a:lstStyle/>
-          <a:p>
-            <a:pPr rtl="1" algn="r" indent="0" marL="0">
-              <a:buNone/>
-            </a:pPr>
-            <a:r>
-              <a:rPr lang="en-US" sz="1300" b="1" dirty="0">
+            <a:off x="658368" y="365760"/>
+            <a:ext cx="10874959" cy="274320"/>
+          </a:xfrm>
+          <a:prstGeom prst="rect">
+            <a:avLst/>
+          </a:prstGeom>
+          <a:noFill/>
+          <a:ln/>
+        </p:spPr>
+        <p:txBody>
+          <a:bodyPr wrap="square" lIns="0" tIns="0" rIns="0" bIns="0" rtlCol="0" anchor="ctr"/>
+          <a:lstStyle/>
+          <a:p>
+            <a:pPr rtl="1" algn="r" indent="0" marL="0">
+              <a:buNone/>
+            </a:pPr>
+            <a:r>
+              <a:rPr lang="en-US" sz="1250" b="1" dirty="0">
                 <a:solidFill>
                   <a:srgbClr val="E8635A"/>
                 </a:solidFill>
@@ -4122,101 +6159,90 @@
                 <a:ea typeface="Arial" pitchFamily="34" charset="-122"/>
                 <a:cs typeface="Arial" pitchFamily="34" charset="-120"/>
               </a:rPr>
-              <a:t>מה HK עושה · 1 מתוך 4</a:t>
+              <a:t>חלק 2 · זיכרון לקוח</a:t>
+            </a:r>
+            <a:endParaRPr lang="en-US" sz="1250" dirty="0"/>
+          </a:p>
+        </p:txBody>
+      </p:sp>
+      <p:sp>
+        <p:nvSpPr>
+          <p:cNvPr id="3" name="Text 1"/>
+          <p:cNvSpPr txBox="1"/>
+          <p:nvPr/>
+        </p:nvSpPr>
+        <p:spPr>
+          <a:xfrm>
+            <a:off x="658368" y="658368"/>
+            <a:ext cx="10874959" cy="566928"/>
+          </a:xfrm>
+          <a:prstGeom prst="rect">
+            <a:avLst/>
+          </a:prstGeom>
+          <a:noFill/>
+          <a:ln/>
+        </p:spPr>
+        <p:txBody>
+          <a:bodyPr wrap="square" lIns="0" tIns="0" rIns="0" bIns="0" rtlCol="0" anchor="ctr"/>
+          <a:lstStyle/>
+          <a:p>
+            <a:pPr rtl="1" algn="r" indent="0" marL="0">
+              <a:buNone/>
+            </a:pPr>
+            <a:r>
+              <a:rPr lang="en-US" sz="2900" b="1" dirty="0">
+                <a:solidFill>
+                  <a:srgbClr val="0C4068"/>
+                </a:solidFill>
+                <a:latin typeface="Arial" pitchFamily="34" charset="0"/>
+                <a:ea typeface="Arial" pitchFamily="34" charset="-122"/>
+                <a:cs typeface="Arial" pitchFamily="34" charset="-120"/>
+              </a:rPr>
+              <a:t>המערכת מתחזקת פרופיל חי לכל לקוח</a:t>
+            </a:r>
+            <a:endParaRPr lang="en-US" sz="2900" dirty="0"/>
+          </a:p>
+        </p:txBody>
+      </p:sp>
+      <p:sp>
+        <p:nvSpPr>
+          <p:cNvPr id="4" name="Text 2"/>
+          <p:cNvSpPr txBox="1"/>
+          <p:nvPr/>
+        </p:nvSpPr>
+        <p:spPr>
+          <a:xfrm>
+            <a:off x="658368" y="1261872"/>
+            <a:ext cx="10874959" cy="786384"/>
+          </a:xfrm>
+          <a:prstGeom prst="rect">
+            <a:avLst/>
+          </a:prstGeom>
+          <a:noFill/>
+          <a:ln/>
+        </p:spPr>
+        <p:txBody>
+          <a:bodyPr wrap="square" lIns="0" tIns="0" rIns="0" bIns="0" rtlCol="0" anchor="ctr"/>
+          <a:lstStyle/>
+          <a:p>
+            <a:pPr rtl="1" algn="r" indent="0" marL="0">
+              <a:lnSpc>
+                <a:spcPct val="135000"/>
+              </a:lnSpc>
+              <a:buNone/>
+            </a:pPr>
+            <a:r>
+              <a:rPr lang="en-US" sz="1300" dirty="0">
+                <a:solidFill>
+                  <a:srgbClr val="51677A"/>
+                </a:solidFill>
+                <a:latin typeface="Arial" pitchFamily="34" charset="0"/>
+                <a:ea typeface="Arial" pitchFamily="34" charset="-122"/>
+                <a:cs typeface="Arial" pitchFamily="34" charset="-120"/>
+              </a:rPr>
+              <a:t>שתים־עשרה קטגוריות — מצב תזרימי, פרופיל עסקי, כאבים, יעדים, שביעות רצון, סגנון תקשורת ועוד — מתעדכנות אוטומטית מכל פגישה, שיחה והודעה. לכל קטגוריה פרומפט משלה והגדרה מי רשאי לראות אותה.</a:t>
             </a:r>
             <a:endParaRPr lang="en-US" sz="1300" dirty="0"/>
-          </a:p>
-        </p:txBody>
-      </p:sp>
-      <p:sp>
-        <p:nvSpPr>
-          <p:cNvPr id="3" name="Text 1"/>
-          <p:cNvSpPr txBox="1"/>
-          <p:nvPr/>
-        </p:nvSpPr>
-        <p:spPr>
-          <a:xfrm>
-            <a:off x="685800" y="713232"/>
-            <a:ext cx="10820095" cy="685800"/>
-          </a:xfrm>
-          <a:prstGeom prst="rect">
-            <a:avLst/>
-          </a:prstGeom>
-          <a:noFill/>
-          <a:ln/>
-        </p:spPr>
-        <p:txBody>
-          <a:bodyPr wrap="square" lIns="0" tIns="0" rIns="0" bIns="0" rtlCol="0" anchor="ctr"/>
-          <a:lstStyle/>
-          <a:p>
-            <a:pPr algn="r" indent="0" marL="0">
-              <a:buNone/>
-            </a:pPr>
-            <a:r>
-              <a:rPr lang="en-US" sz="3300" b="1" dirty="0">
-                <a:solidFill>
-                  <a:srgbClr val="0C4068"/>
-                </a:solidFill>
-                <a:latin typeface="Arial" pitchFamily="34" charset="0"/>
-                <a:ea typeface="Arial" pitchFamily="34" charset="-122"/>
-                <a:cs typeface="Arial" pitchFamily="34" charset="-120"/>
-              </a:rPr>
-              <a:t>HK עושה את החודש </a:t>
-            </a:r>
-            <a:pPr algn="r" indent="0" marL="0">
-              <a:buNone/>
-            </a:pPr>
-            <a:r>
-              <a:rPr lang="en-US" sz="3300" b="1" dirty="0">
-                <a:solidFill>
-                  <a:srgbClr val="E8635A"/>
-                </a:solidFill>
-                <a:latin typeface="Arial" pitchFamily="34" charset="0"/>
-                <a:ea typeface="Arial" pitchFamily="34" charset="-122"/>
-                <a:cs typeface="Arial" pitchFamily="34" charset="-120"/>
-              </a:rPr>
-              <a:t>במקומך.</a:t>
-            </a:r>
-            <a:endParaRPr lang="en-US" sz="3300" dirty="0"/>
-          </a:p>
-        </p:txBody>
-      </p:sp>
-      <p:sp>
-        <p:nvSpPr>
-          <p:cNvPr id="4" name="Text 2"/>
-          <p:cNvSpPr txBox="1"/>
-          <p:nvPr/>
-        </p:nvSpPr>
-        <p:spPr>
-          <a:xfrm>
-            <a:off x="685800" y="1426464"/>
-            <a:ext cx="10820095" cy="502920"/>
-          </a:xfrm>
-          <a:prstGeom prst="rect">
-            <a:avLst/>
-          </a:prstGeom>
-          <a:noFill/>
-          <a:ln/>
-        </p:spPr>
-        <p:txBody>
-          <a:bodyPr wrap="square" lIns="0" tIns="0" rIns="0" bIns="0" rtlCol="0" anchor="ctr"/>
-          <a:lstStyle/>
-          <a:p>
-            <a:pPr rtl="1" algn="r" indent="0" marL="0">
-              <a:buNone/>
-            </a:pPr>
-            <a:r>
-              <a:rPr lang="en-US" sz="1450" dirty="0">
-                <a:solidFill>
-                  <a:srgbClr val="51677A"/>
-                </a:solidFill>
-                <a:latin typeface="Arial" pitchFamily="34" charset="0"/>
-                <a:ea typeface="Arial" pitchFamily="34" charset="-122"/>
-                <a:cs typeface="Arial" pitchFamily="34" charset="-120"/>
-              </a:rPr>
-              <a:t>מנהל תזרים של HK מריץ לכל לקוח שלך חמישה שלבי עבודה וחמש בדיקות — כל חודש. אתה מקבל תזרים מוכן ובדוק.</a:t>
-            </a:r>
-            <a:endParaRPr lang="en-US" sz="1450" dirty="0"/>
           </a:p>
         </p:txBody>
       </p:sp>
@@ -4228,12 +6254,12 @@
         </p:nvSpPr>
         <p:spPr>
           <a:xfrm>
-            <a:off x="630936" y="2029968"/>
-            <a:ext cx="10929823" cy="4498848"/>
+            <a:off x="4069080" y="2130552"/>
+            <a:ext cx="7509967" cy="4389120"/>
           </a:xfrm>
           <a:prstGeom prst="roundRect">
             <a:avLst>
-              <a:gd name="adj" fmla="val 1626"/>
+              <a:gd name="adj" fmla="val 1458"/>
             </a:avLst>
           </a:prstGeom>
           <a:solidFill>
@@ -4246,9 +6272,9 @@
             <a:prstDash val="solid"/>
           </a:ln>
           <a:effectLst>
-            <a:outerShdw sx="100000" sy="100000" kx="0" ky="0" algn="bl" rotWithShape="0" blurRad="254000" dist="63500" dir="5400000">
+            <a:outerShdw sx="100000" sy="100000" kx="0" ky="0" algn="bl" rotWithShape="0" blurRad="228600" dist="50800" dir="5400000">
               <a:srgbClr val="0C4068">
-                <a:alpha val="28000"/>
+                <a:alpha val="24000"/>
               </a:srgbClr>
             </a:outerShdw>
           </a:effectLst>
@@ -4256,7 +6282,7 @@
       </p:sp>
       <p:pic>
         <p:nvPicPr>
-          <p:cNvPr id="6" name="Image 0" descr="/Users/eyalhazut/Documents/Claude/Projects/hk/mainScreen/docs/shots/mgr-opsmode.png">    </p:cNvPr>
+          <p:cNvPr id="6" name="Image 0" descr="/Users/eyalhazut/Documents/Claude/Projects/hk/mainScreen/docs/shots/co-mem.png">    </p:cNvPr>
           <p:cNvPicPr>
             <a:picLocks noChangeAspect="1"/>
           </p:cNvPicPr>
@@ -4269,8 +6295,8 @@
         </p:blipFill>
         <p:spPr>
           <a:xfrm>
-            <a:off x="685800" y="2084832"/>
-            <a:ext cx="10820095" cy="4389120"/>
+            <a:off x="4114800" y="2176272"/>
+            <a:ext cx="7418527" cy="4297680"/>
           </a:xfrm>
           <a:prstGeom prst="rect">
             <a:avLst/>
@@ -4285,25 +6311,18 @@
         </p:nvSpPr>
         <p:spPr>
           <a:xfrm>
-            <a:off x="1005840" y="2542032"/>
-            <a:ext cx="3291840" cy="713232"/>
+            <a:off x="4370832" y="2560320"/>
+            <a:ext cx="2926080" cy="621792"/>
           </a:xfrm>
           <a:prstGeom prst="roundRect">
             <a:avLst>
-              <a:gd name="adj" fmla="val 8974"/>
+              <a:gd name="adj" fmla="val 8824"/>
             </a:avLst>
           </a:prstGeom>
           <a:solidFill>
             <a:srgbClr val="0C4068"/>
           </a:solidFill>
           <a:ln/>
-          <a:effectLst>
-            <a:outerShdw sx="100000" sy="100000" kx="0" ky="0" algn="bl" rotWithShape="0" blurRad="152400" dist="38100" dir="5400000">
-              <a:srgbClr val="0A3557">
-                <a:alpha val="40000"/>
-              </a:srgbClr>
-            </a:outerShdw>
-          </a:effectLst>
         </p:spPr>
       </p:sp>
       <p:sp>
@@ -4314,24 +6333,24 @@
         </p:nvSpPr>
         <p:spPr>
           <a:xfrm>
-            <a:off x="1133856" y="2542032"/>
-            <a:ext cx="3035808" cy="713232"/>
-          </a:xfrm>
-          <a:prstGeom prst="rect">
-            <a:avLst/>
-          </a:prstGeom>
-          <a:noFill/>
-          <a:ln/>
-        </p:spPr>
-        <p:txBody>
-          <a:bodyPr wrap="square" lIns="0" tIns="0" rIns="0" bIns="0" rtlCol="0" anchor="ctr"/>
-          <a:lstStyle/>
-          <a:p>
-            <a:pPr rtl="1" algn="r" indent="0" marL="0">
-              <a:buNone/>
-            </a:pPr>
-            <a:r>
-              <a:rPr lang="en-US" sz="1150" dirty="0">
+            <a:off x="4480560" y="2560320"/>
+            <a:ext cx="2706624" cy="621792"/>
+          </a:xfrm>
+          <a:prstGeom prst="rect">
+            <a:avLst/>
+          </a:prstGeom>
+          <a:noFill/>
+          <a:ln/>
+        </p:spPr>
+        <p:txBody>
+          <a:bodyPr wrap="square" lIns="0" tIns="0" rIns="0" bIns="0" rtlCol="0" anchor="ctr"/>
+          <a:lstStyle/>
+          <a:p>
+            <a:pPr rtl="1" algn="r" indent="0" marL="0">
+              <a:buNone/>
+            </a:pPr>
+            <a:r>
+              <a:rPr lang="en-US" sz="1050" dirty="0">
                 <a:solidFill>
                   <a:srgbClr val="FFFFFF"/>
                 </a:solidFill>
@@ -4339,9 +6358,318 @@
                 <a:ea typeface="Arial" pitchFamily="34" charset="-122"/>
                 <a:cs typeface="Arial" pitchFamily="34" charset="-120"/>
               </a:rPr>
-              <a:t>התזרים לא יוצא ללקוח עד שכל חריגה דווחה או הוכרעה</a:t>
-            </a:r>
-            <a:endParaRPr lang="en-US" sz="1150" dirty="0"/>
+              <a:t>מעגל החברה ומעגל אישי</a:t>
+            </a:r>
+            <a:endParaRPr lang="en-US" sz="1050" dirty="0"/>
+          </a:p>
+        </p:txBody>
+      </p:sp>
+      <p:sp>
+        <p:nvSpPr>
+          <p:cNvPr id="9" name="Shape 6"/>
+          <p:cNvSpPr/>
+          <p:nvPr/>
+        </p:nvSpPr>
+        <p:spPr>
+          <a:xfrm>
+            <a:off x="658368" y="2176272"/>
+            <a:ext cx="3200400" cy="4297680"/>
+          </a:xfrm>
+          <a:prstGeom prst="roundRect">
+            <a:avLst>
+              <a:gd name="adj" fmla="val 2000"/>
+            </a:avLst>
+          </a:prstGeom>
+          <a:solidFill>
+            <a:srgbClr val="F4F7FA"/>
+          </a:solidFill>
+          <a:ln w="12700">
+            <a:solidFill>
+              <a:srgbClr val="E6ECF4"/>
+            </a:solidFill>
+            <a:prstDash val="solid"/>
+          </a:ln>
+        </p:spPr>
+      </p:sp>
+      <p:sp>
+        <p:nvSpPr>
+          <p:cNvPr id="10" name="Text 7"/>
+          <p:cNvSpPr txBox="1"/>
+          <p:nvPr/>
+        </p:nvSpPr>
+        <p:spPr>
+          <a:xfrm>
+            <a:off x="859536" y="2395728"/>
+            <a:ext cx="2798064" cy="274320"/>
+          </a:xfrm>
+          <a:prstGeom prst="rect">
+            <a:avLst/>
+          </a:prstGeom>
+          <a:noFill/>
+          <a:ln/>
+        </p:spPr>
+        <p:txBody>
+          <a:bodyPr wrap="square" lIns="0" tIns="0" rIns="0" bIns="0" rtlCol="0" anchor="ctr"/>
+          <a:lstStyle/>
+          <a:p>
+            <a:pPr rtl="1" algn="r" indent="0" marL="0">
+              <a:buNone/>
+            </a:pPr>
+            <a:r>
+              <a:rPr lang="en-US" sz="1050" b="1" dirty="0">
+                <a:solidFill>
+                  <a:srgbClr val="E8635A"/>
+                </a:solidFill>
+                <a:latin typeface="Arial" pitchFamily="34" charset="0"/>
+                <a:ea typeface="Arial" pitchFamily="34" charset="-122"/>
+                <a:cs typeface="Arial" pitchFamily="34" charset="-120"/>
+              </a:rPr>
+              <a:t>היתרון ליועץ</a:t>
+            </a:r>
+            <a:endParaRPr lang="en-US" sz="1050" dirty="0"/>
+          </a:p>
+        </p:txBody>
+      </p:sp>
+      <p:sp>
+        <p:nvSpPr>
+          <p:cNvPr id="11" name="Text 8"/>
+          <p:cNvSpPr txBox="1"/>
+          <p:nvPr/>
+        </p:nvSpPr>
+        <p:spPr>
+          <a:xfrm>
+            <a:off x="859536" y="2779776"/>
+            <a:ext cx="2798064" cy="310896"/>
+          </a:xfrm>
+          <a:prstGeom prst="rect">
+            <a:avLst/>
+          </a:prstGeom>
+          <a:noFill/>
+          <a:ln/>
+        </p:spPr>
+        <p:txBody>
+          <a:bodyPr wrap="square" lIns="0" tIns="0" rIns="0" bIns="0" rtlCol="0" anchor="ctr"/>
+          <a:lstStyle/>
+          <a:p>
+            <a:pPr rtl="1" algn="r" indent="0" marL="0">
+              <a:buNone/>
+            </a:pPr>
+            <a:r>
+              <a:rPr lang="en-US" sz="1350" b="1" dirty="0">
+                <a:solidFill>
+                  <a:srgbClr val="0C4068"/>
+                </a:solidFill>
+                <a:latin typeface="Arial" pitchFamily="34" charset="0"/>
+                <a:ea typeface="Arial" pitchFamily="34" charset="-122"/>
+                <a:cs typeface="Arial" pitchFamily="34" charset="-120"/>
+              </a:rPr>
+              <a:t>לא צריך לזכור 25 לקוחות</a:t>
+            </a:r>
+            <a:endParaRPr lang="en-US" sz="1350" dirty="0"/>
+          </a:p>
+        </p:txBody>
+      </p:sp>
+      <p:sp>
+        <p:nvSpPr>
+          <p:cNvPr id="12" name="Text 9"/>
+          <p:cNvSpPr txBox="1"/>
+          <p:nvPr/>
+        </p:nvSpPr>
+        <p:spPr>
+          <a:xfrm>
+            <a:off x="859536" y="3108960"/>
+            <a:ext cx="2798064" cy="810768"/>
+          </a:xfrm>
+          <a:prstGeom prst="rect">
+            <a:avLst/>
+          </a:prstGeom>
+          <a:noFill/>
+          <a:ln/>
+        </p:spPr>
+        <p:txBody>
+          <a:bodyPr wrap="square" lIns="0" tIns="0" rIns="0" bIns="0" rtlCol="0" anchor="ctr"/>
+          <a:lstStyle/>
+          <a:p>
+            <a:pPr rtl="1" algn="r" indent="0" marL="0">
+              <a:lnSpc>
+                <a:spcPct val="130000"/>
+              </a:lnSpc>
+              <a:buNone/>
+            </a:pPr>
+            <a:r>
+              <a:rPr lang="en-US" sz="1100" dirty="0">
+                <a:solidFill>
+                  <a:srgbClr val="51677A"/>
+                </a:solidFill>
+                <a:latin typeface="Arial" pitchFamily="34" charset="0"/>
+                <a:ea typeface="Arial" pitchFamily="34" charset="-122"/>
+                <a:cs typeface="Arial" pitchFamily="34" charset="-120"/>
+              </a:rPr>
+              <a:t>מה שנאמר בפגישה לפני חודשיים נמצא בכרטיס, עם תאריך ומקור.</a:t>
+            </a:r>
+            <a:endParaRPr lang="en-US" sz="1100" dirty="0"/>
+          </a:p>
+        </p:txBody>
+      </p:sp>
+      <p:sp>
+        <p:nvSpPr>
+          <p:cNvPr id="13" name="Text 10"/>
+          <p:cNvSpPr txBox="1"/>
+          <p:nvPr/>
+        </p:nvSpPr>
+        <p:spPr>
+          <a:xfrm>
+            <a:off x="859536" y="3992880"/>
+            <a:ext cx="2798064" cy="310896"/>
+          </a:xfrm>
+          <a:prstGeom prst="rect">
+            <a:avLst/>
+          </a:prstGeom>
+          <a:noFill/>
+          <a:ln/>
+        </p:spPr>
+        <p:txBody>
+          <a:bodyPr wrap="square" lIns="0" tIns="0" rIns="0" bIns="0" rtlCol="0" anchor="ctr"/>
+          <a:lstStyle/>
+          <a:p>
+            <a:pPr rtl="1" algn="r" indent="0" marL="0">
+              <a:buNone/>
+            </a:pPr>
+            <a:r>
+              <a:rPr lang="en-US" sz="1350" b="1" dirty="0">
+                <a:solidFill>
+                  <a:srgbClr val="0C4068"/>
+                </a:solidFill>
+                <a:latin typeface="Arial" pitchFamily="34" charset="0"/>
+                <a:ea typeface="Arial" pitchFamily="34" charset="-122"/>
+                <a:cs typeface="Arial" pitchFamily="34" charset="-120"/>
+              </a:rPr>
+              <a:t>התרעה לפני שלקוח עוזב</a:t>
+            </a:r>
+            <a:endParaRPr lang="en-US" sz="1350" dirty="0"/>
+          </a:p>
+        </p:txBody>
+      </p:sp>
+      <p:sp>
+        <p:nvSpPr>
+          <p:cNvPr id="14" name="Text 11"/>
+          <p:cNvSpPr txBox="1"/>
+          <p:nvPr/>
+        </p:nvSpPr>
+        <p:spPr>
+          <a:xfrm>
+            <a:off x="859536" y="4322064"/>
+            <a:ext cx="2798064" cy="810768"/>
+          </a:xfrm>
+          <a:prstGeom prst="rect">
+            <a:avLst/>
+          </a:prstGeom>
+          <a:noFill/>
+          <a:ln/>
+        </p:spPr>
+        <p:txBody>
+          <a:bodyPr wrap="square" lIns="0" tIns="0" rIns="0" bIns="0" rtlCol="0" anchor="ctr"/>
+          <a:lstStyle/>
+          <a:p>
+            <a:pPr rtl="1" algn="r" indent="0" marL="0">
+              <a:lnSpc>
+                <a:spcPct val="130000"/>
+              </a:lnSpc>
+              <a:buNone/>
+            </a:pPr>
+            <a:r>
+              <a:rPr lang="en-US" sz="1100" dirty="0">
+                <a:solidFill>
+                  <a:srgbClr val="51677A"/>
+                </a:solidFill>
+                <a:latin typeface="Arial" pitchFamily="34" charset="0"/>
+                <a:ea typeface="Arial" pitchFamily="34" charset="-122"/>
+                <a:cs typeface="Arial" pitchFamily="34" charset="-120"/>
+              </a:rPr>
+              <a:t>ירידה בשביעות רצון נלמדת מהטון בפגישה, מביטולים ומהקבוצה — ומגיעה אליך בזמן.</a:t>
+            </a:r>
+            <a:endParaRPr lang="en-US" sz="1100" dirty="0"/>
+          </a:p>
+        </p:txBody>
+      </p:sp>
+      <p:sp>
+        <p:nvSpPr>
+          <p:cNvPr id="15" name="Text 12"/>
+          <p:cNvSpPr txBox="1"/>
+          <p:nvPr/>
+        </p:nvSpPr>
+        <p:spPr>
+          <a:xfrm>
+            <a:off x="859536" y="5205984"/>
+            <a:ext cx="2798064" cy="310896"/>
+          </a:xfrm>
+          <a:prstGeom prst="rect">
+            <a:avLst/>
+          </a:prstGeom>
+          <a:noFill/>
+          <a:ln/>
+        </p:spPr>
+        <p:txBody>
+          <a:bodyPr wrap="square" lIns="0" tIns="0" rIns="0" bIns="0" rtlCol="0" anchor="ctr"/>
+          <a:lstStyle/>
+          <a:p>
+            <a:pPr rtl="1" algn="r" indent="0" marL="0">
+              <a:buNone/>
+            </a:pPr>
+            <a:r>
+              <a:rPr lang="en-US" sz="1350" b="1" dirty="0">
+                <a:solidFill>
+                  <a:srgbClr val="0C4068"/>
+                </a:solidFill>
+                <a:latin typeface="Arial" pitchFamily="34" charset="0"/>
+                <a:ea typeface="Arial" pitchFamily="34" charset="-122"/>
+                <a:cs typeface="Arial" pitchFamily="34" charset="-120"/>
+              </a:rPr>
+              <a:t>שקיפות מלאה</a:t>
+            </a:r>
+            <a:endParaRPr lang="en-US" sz="1350" dirty="0"/>
+          </a:p>
+        </p:txBody>
+      </p:sp>
+      <p:sp>
+        <p:nvSpPr>
+          <p:cNvPr id="16" name="Text 13"/>
+          <p:cNvSpPr txBox="1"/>
+          <p:nvPr/>
+        </p:nvSpPr>
+        <p:spPr>
+          <a:xfrm>
+            <a:off x="859536" y="5535168"/>
+            <a:ext cx="2798064" cy="810768"/>
+          </a:xfrm>
+          <a:prstGeom prst="rect">
+            <a:avLst/>
+          </a:prstGeom>
+          <a:noFill/>
+          <a:ln/>
+        </p:spPr>
+        <p:txBody>
+          <a:bodyPr wrap="square" lIns="0" tIns="0" rIns="0" bIns="0" rtlCol="0" anchor="ctr"/>
+          <a:lstStyle/>
+          <a:p>
+            <a:pPr rtl="1" algn="r" indent="0" marL="0">
+              <a:lnSpc>
+                <a:spcPct val="130000"/>
+              </a:lnSpc>
+              <a:buNone/>
+            </a:pPr>
+            <a:r>
+              <a:rPr lang="en-US" sz="1100" dirty="0">
+                <a:solidFill>
+                  <a:srgbClr val="51677A"/>
+                </a:solidFill>
+                <a:latin typeface="Arial" pitchFamily="34" charset="0"/>
+                <a:ea typeface="Arial" pitchFamily="34" charset="-122"/>
+                <a:cs typeface="Arial" pitchFamily="34" charset="-120"/>
+              </a:rPr>
+              <a:t>אפשר לראות בכל רגע מה נכתב, מאיזה מקור, ועל ידי איזה תהליך.</a:t>
+            </a:r>
+            <a:endParaRPr lang="en-US" sz="1100" dirty="0"/>
           </a:p>
         </p:txBody>
       </p:sp>
@@ -4385,24 +6713,24 @@
         </p:nvSpPr>
         <p:spPr>
           <a:xfrm>
-            <a:off x="685800" y="384048"/>
-            <a:ext cx="10820095" cy="310896"/>
-          </a:xfrm>
-          <a:prstGeom prst="rect">
-            <a:avLst/>
-          </a:prstGeom>
-          <a:noFill/>
-          <a:ln/>
-        </p:spPr>
-        <p:txBody>
-          <a:bodyPr wrap="square" lIns="0" tIns="0" rIns="0" bIns="0" rtlCol="0" anchor="ctr"/>
-          <a:lstStyle/>
-          <a:p>
-            <a:pPr rtl="1" algn="r" indent="0" marL="0">
-              <a:buNone/>
-            </a:pPr>
-            <a:r>
-              <a:rPr lang="en-US" sz="1300" b="1" dirty="0">
+            <a:off x="658368" y="365760"/>
+            <a:ext cx="10874959" cy="274320"/>
+          </a:xfrm>
+          <a:prstGeom prst="rect">
+            <a:avLst/>
+          </a:prstGeom>
+          <a:noFill/>
+          <a:ln/>
+        </p:spPr>
+        <p:txBody>
+          <a:bodyPr wrap="square" lIns="0" tIns="0" rIns="0" bIns="0" rtlCol="0" anchor="ctr"/>
+          <a:lstStyle/>
+          <a:p>
+            <a:pPr rtl="1" algn="r" indent="0" marL="0">
+              <a:buNone/>
+            </a:pPr>
+            <a:r>
+              <a:rPr lang="en-US" sz="1250" b="1" dirty="0">
                 <a:solidFill>
                   <a:srgbClr val="E8635A"/>
                 </a:solidFill>
@@ -4410,101 +6738,90 @@
                 <a:ea typeface="Arial" pitchFamily="34" charset="-122"/>
                 <a:cs typeface="Arial" pitchFamily="34" charset="-120"/>
               </a:rPr>
-              <a:t>מה HK עושה · 2 מתוך 4</a:t>
+              <a:t>חלק 3 · תקשורת</a:t>
+            </a:r>
+            <a:endParaRPr lang="en-US" sz="1250" dirty="0"/>
+          </a:p>
+        </p:txBody>
+      </p:sp>
+      <p:sp>
+        <p:nvSpPr>
+          <p:cNvPr id="3" name="Text 1"/>
+          <p:cNvSpPr txBox="1"/>
+          <p:nvPr/>
+        </p:nvSpPr>
+        <p:spPr>
+          <a:xfrm>
+            <a:off x="658368" y="658368"/>
+            <a:ext cx="10874959" cy="566928"/>
+          </a:xfrm>
+          <a:prstGeom prst="rect">
+            <a:avLst/>
+          </a:prstGeom>
+          <a:noFill/>
+          <a:ln/>
+        </p:spPr>
+        <p:txBody>
+          <a:bodyPr wrap="square" lIns="0" tIns="0" rIns="0" bIns="0" rtlCol="0" anchor="ctr"/>
+          <a:lstStyle/>
+          <a:p>
+            <a:pPr rtl="1" algn="r" indent="0" marL="0">
+              <a:buNone/>
+            </a:pPr>
+            <a:r>
+              <a:rPr lang="en-US" sz="2900" b="1" dirty="0">
+                <a:solidFill>
+                  <a:srgbClr val="0C4068"/>
+                </a:solidFill>
+                <a:latin typeface="Arial" pitchFamily="34" charset="0"/>
+                <a:ea typeface="Arial" pitchFamily="34" charset="-122"/>
+                <a:cs typeface="Arial" pitchFamily="34" charset="-120"/>
+              </a:rPr>
+              <a:t>ארבעה ערוצים, מסך אחד, אותם תוצרים</a:t>
+            </a:r>
+            <a:endParaRPr lang="en-US" sz="2900" dirty="0"/>
+          </a:p>
+        </p:txBody>
+      </p:sp>
+      <p:sp>
+        <p:nvSpPr>
+          <p:cNvPr id="4" name="Text 2"/>
+          <p:cNvSpPr txBox="1"/>
+          <p:nvPr/>
+        </p:nvSpPr>
+        <p:spPr>
+          <a:xfrm>
+            <a:off x="658368" y="1261872"/>
+            <a:ext cx="10874959" cy="786384"/>
+          </a:xfrm>
+          <a:prstGeom prst="rect">
+            <a:avLst/>
+          </a:prstGeom>
+          <a:noFill/>
+          <a:ln/>
+        </p:spPr>
+        <p:txBody>
+          <a:bodyPr wrap="square" lIns="0" tIns="0" rIns="0" bIns="0" rtlCol="0" anchor="ctr"/>
+          <a:lstStyle/>
+          <a:p>
+            <a:pPr rtl="1" algn="r" indent="0" marL="0">
+              <a:lnSpc>
+                <a:spcPct val="135000"/>
+              </a:lnSpc>
+              <a:buNone/>
+            </a:pPr>
+            <a:r>
+              <a:rPr lang="en-US" sz="1300" dirty="0">
+                <a:solidFill>
+                  <a:srgbClr val="51677A"/>
+                </a:solidFill>
+                <a:latin typeface="Arial" pitchFamily="34" charset="0"/>
+                <a:ea typeface="Arial" pitchFamily="34" charset="-122"/>
+                <a:cs typeface="Arial" pitchFamily="34" charset="-120"/>
+              </a:rPr>
+              <a:t>פגישות, שיחות טלפון, קבוצת הוואטסאפ וההתכתבות עם העוזר יושבות ברשימה אחת. כל פריט מייצר את אותם תוצרים: סיכום, משימות מוצעות ועדכוני זיכרון. ג׳וב לילי סוגר כל יום.</a:t>
             </a:r>
             <a:endParaRPr lang="en-US" sz="1300" dirty="0"/>
-          </a:p>
-        </p:txBody>
-      </p:sp>
-      <p:sp>
-        <p:nvSpPr>
-          <p:cNvPr id="3" name="Text 1"/>
-          <p:cNvSpPr txBox="1"/>
-          <p:nvPr/>
-        </p:nvSpPr>
-        <p:spPr>
-          <a:xfrm>
-            <a:off x="685800" y="713232"/>
-            <a:ext cx="10820095" cy="685800"/>
-          </a:xfrm>
-          <a:prstGeom prst="rect">
-            <a:avLst/>
-          </a:prstGeom>
-          <a:noFill/>
-          <a:ln/>
-        </p:spPr>
-        <p:txBody>
-          <a:bodyPr wrap="square" lIns="0" tIns="0" rIns="0" bIns="0" rtlCol="0" anchor="ctr"/>
-          <a:lstStyle/>
-          <a:p>
-            <a:pPr algn="r" indent="0" marL="0">
-              <a:buNone/>
-            </a:pPr>
-            <a:r>
-              <a:rPr lang="en-US" sz="3300" b="1" dirty="0">
-                <a:solidFill>
-                  <a:srgbClr val="0C4068"/>
-                </a:solidFill>
-                <a:latin typeface="Arial" pitchFamily="34" charset="0"/>
-                <a:ea typeface="Arial" pitchFamily="34" charset="-122"/>
-                <a:cs typeface="Arial" pitchFamily="34" charset="-120"/>
-              </a:rPr>
-              <a:t>המערכת זוכרת את הלקוח </a:t>
-            </a:r>
-            <a:pPr algn="r" indent="0" marL="0">
-              <a:buNone/>
-            </a:pPr>
-            <a:r>
-              <a:rPr lang="en-US" sz="3300" b="1" dirty="0">
-                <a:solidFill>
-                  <a:srgbClr val="E8635A"/>
-                </a:solidFill>
-                <a:latin typeface="Arial" pitchFamily="34" charset="0"/>
-                <a:ea typeface="Arial" pitchFamily="34" charset="-122"/>
-                <a:cs typeface="Arial" pitchFamily="34" charset="-120"/>
-              </a:rPr>
-              <a:t>בשבילך.</a:t>
-            </a:r>
-            <a:endParaRPr lang="en-US" sz="3300" dirty="0"/>
-          </a:p>
-        </p:txBody>
-      </p:sp>
-      <p:sp>
-        <p:nvSpPr>
-          <p:cNvPr id="4" name="Text 2"/>
-          <p:cNvSpPr txBox="1"/>
-          <p:nvPr/>
-        </p:nvSpPr>
-        <p:spPr>
-          <a:xfrm>
-            <a:off x="685800" y="1426464"/>
-            <a:ext cx="10820095" cy="502920"/>
-          </a:xfrm>
-          <a:prstGeom prst="rect">
-            <a:avLst/>
-          </a:prstGeom>
-          <a:noFill/>
-          <a:ln/>
-        </p:spPr>
-        <p:txBody>
-          <a:bodyPr wrap="square" lIns="0" tIns="0" rIns="0" bIns="0" rtlCol="0" anchor="ctr"/>
-          <a:lstStyle/>
-          <a:p>
-            <a:pPr rtl="1" algn="r" indent="0" marL="0">
-              <a:buNone/>
-            </a:pPr>
-            <a:r>
-              <a:rPr lang="en-US" sz="1450" dirty="0">
-                <a:solidFill>
-                  <a:srgbClr val="51677A"/>
-                </a:solidFill>
-                <a:latin typeface="Arial" pitchFamily="34" charset="0"/>
-                <a:ea typeface="Arial" pitchFamily="34" charset="-122"/>
-                <a:cs typeface="Arial" pitchFamily="34" charset="-120"/>
-              </a:rPr>
-              <a:t>שתים־עשרה קטגוריות זיכרון שמתעדכנות לבד מכל פגישה, שיחה והודעה — כאבים, יעדים, שביעות רצון, סגנון תקשורת.</a:t>
-            </a:r>
-            <a:endParaRPr lang="en-US" sz="1450" dirty="0"/>
           </a:p>
         </p:txBody>
       </p:sp>
@@ -4516,12 +6833,12 @@
         </p:nvSpPr>
         <p:spPr>
           <a:xfrm>
-            <a:off x="630936" y="2029968"/>
-            <a:ext cx="10929823" cy="4498848"/>
+            <a:off x="4069080" y="2130552"/>
+            <a:ext cx="7509967" cy="4389120"/>
           </a:xfrm>
           <a:prstGeom prst="roundRect">
             <a:avLst>
-              <a:gd name="adj" fmla="val 1626"/>
+              <a:gd name="adj" fmla="val 1458"/>
             </a:avLst>
           </a:prstGeom>
           <a:solidFill>
@@ -4534,9 +6851,9 @@
             <a:prstDash val="solid"/>
           </a:ln>
           <a:effectLst>
-            <a:outerShdw sx="100000" sy="100000" kx="0" ky="0" algn="bl" rotWithShape="0" blurRad="254000" dist="63500" dir="5400000">
+            <a:outerShdw sx="100000" sy="100000" kx="0" ky="0" algn="bl" rotWithShape="0" blurRad="228600" dist="50800" dir="5400000">
               <a:srgbClr val="0C4068">
-                <a:alpha val="28000"/>
+                <a:alpha val="24000"/>
               </a:srgbClr>
             </a:outerShdw>
           </a:effectLst>
@@ -4544,7 +6861,7 @@
       </p:sp>
       <p:pic>
         <p:nvPicPr>
-          <p:cNvPr id="6" name="Image 0" descr="/Users/eyalhazut/Documents/Claude/Projects/hk/mainScreen/docs/shots/co-mem.png">    </p:cNvPr>
+          <p:cNvPr id="6" name="Image 0" descr="/Users/eyalhazut/Documents/Claude/Projects/hk/mainScreen/docs/shots/adv-comm.png">    </p:cNvPr>
           <p:cNvPicPr>
             <a:picLocks noChangeAspect="1"/>
           </p:cNvPicPr>
@@ -4557,8 +6874,8 @@
         </p:blipFill>
         <p:spPr>
           <a:xfrm>
-            <a:off x="685800" y="2084832"/>
-            <a:ext cx="10820095" cy="4389120"/>
+            <a:off x="4114800" y="2176272"/>
+            <a:ext cx="7418527" cy="4297680"/>
           </a:xfrm>
           <a:prstGeom prst="rect">
             <a:avLst/>
@@ -4573,25 +6890,18 @@
         </p:nvSpPr>
         <p:spPr>
           <a:xfrm>
-            <a:off x="1005840" y="2542032"/>
-            <a:ext cx="3291840" cy="713232"/>
+            <a:off x="4370832" y="2560320"/>
+            <a:ext cx="2926080" cy="621792"/>
           </a:xfrm>
           <a:prstGeom prst="roundRect">
             <a:avLst>
-              <a:gd name="adj" fmla="val 8974"/>
+              <a:gd name="adj" fmla="val 8824"/>
             </a:avLst>
           </a:prstGeom>
           <a:solidFill>
             <a:srgbClr val="0C4068"/>
           </a:solidFill>
           <a:ln/>
-          <a:effectLst>
-            <a:outerShdw sx="100000" sy="100000" kx="0" ky="0" algn="bl" rotWithShape="0" blurRad="152400" dist="38100" dir="5400000">
-              <a:srgbClr val="0A3557">
-                <a:alpha val="40000"/>
-              </a:srgbClr>
-            </a:outerShdw>
-          </a:effectLst>
         </p:spPr>
       </p:sp>
       <p:sp>
@@ -4602,24 +6912,24 @@
         </p:nvSpPr>
         <p:spPr>
           <a:xfrm>
-            <a:off x="1133856" y="2542032"/>
-            <a:ext cx="3035808" cy="713232"/>
-          </a:xfrm>
-          <a:prstGeom prst="rect">
-            <a:avLst/>
-          </a:prstGeom>
-          <a:noFill/>
-          <a:ln/>
-        </p:spPr>
-        <p:txBody>
-          <a:bodyPr wrap="square" lIns="0" tIns="0" rIns="0" bIns="0" rtlCol="0" anchor="ctr"/>
-          <a:lstStyle/>
-          <a:p>
-            <a:pPr rtl="1" algn="r" indent="0" marL="0">
-              <a:buNone/>
-            </a:pPr>
-            <a:r>
-              <a:rPr lang="en-US" sz="1150" dirty="0">
+            <a:off x="4480560" y="2560320"/>
+            <a:ext cx="2706624" cy="621792"/>
+          </a:xfrm>
+          <a:prstGeom prst="rect">
+            <a:avLst/>
+          </a:prstGeom>
+          <a:noFill/>
+          <a:ln/>
+        </p:spPr>
+        <p:txBody>
+          <a:bodyPr wrap="square" lIns="0" tIns="0" rIns="0" bIns="0" rtlCol="0" anchor="ctr"/>
+          <a:lstStyle/>
+          <a:p>
+            <a:pPr rtl="1" algn="r" indent="0" marL="0">
+              <a:buNone/>
+            </a:pPr>
+            <a:r>
+              <a:rPr lang="en-US" sz="1050" dirty="0">
                 <a:solidFill>
                   <a:srgbClr val="FFFFFF"/>
                 </a:solidFill>
@@ -4627,9 +6937,318 @@
                 <a:ea typeface="Arial" pitchFamily="34" charset="-122"/>
                 <a:cs typeface="Arial" pitchFamily="34" charset="-120"/>
               </a:rPr>
-              <a:t>חוסר שביעות רצון מזוהה לפני שהלקוח עוזב</a:t>
-            </a:r>
-            <a:endParaRPr lang="en-US" sz="1150" dirty="0"/>
+              <a:t>פגישה · טלפון · וואטסאפ · עוזר AI</a:t>
+            </a:r>
+            <a:endParaRPr lang="en-US" sz="1050" dirty="0"/>
+          </a:p>
+        </p:txBody>
+      </p:sp>
+      <p:sp>
+        <p:nvSpPr>
+          <p:cNvPr id="9" name="Shape 6"/>
+          <p:cNvSpPr/>
+          <p:nvPr/>
+        </p:nvSpPr>
+        <p:spPr>
+          <a:xfrm>
+            <a:off x="658368" y="2176272"/>
+            <a:ext cx="3200400" cy="4297680"/>
+          </a:xfrm>
+          <a:prstGeom prst="roundRect">
+            <a:avLst>
+              <a:gd name="adj" fmla="val 2000"/>
+            </a:avLst>
+          </a:prstGeom>
+          <a:solidFill>
+            <a:srgbClr val="F4F7FA"/>
+          </a:solidFill>
+          <a:ln w="12700">
+            <a:solidFill>
+              <a:srgbClr val="E6ECF4"/>
+            </a:solidFill>
+            <a:prstDash val="solid"/>
+          </a:ln>
+        </p:spPr>
+      </p:sp>
+      <p:sp>
+        <p:nvSpPr>
+          <p:cNvPr id="10" name="Text 7"/>
+          <p:cNvSpPr txBox="1"/>
+          <p:nvPr/>
+        </p:nvSpPr>
+        <p:spPr>
+          <a:xfrm>
+            <a:off x="859536" y="2395728"/>
+            <a:ext cx="2798064" cy="274320"/>
+          </a:xfrm>
+          <a:prstGeom prst="rect">
+            <a:avLst/>
+          </a:prstGeom>
+          <a:noFill/>
+          <a:ln/>
+        </p:spPr>
+        <p:txBody>
+          <a:bodyPr wrap="square" lIns="0" tIns="0" rIns="0" bIns="0" rtlCol="0" anchor="ctr"/>
+          <a:lstStyle/>
+          <a:p>
+            <a:pPr rtl="1" algn="r" indent="0" marL="0">
+              <a:buNone/>
+            </a:pPr>
+            <a:r>
+              <a:rPr lang="en-US" sz="1050" b="1" dirty="0">
+                <a:solidFill>
+                  <a:srgbClr val="E8635A"/>
+                </a:solidFill>
+                <a:latin typeface="Arial" pitchFamily="34" charset="0"/>
+                <a:ea typeface="Arial" pitchFamily="34" charset="-122"/>
+                <a:cs typeface="Arial" pitchFamily="34" charset="-120"/>
+              </a:rPr>
+              <a:t>היתרון ליועץ</a:t>
+            </a:r>
+            <a:endParaRPr lang="en-US" sz="1050" dirty="0"/>
+          </a:p>
+        </p:txBody>
+      </p:sp>
+      <p:sp>
+        <p:nvSpPr>
+          <p:cNvPr id="11" name="Text 8"/>
+          <p:cNvSpPr txBox="1"/>
+          <p:nvPr/>
+        </p:nvSpPr>
+        <p:spPr>
+          <a:xfrm>
+            <a:off x="859536" y="2779776"/>
+            <a:ext cx="2798064" cy="310896"/>
+          </a:xfrm>
+          <a:prstGeom prst="rect">
+            <a:avLst/>
+          </a:prstGeom>
+          <a:noFill/>
+          <a:ln/>
+        </p:spPr>
+        <p:txBody>
+          <a:bodyPr wrap="square" lIns="0" tIns="0" rIns="0" bIns="0" rtlCol="0" anchor="ctr"/>
+          <a:lstStyle/>
+          <a:p>
+            <a:pPr rtl="1" algn="r" indent="0" marL="0">
+              <a:buNone/>
+            </a:pPr>
+            <a:r>
+              <a:rPr lang="en-US" sz="1350" b="1" dirty="0">
+                <a:solidFill>
+                  <a:srgbClr val="0C4068"/>
+                </a:solidFill>
+                <a:latin typeface="Arial" pitchFamily="34" charset="0"/>
+                <a:ea typeface="Arial" pitchFamily="34" charset="-122"/>
+                <a:cs typeface="Arial" pitchFamily="34" charset="-120"/>
+              </a:rPr>
+              <a:t>סינון לפי לקוח = תמונה מלאה</a:t>
+            </a:r>
+            <a:endParaRPr lang="en-US" sz="1350" dirty="0"/>
+          </a:p>
+        </p:txBody>
+      </p:sp>
+      <p:sp>
+        <p:nvSpPr>
+          <p:cNvPr id="12" name="Text 9"/>
+          <p:cNvSpPr txBox="1"/>
+          <p:nvPr/>
+        </p:nvSpPr>
+        <p:spPr>
+          <a:xfrm>
+            <a:off x="859536" y="3108960"/>
+            <a:ext cx="2798064" cy="810768"/>
+          </a:xfrm>
+          <a:prstGeom prst="rect">
+            <a:avLst/>
+          </a:prstGeom>
+          <a:noFill/>
+          <a:ln/>
+        </p:spPr>
+        <p:txBody>
+          <a:bodyPr wrap="square" lIns="0" tIns="0" rIns="0" bIns="0" rtlCol="0" anchor="ctr"/>
+          <a:lstStyle/>
+          <a:p>
+            <a:pPr rtl="1" algn="r" indent="0" marL="0">
+              <a:lnSpc>
+                <a:spcPct val="130000"/>
+              </a:lnSpc>
+              <a:buNone/>
+            </a:pPr>
+            <a:r>
+              <a:rPr lang="en-US" sz="1100" dirty="0">
+                <a:solidFill>
+                  <a:srgbClr val="51677A"/>
+                </a:solidFill>
+                <a:latin typeface="Arial" pitchFamily="34" charset="0"/>
+                <a:ea typeface="Arial" pitchFamily="34" charset="-122"/>
+                <a:cs typeface="Arial" pitchFamily="34" charset="-120"/>
+              </a:rPr>
+              <a:t>בלחיצה אחת רואים כל מה שקרה עם לקוח מסוים — בכל הערוצים, לפי סדר.</a:t>
+            </a:r>
+            <a:endParaRPr lang="en-US" sz="1100" dirty="0"/>
+          </a:p>
+        </p:txBody>
+      </p:sp>
+      <p:sp>
+        <p:nvSpPr>
+          <p:cNvPr id="13" name="Text 10"/>
+          <p:cNvSpPr txBox="1"/>
+          <p:nvPr/>
+        </p:nvSpPr>
+        <p:spPr>
+          <a:xfrm>
+            <a:off x="859536" y="3992880"/>
+            <a:ext cx="2798064" cy="310896"/>
+          </a:xfrm>
+          <a:prstGeom prst="rect">
+            <a:avLst/>
+          </a:prstGeom>
+          <a:noFill/>
+          <a:ln/>
+        </p:spPr>
+        <p:txBody>
+          <a:bodyPr wrap="square" lIns="0" tIns="0" rIns="0" bIns="0" rtlCol="0" anchor="ctr"/>
+          <a:lstStyle/>
+          <a:p>
+            <a:pPr rtl="1" algn="r" indent="0" marL="0">
+              <a:buNone/>
+            </a:pPr>
+            <a:r>
+              <a:rPr lang="en-US" sz="1350" b="1" dirty="0">
+                <a:solidFill>
+                  <a:srgbClr val="0C4068"/>
+                </a:solidFill>
+                <a:latin typeface="Arial" pitchFamily="34" charset="0"/>
+                <a:ea typeface="Arial" pitchFamily="34" charset="-122"/>
+                <a:cs typeface="Arial" pitchFamily="34" charset="-120"/>
+              </a:rPr>
+              <a:t>שיחות טלפון לא הולכות לאיבוד</a:t>
+            </a:r>
+            <a:endParaRPr lang="en-US" sz="1350" dirty="0"/>
+          </a:p>
+        </p:txBody>
+      </p:sp>
+      <p:sp>
+        <p:nvSpPr>
+          <p:cNvPr id="14" name="Text 11"/>
+          <p:cNvSpPr txBox="1"/>
+          <p:nvPr/>
+        </p:nvSpPr>
+        <p:spPr>
+          <a:xfrm>
+            <a:off x="859536" y="4322064"/>
+            <a:ext cx="2798064" cy="810768"/>
+          </a:xfrm>
+          <a:prstGeom prst="rect">
+            <a:avLst/>
+          </a:prstGeom>
+          <a:noFill/>
+          <a:ln/>
+        </p:spPr>
+        <p:txBody>
+          <a:bodyPr wrap="square" lIns="0" tIns="0" rIns="0" bIns="0" rtlCol="0" anchor="ctr"/>
+          <a:lstStyle/>
+          <a:p>
+            <a:pPr rtl="1" algn="r" indent="0" marL="0">
+              <a:lnSpc>
+                <a:spcPct val="130000"/>
+              </a:lnSpc>
+              <a:buNone/>
+            </a:pPr>
+            <a:r>
+              <a:rPr lang="en-US" sz="1100" dirty="0">
+                <a:solidFill>
+                  <a:srgbClr val="51677A"/>
+                </a:solidFill>
+                <a:latin typeface="Arial" pitchFamily="34" charset="0"/>
+                <a:ea typeface="Arial" pitchFamily="34" charset="-122"/>
+                <a:cs typeface="Arial" pitchFamily="34" charset="-120"/>
+              </a:rPr>
+              <a:t>שיחה מוקלטת, מתומללת והופכת לזיכרון. שיחה שלא זוהתה ממתינה בתור לשיוך.</a:t>
+            </a:r>
+            <a:endParaRPr lang="en-US" sz="1100" dirty="0"/>
+          </a:p>
+        </p:txBody>
+      </p:sp>
+      <p:sp>
+        <p:nvSpPr>
+          <p:cNvPr id="15" name="Text 12"/>
+          <p:cNvSpPr txBox="1"/>
+          <p:nvPr/>
+        </p:nvSpPr>
+        <p:spPr>
+          <a:xfrm>
+            <a:off x="859536" y="5205984"/>
+            <a:ext cx="2798064" cy="310896"/>
+          </a:xfrm>
+          <a:prstGeom prst="rect">
+            <a:avLst/>
+          </a:prstGeom>
+          <a:noFill/>
+          <a:ln/>
+        </p:spPr>
+        <p:txBody>
+          <a:bodyPr wrap="square" lIns="0" tIns="0" rIns="0" bIns="0" rtlCol="0" anchor="ctr"/>
+          <a:lstStyle/>
+          <a:p>
+            <a:pPr rtl="1" algn="r" indent="0" marL="0">
+              <a:buNone/>
+            </a:pPr>
+            <a:r>
+              <a:rPr lang="en-US" sz="1350" b="1" dirty="0">
+                <a:solidFill>
+                  <a:srgbClr val="0C4068"/>
+                </a:solidFill>
+                <a:latin typeface="Arial" pitchFamily="34" charset="0"/>
+                <a:ea typeface="Arial" pitchFamily="34" charset="-122"/>
+                <a:cs typeface="Arial" pitchFamily="34" charset="-120"/>
+              </a:rPr>
+              <a:t>הקבוצה מסוכמת כל לילה</a:t>
+            </a:r>
+            <a:endParaRPr lang="en-US" sz="1350" dirty="0"/>
+          </a:p>
+        </p:txBody>
+      </p:sp>
+      <p:sp>
+        <p:nvSpPr>
+          <p:cNvPr id="16" name="Text 13"/>
+          <p:cNvSpPr txBox="1"/>
+          <p:nvPr/>
+        </p:nvSpPr>
+        <p:spPr>
+          <a:xfrm>
+            <a:off x="859536" y="5535168"/>
+            <a:ext cx="2798064" cy="810768"/>
+          </a:xfrm>
+          <a:prstGeom prst="rect">
+            <a:avLst/>
+          </a:prstGeom>
+          <a:noFill/>
+          <a:ln/>
+        </p:spPr>
+        <p:txBody>
+          <a:bodyPr wrap="square" lIns="0" tIns="0" rIns="0" bIns="0" rtlCol="0" anchor="ctr"/>
+          <a:lstStyle/>
+          <a:p>
+            <a:pPr rtl="1" algn="r" indent="0" marL="0">
+              <a:lnSpc>
+                <a:spcPct val="130000"/>
+              </a:lnSpc>
+              <a:buNone/>
+            </a:pPr>
+            <a:r>
+              <a:rPr lang="en-US" sz="1100" dirty="0">
+                <a:solidFill>
+                  <a:srgbClr val="51677A"/>
+                </a:solidFill>
+                <a:latin typeface="Arial" pitchFamily="34" charset="0"/>
+                <a:ea typeface="Arial" pitchFamily="34" charset="-122"/>
+                <a:cs typeface="Arial" pitchFamily="34" charset="-120"/>
+              </a:rPr>
+              <a:t>מה עלה, מי כתב, ומה נכנס לזיכרון — בלי שתקרא את ההודעות.</a:t>
+            </a:r>
+            <a:endParaRPr lang="en-US" sz="1100" dirty="0"/>
           </a:p>
         </p:txBody>
       </p:sp>
@@ -4673,24 +7292,24 @@
         </p:nvSpPr>
         <p:spPr>
           <a:xfrm>
-            <a:off x="685800" y="384048"/>
-            <a:ext cx="10820095" cy="310896"/>
-          </a:xfrm>
-          <a:prstGeom prst="rect">
-            <a:avLst/>
-          </a:prstGeom>
-          <a:noFill/>
-          <a:ln/>
-        </p:spPr>
-        <p:txBody>
-          <a:bodyPr wrap="square" lIns="0" tIns="0" rIns="0" bIns="0" rtlCol="0" anchor="ctr"/>
-          <a:lstStyle/>
-          <a:p>
-            <a:pPr rtl="1" algn="r" indent="0" marL="0">
-              <a:buNone/>
-            </a:pPr>
-            <a:r>
-              <a:rPr lang="en-US" sz="1300" b="1" dirty="0">
+            <a:off x="658368" y="365760"/>
+            <a:ext cx="10874959" cy="274320"/>
+          </a:xfrm>
+          <a:prstGeom prst="rect">
+            <a:avLst/>
+          </a:prstGeom>
+          <a:noFill/>
+          <a:ln/>
+        </p:spPr>
+        <p:txBody>
+          <a:bodyPr wrap="square" lIns="0" tIns="0" rIns="0" bIns="0" rtlCol="0" anchor="ctr"/>
+          <a:lstStyle/>
+          <a:p>
+            <a:pPr rtl="1" algn="r" indent="0" marL="0">
+              <a:buNone/>
+            </a:pPr>
+            <a:r>
+              <a:rPr lang="en-US" sz="1250" b="1" dirty="0">
                 <a:solidFill>
                   <a:srgbClr val="E8635A"/>
                 </a:solidFill>
@@ -4698,101 +7317,90 @@
                 <a:ea typeface="Arial" pitchFamily="34" charset="-122"/>
                 <a:cs typeface="Arial" pitchFamily="34" charset="-120"/>
               </a:rPr>
-              <a:t>מה HK עושה · 3 מתוך 4</a:t>
+              <a:t>חלק 3 · תקשורת — הפגישה</a:t>
+            </a:r>
+            <a:endParaRPr lang="en-US" sz="1250" dirty="0"/>
+          </a:p>
+        </p:txBody>
+      </p:sp>
+      <p:sp>
+        <p:nvSpPr>
+          <p:cNvPr id="3" name="Text 1"/>
+          <p:cNvSpPr txBox="1"/>
+          <p:nvPr/>
+        </p:nvSpPr>
+        <p:spPr>
+          <a:xfrm>
+            <a:off x="658368" y="658368"/>
+            <a:ext cx="10874959" cy="566928"/>
+          </a:xfrm>
+          <a:prstGeom prst="rect">
+            <a:avLst/>
+          </a:prstGeom>
+          <a:noFill/>
+          <a:ln/>
+        </p:spPr>
+        <p:txBody>
+          <a:bodyPr wrap="square" lIns="0" tIns="0" rIns="0" bIns="0" rtlCol="0" anchor="ctr"/>
+          <a:lstStyle/>
+          <a:p>
+            <a:pPr rtl="1" algn="r" indent="0" marL="0">
+              <a:buNone/>
+            </a:pPr>
+            <a:r>
+              <a:rPr lang="en-US" sz="2900" b="1" dirty="0">
+                <a:solidFill>
+                  <a:srgbClr val="0C4068"/>
+                </a:solidFill>
+                <a:latin typeface="Arial" pitchFamily="34" charset="0"/>
+                <a:ea typeface="Arial" pitchFamily="34" charset="-122"/>
+                <a:cs typeface="Arial" pitchFamily="34" charset="-120"/>
+              </a:rPr>
+              <a:t>הכנה שנבנית מחדש בכל פתיחה</a:t>
+            </a:r>
+            <a:endParaRPr lang="en-US" sz="2900" dirty="0"/>
+          </a:p>
+        </p:txBody>
+      </p:sp>
+      <p:sp>
+        <p:nvSpPr>
+          <p:cNvPr id="4" name="Text 2"/>
+          <p:cNvSpPr txBox="1"/>
+          <p:nvPr/>
+        </p:nvSpPr>
+        <p:spPr>
+          <a:xfrm>
+            <a:off x="658368" y="1261872"/>
+            <a:ext cx="10874959" cy="786384"/>
+          </a:xfrm>
+          <a:prstGeom prst="rect">
+            <a:avLst/>
+          </a:prstGeom>
+          <a:noFill/>
+          <a:ln/>
+        </p:spPr>
+        <p:txBody>
+          <a:bodyPr wrap="square" lIns="0" tIns="0" rIns="0" bIns="0" rtlCol="0" anchor="ctr"/>
+          <a:lstStyle/>
+          <a:p>
+            <a:pPr rtl="1" algn="r" indent="0" marL="0">
+              <a:lnSpc>
+                <a:spcPct val="135000"/>
+              </a:lnSpc>
+              <a:buNone/>
+            </a:pPr>
+            <a:r>
+              <a:rPr lang="en-US" sz="1300" dirty="0">
+                <a:solidFill>
+                  <a:srgbClr val="51677A"/>
+                </a:solidFill>
+                <a:latin typeface="Arial" pitchFamily="34" charset="0"/>
+                <a:ea typeface="Arial" pitchFamily="34" charset="-122"/>
+                <a:cs typeface="Arial" pitchFamily="34" charset="-120"/>
+              </a:rPr>
+              <a:t>דף ההכנה לא נשמר ולא נכתב מראש — הוא נגזר ברגע הפתיחה מהזיכרון החי, מהמספרים העדכניים ומהמשימות הפתוחות: מה סוכם בפעם הקודמת, מה השתנה מאז, ואיך מדברים עם האדם הזה.</a:t>
             </a:r>
             <a:endParaRPr lang="en-US" sz="1300" dirty="0"/>
-          </a:p>
-        </p:txBody>
-      </p:sp>
-      <p:sp>
-        <p:nvSpPr>
-          <p:cNvPr id="3" name="Text 1"/>
-          <p:cNvSpPr txBox="1"/>
-          <p:nvPr/>
-        </p:nvSpPr>
-        <p:spPr>
-          <a:xfrm>
-            <a:off x="685800" y="713232"/>
-            <a:ext cx="10820095" cy="685800"/>
-          </a:xfrm>
-          <a:prstGeom prst="rect">
-            <a:avLst/>
-          </a:prstGeom>
-          <a:noFill/>
-          <a:ln/>
-        </p:spPr>
-        <p:txBody>
-          <a:bodyPr wrap="square" lIns="0" tIns="0" rIns="0" bIns="0" rtlCol="0" anchor="ctr"/>
-          <a:lstStyle/>
-          <a:p>
-            <a:pPr algn="r" indent="0" marL="0">
-              <a:buNone/>
-            </a:pPr>
-            <a:r>
-              <a:rPr lang="en-US" sz="3300" b="1" dirty="0">
-                <a:solidFill>
-                  <a:srgbClr val="0C4068"/>
-                </a:solidFill>
-                <a:latin typeface="Arial" pitchFamily="34" charset="0"/>
-                <a:ea typeface="Arial" pitchFamily="34" charset="-122"/>
-                <a:cs typeface="Arial" pitchFamily="34" charset="-120"/>
-              </a:rPr>
-              <a:t>כל מה שנאמר ללקוח — </a:t>
-            </a:r>
-            <a:pPr algn="r" indent="0" marL="0">
-              <a:buNone/>
-            </a:pPr>
-            <a:r>
-              <a:rPr lang="en-US" sz="3300" b="1" dirty="0">
-                <a:solidFill>
-                  <a:srgbClr val="E8635A"/>
-                </a:solidFill>
-                <a:latin typeface="Arial" pitchFamily="34" charset="0"/>
-                <a:ea typeface="Arial" pitchFamily="34" charset="-122"/>
-                <a:cs typeface="Arial" pitchFamily="34" charset="-120"/>
-              </a:rPr>
-              <a:t>במסך אחד.</a:t>
-            </a:r>
-            <a:endParaRPr lang="en-US" sz="3300" dirty="0"/>
-          </a:p>
-        </p:txBody>
-      </p:sp>
-      <p:sp>
-        <p:nvSpPr>
-          <p:cNvPr id="4" name="Text 2"/>
-          <p:cNvSpPr txBox="1"/>
-          <p:nvPr/>
-        </p:nvSpPr>
-        <p:spPr>
-          <a:xfrm>
-            <a:off x="685800" y="1426464"/>
-            <a:ext cx="10820095" cy="502920"/>
-          </a:xfrm>
-          <a:prstGeom prst="rect">
-            <a:avLst/>
-          </a:prstGeom>
-          <a:noFill/>
-          <a:ln/>
-        </p:spPr>
-        <p:txBody>
-          <a:bodyPr wrap="square" lIns="0" tIns="0" rIns="0" bIns="0" rtlCol="0" anchor="ctr"/>
-          <a:lstStyle/>
-          <a:p>
-            <a:pPr rtl="1" algn="r" indent="0" marL="0">
-              <a:buNone/>
-            </a:pPr>
-            <a:r>
-              <a:rPr lang="en-US" sz="1450" dirty="0">
-                <a:solidFill>
-                  <a:srgbClr val="51677A"/>
-                </a:solidFill>
-                <a:latin typeface="Arial" pitchFamily="34" charset="0"/>
-                <a:ea typeface="Arial" pitchFamily="34" charset="-122"/>
-                <a:cs typeface="Arial" pitchFamily="34" charset="-120"/>
-              </a:rPr>
-              <a:t>פגישות, שיחות טלפון, קבוצת הוואטסאפ וההתכתבות עם העוזר — אותם תוצרים: סיכום, משימות, זיכרון.</a:t>
-            </a:r>
-            <a:endParaRPr lang="en-US" sz="1450" dirty="0"/>
           </a:p>
         </p:txBody>
       </p:sp>
@@ -4804,12 +7412,12 @@
         </p:nvSpPr>
         <p:spPr>
           <a:xfrm>
-            <a:off x="630936" y="2029968"/>
-            <a:ext cx="10929823" cy="4498848"/>
+            <a:off x="4069080" y="2130552"/>
+            <a:ext cx="7509967" cy="4389120"/>
           </a:xfrm>
           <a:prstGeom prst="roundRect">
             <a:avLst>
-              <a:gd name="adj" fmla="val 1626"/>
+              <a:gd name="adj" fmla="val 1458"/>
             </a:avLst>
           </a:prstGeom>
           <a:solidFill>
@@ -4822,9 +7430,9 @@
             <a:prstDash val="solid"/>
           </a:ln>
           <a:effectLst>
-            <a:outerShdw sx="100000" sy="100000" kx="0" ky="0" algn="bl" rotWithShape="0" blurRad="254000" dist="63500" dir="5400000">
+            <a:outerShdw sx="100000" sy="100000" kx="0" ky="0" algn="bl" rotWithShape="0" blurRad="228600" dist="50800" dir="5400000">
               <a:srgbClr val="0C4068">
-                <a:alpha val="28000"/>
+                <a:alpha val="24000"/>
               </a:srgbClr>
             </a:outerShdw>
           </a:effectLst>
@@ -4832,7 +7440,7 @@
       </p:sp>
       <p:pic>
         <p:nvPicPr>
-          <p:cNvPr id="6" name="Image 0" descr="/Users/eyalhazut/Documents/Claude/Projects/hk/mainScreen/docs/shots/adv-comm.png">    </p:cNvPr>
+          <p:cNvPr id="6" name="Image 0" descr="/Users/eyalhazut/Documents/Claude/Projects/hk/mainScreen/docs/shots/meet-prep.png">    </p:cNvPr>
           <p:cNvPicPr>
             <a:picLocks noChangeAspect="1"/>
           </p:cNvPicPr>
@@ -4845,8 +7453,8 @@
         </p:blipFill>
         <p:spPr>
           <a:xfrm>
-            <a:off x="685800" y="2084832"/>
-            <a:ext cx="10820095" cy="4389120"/>
+            <a:off x="4114800" y="2176272"/>
+            <a:ext cx="7418527" cy="4297680"/>
           </a:xfrm>
           <a:prstGeom prst="rect">
             <a:avLst/>
@@ -4861,25 +7469,18 @@
         </p:nvSpPr>
         <p:spPr>
           <a:xfrm>
-            <a:off x="1005840" y="2542032"/>
-            <a:ext cx="3291840" cy="713232"/>
+            <a:off x="8351215" y="2560320"/>
+            <a:ext cx="2926080" cy="621792"/>
           </a:xfrm>
           <a:prstGeom prst="roundRect">
             <a:avLst>
-              <a:gd name="adj" fmla="val 8974"/>
+              <a:gd name="adj" fmla="val 8824"/>
             </a:avLst>
           </a:prstGeom>
           <a:solidFill>
             <a:srgbClr val="0C4068"/>
           </a:solidFill>
           <a:ln/>
-          <a:effectLst>
-            <a:outerShdw sx="100000" sy="100000" kx="0" ky="0" algn="bl" rotWithShape="0" blurRad="152400" dist="38100" dir="5400000">
-              <a:srgbClr val="0A3557">
-                <a:alpha val="40000"/>
-              </a:srgbClr>
-            </a:outerShdw>
-          </a:effectLst>
         </p:spPr>
       </p:sp>
       <p:sp>
@@ -4890,24 +7491,24 @@
         </p:nvSpPr>
         <p:spPr>
           <a:xfrm>
-            <a:off x="1133856" y="2542032"/>
-            <a:ext cx="3035808" cy="713232"/>
-          </a:xfrm>
-          <a:prstGeom prst="rect">
-            <a:avLst/>
-          </a:prstGeom>
-          <a:noFill/>
-          <a:ln/>
-        </p:spPr>
-        <p:txBody>
-          <a:bodyPr wrap="square" lIns="0" tIns="0" rIns="0" bIns="0" rtlCol="0" anchor="ctr"/>
-          <a:lstStyle/>
-          <a:p>
-            <a:pPr rtl="1" algn="r" indent="0" marL="0">
-              <a:buNone/>
-            </a:pPr>
-            <a:r>
-              <a:rPr lang="en-US" sz="1150" dirty="0">
+            <a:off x="8460943" y="2560320"/>
+            <a:ext cx="2706624" cy="621792"/>
+          </a:xfrm>
+          <a:prstGeom prst="rect">
+            <a:avLst/>
+          </a:prstGeom>
+          <a:noFill/>
+          <a:ln/>
+        </p:spPr>
+        <p:txBody>
+          <a:bodyPr wrap="square" lIns="0" tIns="0" rIns="0" bIns="0" rtlCol="0" anchor="ctr"/>
+          <a:lstStyle/>
+          <a:p>
+            <a:pPr rtl="1" algn="r" indent="0" marL="0">
+              <a:buNone/>
+            </a:pPr>
+            <a:r>
+              <a:rPr lang="en-US" sz="1050" dirty="0">
                 <a:solidFill>
                   <a:srgbClr val="FFFFFF"/>
                 </a:solidFill>
@@ -4915,9 +7516,318 @@
                 <a:ea typeface="Arial" pitchFamily="34" charset="-122"/>
                 <a:cs typeface="Arial" pitchFamily="34" charset="-120"/>
               </a:rPr>
-              <a:t>שיחת טלפון שלא שויכה ממתינה בתור — ולא נעלמת</a:t>
-            </a:r>
-            <a:endParaRPr lang="en-US" sz="1150" dirty="0"/>
+              <a:t>«פתח במספרים — צחי מאבד סבלנות מהקדמות»</a:t>
+            </a:r>
+            <a:endParaRPr lang="en-US" sz="1050" dirty="0"/>
+          </a:p>
+        </p:txBody>
+      </p:sp>
+      <p:sp>
+        <p:nvSpPr>
+          <p:cNvPr id="9" name="Shape 6"/>
+          <p:cNvSpPr/>
+          <p:nvPr/>
+        </p:nvSpPr>
+        <p:spPr>
+          <a:xfrm>
+            <a:off x="658368" y="2176272"/>
+            <a:ext cx="3200400" cy="4297680"/>
+          </a:xfrm>
+          <a:prstGeom prst="roundRect">
+            <a:avLst>
+              <a:gd name="adj" fmla="val 2000"/>
+            </a:avLst>
+          </a:prstGeom>
+          <a:solidFill>
+            <a:srgbClr val="F4F7FA"/>
+          </a:solidFill>
+          <a:ln w="12700">
+            <a:solidFill>
+              <a:srgbClr val="E6ECF4"/>
+            </a:solidFill>
+            <a:prstDash val="solid"/>
+          </a:ln>
+        </p:spPr>
+      </p:sp>
+      <p:sp>
+        <p:nvSpPr>
+          <p:cNvPr id="10" name="Text 7"/>
+          <p:cNvSpPr txBox="1"/>
+          <p:nvPr/>
+        </p:nvSpPr>
+        <p:spPr>
+          <a:xfrm>
+            <a:off x="859536" y="2395728"/>
+            <a:ext cx="2798064" cy="274320"/>
+          </a:xfrm>
+          <a:prstGeom prst="rect">
+            <a:avLst/>
+          </a:prstGeom>
+          <a:noFill/>
+          <a:ln/>
+        </p:spPr>
+        <p:txBody>
+          <a:bodyPr wrap="square" lIns="0" tIns="0" rIns="0" bIns="0" rtlCol="0" anchor="ctr"/>
+          <a:lstStyle/>
+          <a:p>
+            <a:pPr rtl="1" algn="r" indent="0" marL="0">
+              <a:buNone/>
+            </a:pPr>
+            <a:r>
+              <a:rPr lang="en-US" sz="1050" b="1" dirty="0">
+                <a:solidFill>
+                  <a:srgbClr val="E8635A"/>
+                </a:solidFill>
+                <a:latin typeface="Arial" pitchFamily="34" charset="0"/>
+                <a:ea typeface="Arial" pitchFamily="34" charset="-122"/>
+                <a:cs typeface="Arial" pitchFamily="34" charset="-120"/>
+              </a:rPr>
+              <a:t>היתרון ליועץ</a:t>
+            </a:r>
+            <a:endParaRPr lang="en-US" sz="1050" dirty="0"/>
+          </a:p>
+        </p:txBody>
+      </p:sp>
+      <p:sp>
+        <p:nvSpPr>
+          <p:cNvPr id="11" name="Text 8"/>
+          <p:cNvSpPr txBox="1"/>
+          <p:nvPr/>
+        </p:nvSpPr>
+        <p:spPr>
+          <a:xfrm>
+            <a:off x="859536" y="2779776"/>
+            <a:ext cx="2798064" cy="310896"/>
+          </a:xfrm>
+          <a:prstGeom prst="rect">
+            <a:avLst/>
+          </a:prstGeom>
+          <a:noFill/>
+          <a:ln/>
+        </p:spPr>
+        <p:txBody>
+          <a:bodyPr wrap="square" lIns="0" tIns="0" rIns="0" bIns="0" rtlCol="0" anchor="ctr"/>
+          <a:lstStyle/>
+          <a:p>
+            <a:pPr rtl="1" algn="r" indent="0" marL="0">
+              <a:buNone/>
+            </a:pPr>
+            <a:r>
+              <a:rPr lang="en-US" sz="1350" b="1" dirty="0">
+                <a:solidFill>
+                  <a:srgbClr val="0C4068"/>
+                </a:solidFill>
+                <a:latin typeface="Arial" pitchFamily="34" charset="0"/>
+                <a:ea typeface="Arial" pitchFamily="34" charset="-122"/>
+                <a:cs typeface="Arial" pitchFamily="34" charset="-120"/>
+              </a:rPr>
+              <a:t>הכנה בשתי דקות במקום שעה</a:t>
+            </a:r>
+            <a:endParaRPr lang="en-US" sz="1350" dirty="0"/>
+          </a:p>
+        </p:txBody>
+      </p:sp>
+      <p:sp>
+        <p:nvSpPr>
+          <p:cNvPr id="12" name="Text 9"/>
+          <p:cNvSpPr txBox="1"/>
+          <p:nvPr/>
+        </p:nvSpPr>
+        <p:spPr>
+          <a:xfrm>
+            <a:off x="859536" y="3108960"/>
+            <a:ext cx="2798064" cy="810768"/>
+          </a:xfrm>
+          <a:prstGeom prst="rect">
+            <a:avLst/>
+          </a:prstGeom>
+          <a:noFill/>
+          <a:ln/>
+        </p:spPr>
+        <p:txBody>
+          <a:bodyPr wrap="square" lIns="0" tIns="0" rIns="0" bIns="0" rtlCol="0" anchor="ctr"/>
+          <a:lstStyle/>
+          <a:p>
+            <a:pPr rtl="1" algn="r" indent="0" marL="0">
+              <a:lnSpc>
+                <a:spcPct val="130000"/>
+              </a:lnSpc>
+              <a:buNone/>
+            </a:pPr>
+            <a:r>
+              <a:rPr lang="en-US" sz="1100" dirty="0">
+                <a:solidFill>
+                  <a:srgbClr val="51677A"/>
+                </a:solidFill>
+                <a:latin typeface="Arial" pitchFamily="34" charset="0"/>
+                <a:ea typeface="Arial" pitchFamily="34" charset="-122"/>
+                <a:cs typeface="Arial" pitchFamily="34" charset="-120"/>
+              </a:rPr>
+              <a:t>נפתחת מוכנה מהיומן או מהבר שעולה חמש דקות לפני הפגישה.</a:t>
+            </a:r>
+            <a:endParaRPr lang="en-US" sz="1100" dirty="0"/>
+          </a:p>
+        </p:txBody>
+      </p:sp>
+      <p:sp>
+        <p:nvSpPr>
+          <p:cNvPr id="13" name="Text 10"/>
+          <p:cNvSpPr txBox="1"/>
+          <p:nvPr/>
+        </p:nvSpPr>
+        <p:spPr>
+          <a:xfrm>
+            <a:off x="859536" y="3992880"/>
+            <a:ext cx="2798064" cy="310896"/>
+          </a:xfrm>
+          <a:prstGeom prst="rect">
+            <a:avLst/>
+          </a:prstGeom>
+          <a:noFill/>
+          <a:ln/>
+        </p:spPr>
+        <p:txBody>
+          <a:bodyPr wrap="square" lIns="0" tIns="0" rIns="0" bIns="0" rtlCol="0" anchor="ctr"/>
+          <a:lstStyle/>
+          <a:p>
+            <a:pPr rtl="1" algn="r" indent="0" marL="0">
+              <a:buNone/>
+            </a:pPr>
+            <a:r>
+              <a:rPr lang="en-US" sz="1350" b="1" dirty="0">
+                <a:solidFill>
+                  <a:srgbClr val="0C4068"/>
+                </a:solidFill>
+                <a:latin typeface="Arial" pitchFamily="34" charset="0"/>
+                <a:ea typeface="Arial" pitchFamily="34" charset="-122"/>
+                <a:cs typeface="Arial" pitchFamily="34" charset="-120"/>
+              </a:rPr>
+              <a:t>תמיד עדכנית</a:t>
+            </a:r>
+            <a:endParaRPr lang="en-US" sz="1350" dirty="0"/>
+          </a:p>
+        </p:txBody>
+      </p:sp>
+      <p:sp>
+        <p:nvSpPr>
+          <p:cNvPr id="14" name="Text 11"/>
+          <p:cNvSpPr txBox="1"/>
+          <p:nvPr/>
+        </p:nvSpPr>
+        <p:spPr>
+          <a:xfrm>
+            <a:off x="859536" y="4322064"/>
+            <a:ext cx="2798064" cy="810768"/>
+          </a:xfrm>
+          <a:prstGeom prst="rect">
+            <a:avLst/>
+          </a:prstGeom>
+          <a:noFill/>
+          <a:ln/>
+        </p:spPr>
+        <p:txBody>
+          <a:bodyPr wrap="square" lIns="0" tIns="0" rIns="0" bIns="0" rtlCol="0" anchor="ctr"/>
+          <a:lstStyle/>
+          <a:p>
+            <a:pPr rtl="1" algn="r" indent="0" marL="0">
+              <a:lnSpc>
+                <a:spcPct val="130000"/>
+              </a:lnSpc>
+              <a:buNone/>
+            </a:pPr>
+            <a:r>
+              <a:rPr lang="en-US" sz="1100" dirty="0">
+                <a:solidFill>
+                  <a:srgbClr val="51677A"/>
+                </a:solidFill>
+                <a:latin typeface="Arial" pitchFamily="34" charset="0"/>
+                <a:ea typeface="Arial" pitchFamily="34" charset="-122"/>
+                <a:cs typeface="Arial" pitchFamily="34" charset="-120"/>
+              </a:rPr>
+              <a:t>מסמך שנכתב לפני שבוע כבר לא נכון. זה נכון לרגע שנפתח.</a:t>
+            </a:r>
+            <a:endParaRPr lang="en-US" sz="1100" dirty="0"/>
+          </a:p>
+        </p:txBody>
+      </p:sp>
+      <p:sp>
+        <p:nvSpPr>
+          <p:cNvPr id="15" name="Text 12"/>
+          <p:cNvSpPr txBox="1"/>
+          <p:nvPr/>
+        </p:nvSpPr>
+        <p:spPr>
+          <a:xfrm>
+            <a:off x="859536" y="5205984"/>
+            <a:ext cx="2798064" cy="310896"/>
+          </a:xfrm>
+          <a:prstGeom prst="rect">
+            <a:avLst/>
+          </a:prstGeom>
+          <a:noFill/>
+          <a:ln/>
+        </p:spPr>
+        <p:txBody>
+          <a:bodyPr wrap="square" lIns="0" tIns="0" rIns="0" bIns="0" rtlCol="0" anchor="ctr"/>
+          <a:lstStyle/>
+          <a:p>
+            <a:pPr rtl="1" algn="r" indent="0" marL="0">
+              <a:buNone/>
+            </a:pPr>
+            <a:r>
+              <a:rPr lang="en-US" sz="1350" b="1" dirty="0">
+                <a:solidFill>
+                  <a:srgbClr val="0C4068"/>
+                </a:solidFill>
+                <a:latin typeface="Arial" pitchFamily="34" charset="0"/>
+                <a:ea typeface="Arial" pitchFamily="34" charset="-122"/>
+                <a:cs typeface="Arial" pitchFamily="34" charset="-120"/>
+              </a:rPr>
+              <a:t>אחרי הפגישה — לאישור בלבד</a:t>
+            </a:r>
+            <a:endParaRPr lang="en-US" sz="1350" dirty="0"/>
+          </a:p>
+        </p:txBody>
+      </p:sp>
+      <p:sp>
+        <p:nvSpPr>
+          <p:cNvPr id="16" name="Text 13"/>
+          <p:cNvSpPr txBox="1"/>
+          <p:nvPr/>
+        </p:nvSpPr>
+        <p:spPr>
+          <a:xfrm>
+            <a:off x="859536" y="5535168"/>
+            <a:ext cx="2798064" cy="810768"/>
+          </a:xfrm>
+          <a:prstGeom prst="rect">
+            <a:avLst/>
+          </a:prstGeom>
+          <a:noFill/>
+          <a:ln/>
+        </p:spPr>
+        <p:txBody>
+          <a:bodyPr wrap="square" lIns="0" tIns="0" rIns="0" bIns="0" rtlCol="0" anchor="ctr"/>
+          <a:lstStyle/>
+          <a:p>
+            <a:pPr rtl="1" algn="r" indent="0" marL="0">
+              <a:lnSpc>
+                <a:spcPct val="130000"/>
+              </a:lnSpc>
+              <a:buNone/>
+            </a:pPr>
+            <a:r>
+              <a:rPr lang="en-US" sz="1100" dirty="0">
+                <a:solidFill>
+                  <a:srgbClr val="51677A"/>
+                </a:solidFill>
+                <a:latin typeface="Arial" pitchFamily="34" charset="0"/>
+                <a:ea typeface="Arial" pitchFamily="34" charset="-122"/>
+                <a:cs typeface="Arial" pitchFamily="34" charset="-120"/>
+              </a:rPr>
+              <a:t>סיכום, משימות שחולצו ועדכוני זיכרון מוכנים; אתה מאשר ושולח.</a:t>
+            </a:r>
+            <a:endParaRPr lang="en-US" sz="1100" dirty="0"/>
           </a:p>
         </p:txBody>
       </p:sp>
@@ -4961,24 +7871,24 @@
         </p:nvSpPr>
         <p:spPr>
           <a:xfrm>
-            <a:off x="685800" y="384048"/>
-            <a:ext cx="10820095" cy="310896"/>
-          </a:xfrm>
-          <a:prstGeom prst="rect">
-            <a:avLst/>
-          </a:prstGeom>
-          <a:noFill/>
-          <a:ln/>
-        </p:spPr>
-        <p:txBody>
-          <a:bodyPr wrap="square" lIns="0" tIns="0" rIns="0" bIns="0" rtlCol="0" anchor="ctr"/>
-          <a:lstStyle/>
-          <a:p>
-            <a:pPr rtl="1" algn="r" indent="0" marL="0">
-              <a:buNone/>
-            </a:pPr>
-            <a:r>
-              <a:rPr lang="en-US" sz="1300" b="1" dirty="0">
+            <a:off x="658368" y="365760"/>
+            <a:ext cx="10874959" cy="274320"/>
+          </a:xfrm>
+          <a:prstGeom prst="rect">
+            <a:avLst/>
+          </a:prstGeom>
+          <a:noFill/>
+          <a:ln/>
+        </p:spPr>
+        <p:txBody>
+          <a:bodyPr wrap="square" lIns="0" tIns="0" rIns="0" bIns="0" rtlCol="0" anchor="ctr"/>
+          <a:lstStyle/>
+          <a:p>
+            <a:pPr rtl="1" algn="r" indent="0" marL="0">
+              <a:buNone/>
+            </a:pPr>
+            <a:r>
+              <a:rPr lang="en-US" sz="1250" b="1" dirty="0">
                 <a:solidFill>
                   <a:srgbClr val="E8635A"/>
                 </a:solidFill>
@@ -4986,101 +7896,90 @@
                 <a:ea typeface="Arial" pitchFamily="34" charset="-122"/>
                 <a:cs typeface="Arial" pitchFamily="34" charset="-120"/>
               </a:rPr>
-              <a:t>מה HK עושה · 4 מתוך 4</a:t>
+              <a:t>חלק 3 · תקשורת — משוב מקצועי</a:t>
+            </a:r>
+            <a:endParaRPr lang="en-US" sz="1250" dirty="0"/>
+          </a:p>
+        </p:txBody>
+      </p:sp>
+      <p:sp>
+        <p:nvSpPr>
+          <p:cNvPr id="3" name="Text 1"/>
+          <p:cNvSpPr txBox="1"/>
+          <p:nvPr/>
+        </p:nvSpPr>
+        <p:spPr>
+          <a:xfrm>
+            <a:off x="658368" y="658368"/>
+            <a:ext cx="10874959" cy="566928"/>
+          </a:xfrm>
+          <a:prstGeom prst="rect">
+            <a:avLst/>
+          </a:prstGeom>
+          <a:noFill/>
+          <a:ln/>
+        </p:spPr>
+        <p:txBody>
+          <a:bodyPr wrap="square" lIns="0" tIns="0" rIns="0" bIns="0" rtlCol="0" anchor="ctr"/>
+          <a:lstStyle/>
+          <a:p>
+            <a:pPr rtl="1" algn="r" indent="0" marL="0">
+              <a:buNone/>
+            </a:pPr>
+            <a:r>
+              <a:rPr lang="en-US" sz="2900" b="1" dirty="0">
+                <a:solidFill>
+                  <a:srgbClr val="0C4068"/>
+                </a:solidFill>
+                <a:latin typeface="Arial" pitchFamily="34" charset="0"/>
+                <a:ea typeface="Arial" pitchFamily="34" charset="-122"/>
+                <a:cs typeface="Arial" pitchFamily="34" charset="-120"/>
+              </a:rPr>
+              <a:t>המערכת מנתחת גם את ניהול הפגישה שלך</a:t>
+            </a:r>
+            <a:endParaRPr lang="en-US" sz="2900" dirty="0"/>
+          </a:p>
+        </p:txBody>
+      </p:sp>
+      <p:sp>
+        <p:nvSpPr>
+          <p:cNvPr id="4" name="Text 2"/>
+          <p:cNvSpPr txBox="1"/>
+          <p:nvPr/>
+        </p:nvSpPr>
+        <p:spPr>
+          <a:xfrm>
+            <a:off x="658368" y="1261872"/>
+            <a:ext cx="10874959" cy="786384"/>
+          </a:xfrm>
+          <a:prstGeom prst="rect">
+            <a:avLst/>
+          </a:prstGeom>
+          <a:noFill/>
+          <a:ln/>
+        </p:spPr>
+        <p:txBody>
+          <a:bodyPr wrap="square" lIns="0" tIns="0" rIns="0" bIns="0" rtlCol="0" anchor="ctr"/>
+          <a:lstStyle/>
+          <a:p>
+            <a:pPr rtl="1" algn="r" indent="0" marL="0">
+              <a:lnSpc>
+                <a:spcPct val="135000"/>
+              </a:lnSpc>
+              <a:buNone/>
+            </a:pPr>
+            <a:r>
+              <a:rPr lang="en-US" sz="1300" dirty="0">
+                <a:solidFill>
+                  <a:srgbClr val="51677A"/>
+                </a:solidFill>
+                <a:latin typeface="Arial" pitchFamily="34" charset="0"/>
+                <a:ea typeface="Arial" pitchFamily="34" charset="-122"/>
+                <a:cs typeface="Arial" pitchFamily="34" charset="-120"/>
+              </a:rPr>
+              <a:t>אחרי כל פגישה נוצר משוב על עבודת היועץ בארבעה צירים: מיקוד וחיבור ל«למה», הקשבה ומתן מרחב, עבודה ברובד הסמוי, והובלה והנעה לפעולה. המשוב גלוי ליועץ בלבד ואינו נשלח ללקוח או למנהל.</a:t>
             </a:r>
             <a:endParaRPr lang="en-US" sz="1300" dirty="0"/>
-          </a:p>
-        </p:txBody>
-      </p:sp>
-      <p:sp>
-        <p:nvSpPr>
-          <p:cNvPr id="3" name="Text 1"/>
-          <p:cNvSpPr txBox="1"/>
-          <p:nvPr/>
-        </p:nvSpPr>
-        <p:spPr>
-          <a:xfrm>
-            <a:off x="685800" y="713232"/>
-            <a:ext cx="10820095" cy="685800"/>
-          </a:xfrm>
-          <a:prstGeom prst="rect">
-            <a:avLst/>
-          </a:prstGeom>
-          <a:noFill/>
-          <a:ln/>
-        </p:spPr>
-        <p:txBody>
-          <a:bodyPr wrap="square" lIns="0" tIns="0" rIns="0" bIns="0" rtlCol="0" anchor="ctr"/>
-          <a:lstStyle/>
-          <a:p>
-            <a:pPr algn="r" indent="0" marL="0">
-              <a:buNone/>
-            </a:pPr>
-            <a:r>
-              <a:rPr lang="en-US" sz="3300" b="1" dirty="0">
-                <a:solidFill>
-                  <a:srgbClr val="0C4068"/>
-                </a:solidFill>
-                <a:latin typeface="Arial" pitchFamily="34" charset="0"/>
-                <a:ea typeface="Arial" pitchFamily="34" charset="-122"/>
-                <a:cs typeface="Arial" pitchFamily="34" charset="-120"/>
-              </a:rPr>
-              <a:t>ההכנה לפגישה </a:t>
-            </a:r>
-            <a:pPr algn="r" indent="0" marL="0">
-              <a:buNone/>
-            </a:pPr>
-            <a:r>
-              <a:rPr lang="en-US" sz="3300" b="1" dirty="0">
-                <a:solidFill>
-                  <a:srgbClr val="E8635A"/>
-                </a:solidFill>
-                <a:latin typeface="Arial" pitchFamily="34" charset="0"/>
-                <a:ea typeface="Arial" pitchFamily="34" charset="-122"/>
-                <a:cs typeface="Arial" pitchFamily="34" charset="-120"/>
-              </a:rPr>
-              <a:t>נגזרת. לא נכתבת.</a:t>
-            </a:r>
-            <a:endParaRPr lang="en-US" sz="3300" dirty="0"/>
-          </a:p>
-        </p:txBody>
-      </p:sp>
-      <p:sp>
-        <p:nvSpPr>
-          <p:cNvPr id="4" name="Text 2"/>
-          <p:cNvSpPr txBox="1"/>
-          <p:nvPr/>
-        </p:nvSpPr>
-        <p:spPr>
-          <a:xfrm>
-            <a:off x="685800" y="1426464"/>
-            <a:ext cx="10820095" cy="502920"/>
-          </a:xfrm>
-          <a:prstGeom prst="rect">
-            <a:avLst/>
-          </a:prstGeom>
-          <a:noFill/>
-          <a:ln/>
-        </p:spPr>
-        <p:txBody>
-          <a:bodyPr wrap="square" lIns="0" tIns="0" rIns="0" bIns="0" rtlCol="0" anchor="ctr"/>
-          <a:lstStyle/>
-          <a:p>
-            <a:pPr rtl="1" algn="r" indent="0" marL="0">
-              <a:buNone/>
-            </a:pPr>
-            <a:r>
-              <a:rPr lang="en-US" sz="1450" dirty="0">
-                <a:solidFill>
-                  <a:srgbClr val="51677A"/>
-                </a:solidFill>
-                <a:latin typeface="Arial" pitchFamily="34" charset="0"/>
-                <a:ea typeface="Arial" pitchFamily="34" charset="-122"/>
-                <a:cs typeface="Arial" pitchFamily="34" charset="-120"/>
-              </a:rPr>
-              <a:t>שתי דקות לפני הפגישה אתה פותח הכנה שנבנתה עכשיו — מהזיכרון החי, מהמספרים של הבוקר, מהמשימות הפתוחות.</a:t>
-            </a:r>
-            <a:endParaRPr lang="en-US" sz="1450" dirty="0"/>
           </a:p>
         </p:txBody>
       </p:sp>
@@ -5092,12 +7991,12 @@
         </p:nvSpPr>
         <p:spPr>
           <a:xfrm>
-            <a:off x="630936" y="2029968"/>
-            <a:ext cx="10929823" cy="4498848"/>
+            <a:off x="4069080" y="2130552"/>
+            <a:ext cx="7509967" cy="4389120"/>
           </a:xfrm>
           <a:prstGeom prst="roundRect">
             <a:avLst>
-              <a:gd name="adj" fmla="val 1626"/>
+              <a:gd name="adj" fmla="val 1458"/>
             </a:avLst>
           </a:prstGeom>
           <a:solidFill>
@@ -5110,9 +8009,9 @@
             <a:prstDash val="solid"/>
           </a:ln>
           <a:effectLst>
-            <a:outerShdw sx="100000" sy="100000" kx="0" ky="0" algn="bl" rotWithShape="0" blurRad="254000" dist="63500" dir="5400000">
+            <a:outerShdw sx="100000" sy="100000" kx="0" ky="0" algn="bl" rotWithShape="0" blurRad="228600" dist="50800" dir="5400000">
               <a:srgbClr val="0C4068">
-                <a:alpha val="28000"/>
+                <a:alpha val="24000"/>
               </a:srgbClr>
             </a:outerShdw>
           </a:effectLst>
@@ -5120,7 +8019,7 @@
       </p:sp>
       <p:pic>
         <p:nvPicPr>
-          <p:cNvPr id="6" name="Image 0" descr="/Users/eyalhazut/Documents/Claude/Projects/hk/mainScreen/docs/shots/meet-prep.png">    </p:cNvPr>
+          <p:cNvPr id="6" name="Image 0" descr="/Users/eyalhazut/Documents/Claude/Projects/hk/mainScreen/docs/shots/meet-feedback.png">    </p:cNvPr>
           <p:cNvPicPr>
             <a:picLocks noChangeAspect="1"/>
           </p:cNvPicPr>
@@ -5133,8 +8032,8 @@
         </p:blipFill>
         <p:spPr>
           <a:xfrm>
-            <a:off x="685800" y="2084832"/>
-            <a:ext cx="10820095" cy="4389120"/>
+            <a:off x="4114800" y="2176272"/>
+            <a:ext cx="7418527" cy="4297680"/>
           </a:xfrm>
           <a:prstGeom prst="rect">
             <a:avLst/>
@@ -5149,25 +8048,18 @@
         </p:nvSpPr>
         <p:spPr>
           <a:xfrm>
-            <a:off x="7894015" y="2542032"/>
-            <a:ext cx="3291840" cy="713232"/>
+            <a:off x="4370832" y="2560320"/>
+            <a:ext cx="2926080" cy="621792"/>
           </a:xfrm>
           <a:prstGeom prst="roundRect">
             <a:avLst>
-              <a:gd name="adj" fmla="val 8974"/>
+              <a:gd name="adj" fmla="val 8824"/>
             </a:avLst>
           </a:prstGeom>
           <a:solidFill>
             <a:srgbClr val="0C4068"/>
           </a:solidFill>
           <a:ln/>
-          <a:effectLst>
-            <a:outerShdw sx="100000" sy="100000" kx="0" ky="0" algn="bl" rotWithShape="0" blurRad="152400" dist="38100" dir="5400000">
-              <a:srgbClr val="0A3557">
-                <a:alpha val="40000"/>
-              </a:srgbClr>
-            </a:outerShdw>
-          </a:effectLst>
         </p:spPr>
       </p:sp>
       <p:sp>
@@ -5178,24 +8070,24 @@
         </p:nvSpPr>
         <p:spPr>
           <a:xfrm>
-            <a:off x="8022031" y="2542032"/>
-            <a:ext cx="3035808" cy="713232"/>
-          </a:xfrm>
-          <a:prstGeom prst="rect">
-            <a:avLst/>
-          </a:prstGeom>
-          <a:noFill/>
-          <a:ln/>
-        </p:spPr>
-        <p:txBody>
-          <a:bodyPr wrap="square" lIns="0" tIns="0" rIns="0" bIns="0" rtlCol="0" anchor="ctr"/>
-          <a:lstStyle/>
-          <a:p>
-            <a:pPr rtl="1" algn="r" indent="0" marL="0">
-              <a:buNone/>
-            </a:pPr>
-            <a:r>
-              <a:rPr lang="en-US" sz="1150" dirty="0">
+            <a:off x="4480560" y="2560320"/>
+            <a:ext cx="2706624" cy="621792"/>
+          </a:xfrm>
+          <a:prstGeom prst="rect">
+            <a:avLst/>
+          </a:prstGeom>
+          <a:noFill/>
+          <a:ln/>
+        </p:spPr>
+        <p:txBody>
+          <a:bodyPr wrap="square" lIns="0" tIns="0" rIns="0" bIns="0" rtlCol="0" anchor="ctr"/>
+          <a:lstStyle/>
+          <a:p>
+            <a:pPr rtl="1" algn="r" indent="0" marL="0">
+              <a:buNone/>
+            </a:pPr>
+            <a:r>
+              <a:rPr lang="en-US" sz="1050" dirty="0">
                 <a:solidFill>
                   <a:srgbClr val="FFFFFF"/>
                 </a:solidFill>
@@ -5203,9 +8095,318 @@
                 <a:ea typeface="Arial" pitchFamily="34" charset="-122"/>
                 <a:cs typeface="Arial" pitchFamily="34" charset="-120"/>
               </a:rPr>
-              <a:t>«פתח במספרים — צחי מאבד סבלנות מהקדמות»</a:t>
-            </a:r>
-            <a:endParaRPr lang="en-US" sz="1150" dirty="0"/>
+              <a:t>ארבעה צירי משוב · לעיני היועץ בלבד</a:t>
+            </a:r>
+            <a:endParaRPr lang="en-US" sz="1050" dirty="0"/>
+          </a:p>
+        </p:txBody>
+      </p:sp>
+      <p:sp>
+        <p:nvSpPr>
+          <p:cNvPr id="9" name="Shape 6"/>
+          <p:cNvSpPr/>
+          <p:nvPr/>
+        </p:nvSpPr>
+        <p:spPr>
+          <a:xfrm>
+            <a:off x="658368" y="2176272"/>
+            <a:ext cx="3200400" cy="4297680"/>
+          </a:xfrm>
+          <a:prstGeom prst="roundRect">
+            <a:avLst>
+              <a:gd name="adj" fmla="val 2000"/>
+            </a:avLst>
+          </a:prstGeom>
+          <a:solidFill>
+            <a:srgbClr val="F4F7FA"/>
+          </a:solidFill>
+          <a:ln w="12700">
+            <a:solidFill>
+              <a:srgbClr val="E6ECF4"/>
+            </a:solidFill>
+            <a:prstDash val="solid"/>
+          </a:ln>
+        </p:spPr>
+      </p:sp>
+      <p:sp>
+        <p:nvSpPr>
+          <p:cNvPr id="10" name="Text 7"/>
+          <p:cNvSpPr txBox="1"/>
+          <p:nvPr/>
+        </p:nvSpPr>
+        <p:spPr>
+          <a:xfrm>
+            <a:off x="859536" y="2395728"/>
+            <a:ext cx="2798064" cy="274320"/>
+          </a:xfrm>
+          <a:prstGeom prst="rect">
+            <a:avLst/>
+          </a:prstGeom>
+          <a:noFill/>
+          <a:ln/>
+        </p:spPr>
+        <p:txBody>
+          <a:bodyPr wrap="square" lIns="0" tIns="0" rIns="0" bIns="0" rtlCol="0" anchor="ctr"/>
+          <a:lstStyle/>
+          <a:p>
+            <a:pPr rtl="1" algn="r" indent="0" marL="0">
+              <a:buNone/>
+            </a:pPr>
+            <a:r>
+              <a:rPr lang="en-US" sz="1050" b="1" dirty="0">
+                <a:solidFill>
+                  <a:srgbClr val="E8635A"/>
+                </a:solidFill>
+                <a:latin typeface="Arial" pitchFamily="34" charset="0"/>
+                <a:ea typeface="Arial" pitchFamily="34" charset="-122"/>
+                <a:cs typeface="Arial" pitchFamily="34" charset="-120"/>
+              </a:rPr>
+              <a:t>היתרון ליועץ</a:t>
+            </a:r>
+            <a:endParaRPr lang="en-US" sz="1050" dirty="0"/>
+          </a:p>
+        </p:txBody>
+      </p:sp>
+      <p:sp>
+        <p:nvSpPr>
+          <p:cNvPr id="11" name="Text 8"/>
+          <p:cNvSpPr txBox="1"/>
+          <p:nvPr/>
+        </p:nvSpPr>
+        <p:spPr>
+          <a:xfrm>
+            <a:off x="859536" y="2779776"/>
+            <a:ext cx="2798064" cy="310896"/>
+          </a:xfrm>
+          <a:prstGeom prst="rect">
+            <a:avLst/>
+          </a:prstGeom>
+          <a:noFill/>
+          <a:ln/>
+        </p:spPr>
+        <p:txBody>
+          <a:bodyPr wrap="square" lIns="0" tIns="0" rIns="0" bIns="0" rtlCol="0" anchor="ctr"/>
+          <a:lstStyle/>
+          <a:p>
+            <a:pPr rtl="1" algn="r" indent="0" marL="0">
+              <a:buNone/>
+            </a:pPr>
+            <a:r>
+              <a:rPr lang="en-US" sz="1350" b="1" dirty="0">
+                <a:solidFill>
+                  <a:srgbClr val="0C4068"/>
+                </a:solidFill>
+                <a:latin typeface="Arial" pitchFamily="34" charset="0"/>
+                <a:ea typeface="Arial" pitchFamily="34" charset="-122"/>
+                <a:cs typeface="Arial" pitchFamily="34" charset="-120"/>
+              </a:rPr>
+              <a:t>שיפור מדיד מפגישה לפגישה</a:t>
+            </a:r>
+            <a:endParaRPr lang="en-US" sz="1350" dirty="0"/>
+          </a:p>
+        </p:txBody>
+      </p:sp>
+      <p:sp>
+        <p:nvSpPr>
+          <p:cNvPr id="12" name="Text 9"/>
+          <p:cNvSpPr txBox="1"/>
+          <p:nvPr/>
+        </p:nvSpPr>
+        <p:spPr>
+          <a:xfrm>
+            <a:off x="859536" y="3108960"/>
+            <a:ext cx="2798064" cy="810768"/>
+          </a:xfrm>
+          <a:prstGeom prst="rect">
+            <a:avLst/>
+          </a:prstGeom>
+          <a:noFill/>
+          <a:ln/>
+        </p:spPr>
+        <p:txBody>
+          <a:bodyPr wrap="square" lIns="0" tIns="0" rIns="0" bIns="0" rtlCol="0" anchor="ctr"/>
+          <a:lstStyle/>
+          <a:p>
+            <a:pPr rtl="1" algn="r" indent="0" marL="0">
+              <a:lnSpc>
+                <a:spcPct val="130000"/>
+              </a:lnSpc>
+              <a:buNone/>
+            </a:pPr>
+            <a:r>
+              <a:rPr lang="en-US" sz="1100" dirty="0">
+                <a:solidFill>
+                  <a:srgbClr val="51677A"/>
+                </a:solidFill>
+                <a:latin typeface="Arial" pitchFamily="34" charset="0"/>
+                <a:ea typeface="Arial" pitchFamily="34" charset="-122"/>
+                <a:cs typeface="Arial" pitchFamily="34" charset="-120"/>
+              </a:rPr>
+              <a:t>נקודות חוזק ונקודות לשיפור, מנוסחות על הפגישה הספציפית ולא בכלליות.</a:t>
+            </a:r>
+            <a:endParaRPr lang="en-US" sz="1100" dirty="0"/>
+          </a:p>
+        </p:txBody>
+      </p:sp>
+      <p:sp>
+        <p:nvSpPr>
+          <p:cNvPr id="13" name="Text 10"/>
+          <p:cNvSpPr txBox="1"/>
+          <p:nvPr/>
+        </p:nvSpPr>
+        <p:spPr>
+          <a:xfrm>
+            <a:off x="859536" y="3992880"/>
+            <a:ext cx="2798064" cy="310896"/>
+          </a:xfrm>
+          <a:prstGeom prst="rect">
+            <a:avLst/>
+          </a:prstGeom>
+          <a:noFill/>
+          <a:ln/>
+        </p:spPr>
+        <p:txBody>
+          <a:bodyPr wrap="square" lIns="0" tIns="0" rIns="0" bIns="0" rtlCol="0" anchor="ctr"/>
+          <a:lstStyle/>
+          <a:p>
+            <a:pPr rtl="1" algn="r" indent="0" marL="0">
+              <a:buNone/>
+            </a:pPr>
+            <a:r>
+              <a:rPr lang="en-US" sz="1350" b="1" dirty="0">
+                <a:solidFill>
+                  <a:srgbClr val="0C4068"/>
+                </a:solidFill>
+                <a:latin typeface="Arial" pitchFamily="34" charset="0"/>
+                <a:ea typeface="Arial" pitchFamily="34" charset="-122"/>
+                <a:cs typeface="Arial" pitchFamily="34" charset="-120"/>
+              </a:rPr>
+              <a:t>כלי הכשרה למשרד</a:t>
+            </a:r>
+            <a:endParaRPr lang="en-US" sz="1350" dirty="0"/>
+          </a:p>
+        </p:txBody>
+      </p:sp>
+      <p:sp>
+        <p:nvSpPr>
+          <p:cNvPr id="14" name="Text 11"/>
+          <p:cNvSpPr txBox="1"/>
+          <p:nvPr/>
+        </p:nvSpPr>
+        <p:spPr>
+          <a:xfrm>
+            <a:off x="859536" y="4322064"/>
+            <a:ext cx="2798064" cy="810768"/>
+          </a:xfrm>
+          <a:prstGeom prst="rect">
+            <a:avLst/>
+          </a:prstGeom>
+          <a:noFill/>
+          <a:ln/>
+        </p:spPr>
+        <p:txBody>
+          <a:bodyPr wrap="square" lIns="0" tIns="0" rIns="0" bIns="0" rtlCol="0" anchor="ctr"/>
+          <a:lstStyle/>
+          <a:p>
+            <a:pPr rtl="1" algn="r" indent="0" marL="0">
+              <a:lnSpc>
+                <a:spcPct val="130000"/>
+              </a:lnSpc>
+              <a:buNone/>
+            </a:pPr>
+            <a:r>
+              <a:rPr lang="en-US" sz="1100" dirty="0">
+                <a:solidFill>
+                  <a:srgbClr val="51677A"/>
+                </a:solidFill>
+                <a:latin typeface="Arial" pitchFamily="34" charset="0"/>
+                <a:ea typeface="Arial" pitchFamily="34" charset="-122"/>
+                <a:cs typeface="Arial" pitchFamily="34" charset="-120"/>
+              </a:rPr>
+              <a:t>יועץ חדש נכנס לשיטה קיימת ומקבל משוב מהפגישה הראשונה.</a:t>
+            </a:r>
+            <a:endParaRPr lang="en-US" sz="1100" dirty="0"/>
+          </a:p>
+        </p:txBody>
+      </p:sp>
+      <p:sp>
+        <p:nvSpPr>
+          <p:cNvPr id="15" name="Text 12"/>
+          <p:cNvSpPr txBox="1"/>
+          <p:nvPr/>
+        </p:nvSpPr>
+        <p:spPr>
+          <a:xfrm>
+            <a:off x="859536" y="5205984"/>
+            <a:ext cx="2798064" cy="310896"/>
+          </a:xfrm>
+          <a:prstGeom prst="rect">
+            <a:avLst/>
+          </a:prstGeom>
+          <a:noFill/>
+          <a:ln/>
+        </p:spPr>
+        <p:txBody>
+          <a:bodyPr wrap="square" lIns="0" tIns="0" rIns="0" bIns="0" rtlCol="0" anchor="ctr"/>
+          <a:lstStyle/>
+          <a:p>
+            <a:pPr rtl="1" algn="r" indent="0" marL="0">
+              <a:buNone/>
+            </a:pPr>
+            <a:r>
+              <a:rPr lang="en-US" sz="1350" b="1" dirty="0">
+                <a:solidFill>
+                  <a:srgbClr val="0C4068"/>
+                </a:solidFill>
+                <a:latin typeface="Arial" pitchFamily="34" charset="0"/>
+                <a:ea typeface="Arial" pitchFamily="34" charset="-122"/>
+                <a:cs typeface="Arial" pitchFamily="34" charset="-120"/>
+              </a:rPr>
+              <a:t>פרטי לחלוטין</a:t>
+            </a:r>
+            <a:endParaRPr lang="en-US" sz="1350" dirty="0"/>
+          </a:p>
+        </p:txBody>
+      </p:sp>
+      <p:sp>
+        <p:nvSpPr>
+          <p:cNvPr id="16" name="Text 13"/>
+          <p:cNvSpPr txBox="1"/>
+          <p:nvPr/>
+        </p:nvSpPr>
+        <p:spPr>
+          <a:xfrm>
+            <a:off x="859536" y="5535168"/>
+            <a:ext cx="2798064" cy="810768"/>
+          </a:xfrm>
+          <a:prstGeom prst="rect">
+            <a:avLst/>
+          </a:prstGeom>
+          <a:noFill/>
+          <a:ln/>
+        </p:spPr>
+        <p:txBody>
+          <a:bodyPr wrap="square" lIns="0" tIns="0" rIns="0" bIns="0" rtlCol="0" anchor="ctr"/>
+          <a:lstStyle/>
+          <a:p>
+            <a:pPr rtl="1" algn="r" indent="0" marL="0">
+              <a:lnSpc>
+                <a:spcPct val="130000"/>
+              </a:lnSpc>
+              <a:buNone/>
+            </a:pPr>
+            <a:r>
+              <a:rPr lang="en-US" sz="1100" dirty="0">
+                <a:solidFill>
+                  <a:srgbClr val="51677A"/>
+                </a:solidFill>
+                <a:latin typeface="Arial" pitchFamily="34" charset="0"/>
+                <a:ea typeface="Arial" pitchFamily="34" charset="-122"/>
+                <a:cs typeface="Arial" pitchFamily="34" charset="-120"/>
+              </a:rPr>
+              <a:t>לא נשלח ללקוח, לא נראה למנהל המשרד.</a:t>
+            </a:r>
+            <a:endParaRPr lang="en-US" sz="1100" dirty="0"/>
           </a:p>
         </p:txBody>
       </p:sp>
@@ -5223,7 +8424,7 @@
     <p:bg>
       <p:bgPr>
         <a:solidFill>
-          <a:srgbClr val="0C4068"/>
+          <a:srgbClr val="FFFFFF"/>
         </a:solidFill>
       </p:bgPr>
     </p:bg>
@@ -5249,24 +8450,24 @@
         </p:nvSpPr>
         <p:spPr>
           <a:xfrm>
-            <a:off x="685800" y="777240"/>
-            <a:ext cx="10820095" cy="365760"/>
-          </a:xfrm>
-          <a:prstGeom prst="rect">
-            <a:avLst/>
-          </a:prstGeom>
-          <a:noFill/>
-          <a:ln/>
-        </p:spPr>
-        <p:txBody>
-          <a:bodyPr wrap="square" lIns="0" tIns="0" rIns="0" bIns="0" rtlCol="0" anchor="ctr"/>
-          <a:lstStyle/>
-          <a:p>
-            <a:pPr rtl="1" algn="r" indent="0" marL="0">
-              <a:buNone/>
-            </a:pPr>
-            <a:r>
-              <a:rPr lang="en-US" sz="1400" b="1" dirty="0">
+            <a:off x="658368" y="365760"/>
+            <a:ext cx="10874959" cy="274320"/>
+          </a:xfrm>
+          <a:prstGeom prst="rect">
+            <a:avLst/>
+          </a:prstGeom>
+          <a:noFill/>
+          <a:ln/>
+        </p:spPr>
+        <p:txBody>
+          <a:bodyPr wrap="square" lIns="0" tIns="0" rIns="0" bIns="0" rtlCol="0" anchor="ctr"/>
+          <a:lstStyle/>
+          <a:p>
+            <a:pPr rtl="1" algn="r" indent="0" marL="0">
+              <a:buNone/>
+            </a:pPr>
+            <a:r>
+              <a:rPr lang="en-US" sz="1250" b="1" dirty="0">
                 <a:solidFill>
                   <a:srgbClr val="E8635A"/>
                 </a:solidFill>
@@ -5274,9 +8475,9 @@
                 <a:ea typeface="Arial" pitchFamily="34" charset="-122"/>
                 <a:cs typeface="Arial" pitchFamily="34" charset="-120"/>
               </a:rPr>
-              <a:t>אין את זה לאף מתחרה</a:t>
-            </a:r>
-            <a:endParaRPr lang="en-US" sz="1400" dirty="0"/>
+              <a:t>חלק 4 · דוחות פיננסיים</a:t>
+            </a:r>
+            <a:endParaRPr lang="en-US" sz="1250" dirty="0"/>
           </a:p>
         </p:txBody>
       </p:sp>
@@ -5288,137 +8489,274 @@
         </p:nvSpPr>
         <p:spPr>
           <a:xfrm>
-            <a:off x="685800" y="1463040"/>
-            <a:ext cx="10820095" cy="2834640"/>
-          </a:xfrm>
-          <a:prstGeom prst="rect">
-            <a:avLst/>
-          </a:prstGeom>
-          <a:noFill/>
-          <a:ln/>
-        </p:spPr>
-        <p:txBody>
-          <a:bodyPr wrap="square" lIns="0" tIns="0" rIns="0" bIns="0" rtlCol="0" anchor="ctr"/>
-          <a:lstStyle/>
-          <a:p>
-            <a:pPr algn="r" indent="0" marL="0">
+            <a:off x="658368" y="658368"/>
+            <a:ext cx="10874959" cy="566928"/>
+          </a:xfrm>
+          <a:prstGeom prst="rect">
+            <a:avLst/>
+          </a:prstGeom>
+          <a:noFill/>
+          <a:ln/>
+        </p:spPr>
+        <p:txBody>
+          <a:bodyPr wrap="square" lIns="0" tIns="0" rIns="0" bIns="0" rtlCol="0" anchor="ctr"/>
+          <a:lstStyle/>
+          <a:p>
+            <a:pPr rtl="1" algn="r" indent="0" marL="0">
+              <a:buNone/>
+            </a:pPr>
+            <a:r>
+              <a:rPr lang="en-US" sz="2900" b="1" dirty="0">
+                <a:solidFill>
+                  <a:srgbClr val="0C4068"/>
+                </a:solidFill>
+                <a:latin typeface="Arial" pitchFamily="34" charset="0"/>
+                <a:ea typeface="Arial" pitchFamily="34" charset="-122"/>
+                <a:cs typeface="Arial" pitchFamily="34" charset="-120"/>
+              </a:rPr>
+              <a:t>תכנון קדימה ודוח רווח והפסד — מוכנים</a:t>
+            </a:r>
+            <a:endParaRPr lang="en-US" sz="2900" dirty="0"/>
+          </a:p>
+        </p:txBody>
+      </p:sp>
+      <p:sp>
+        <p:nvSpPr>
+          <p:cNvPr id="4" name="Text 2"/>
+          <p:cNvSpPr txBox="1"/>
+          <p:nvPr/>
+        </p:nvSpPr>
+        <p:spPr>
+          <a:xfrm>
+            <a:off x="658368" y="1261872"/>
+            <a:ext cx="10874959" cy="786384"/>
+          </a:xfrm>
+          <a:prstGeom prst="rect">
+            <a:avLst/>
+          </a:prstGeom>
+          <a:noFill/>
+          <a:ln/>
+        </p:spPr>
+        <p:txBody>
+          <a:bodyPr wrap="square" lIns="0" tIns="0" rIns="0" bIns="0" rtlCol="0" anchor="ctr"/>
+          <a:lstStyle/>
+          <a:p>
+            <a:pPr rtl="1" algn="r" indent="0" marL="0">
               <a:lnSpc>
-                <a:spcPct val="115000"/>
+                <a:spcPct val="135000"/>
               </a:lnSpc>
               <a:buNone/>
             </a:pPr>
             <a:r>
-              <a:rPr lang="en-US" sz="4800" b="1" dirty="0">
-                <a:solidFill>
-                  <a:srgbClr val="FFFFFF"/>
-                </a:solidFill>
-                <a:latin typeface="Arial" pitchFamily="34" charset="0"/>
-                <a:ea typeface="Arial" pitchFamily="34" charset="-122"/>
-                <a:cs typeface="Arial" pitchFamily="34" charset="-120"/>
-              </a:rPr>
-              <a:t>אחרי כל פגישה —</a:t>
-            </a:r>
-            <a:endParaRPr lang="en-US" sz="4800" dirty="0"/>
-          </a:p>
+              <a:rPr lang="en-US" sz="1300" dirty="0">
+                <a:solidFill>
+                  <a:srgbClr val="51677A"/>
+                </a:solidFill>
+                <a:latin typeface="Arial" pitchFamily="34" charset="0"/>
+                <a:ea typeface="Arial" pitchFamily="34" charset="-122"/>
+                <a:cs typeface="Arial" pitchFamily="34" charset="-120"/>
+              </a:rPr>
+              <a:t>תכנון תזרימי לחודשים קדימה עם יעד לכל קטגוריה ויתרות שמתגלגלות; ודוח רווח והפסד שנבנה מהכרטסת האמיתית של רואה החשבון — בדוגמה שבמערכת: 14,083 תנועות שהפכו ל־631 כרטיסים.</a:t>
+            </a:r>
+            <a:endParaRPr lang="en-US" sz="1300" dirty="0"/>
+          </a:p>
+        </p:txBody>
+      </p:sp>
+      <p:sp>
+        <p:nvSpPr>
+          <p:cNvPr id="5" name="Shape 3"/>
+          <p:cNvSpPr/>
+          <p:nvPr/>
+        </p:nvSpPr>
+        <p:spPr>
+          <a:xfrm>
+            <a:off x="6187288" y="2130552"/>
+            <a:ext cx="5391760" cy="3858768"/>
+          </a:xfrm>
+          <a:prstGeom prst="roundRect">
+            <a:avLst>
+              <a:gd name="adj" fmla="val 1659"/>
+            </a:avLst>
+          </a:prstGeom>
+          <a:solidFill>
+            <a:srgbClr val="FFFFFF"/>
+          </a:solidFill>
+          <a:ln w="12700">
+            <a:solidFill>
+              <a:srgbClr val="D5DEE8"/>
+            </a:solidFill>
+            <a:prstDash val="solid"/>
+          </a:ln>
+          <a:effectLst>
+            <a:outerShdw sx="100000" sy="100000" kx="0" ky="0" algn="bl" rotWithShape="0" blurRad="203200" dist="50800" dir="5400000">
+              <a:srgbClr val="0C4068">
+                <a:alpha val="22000"/>
+              </a:srgbClr>
+            </a:outerShdw>
+          </a:effectLst>
+        </p:spPr>
+      </p:sp>
+      <p:pic>
+        <p:nvPicPr>
+          <p:cNvPr id="6" name="Image 0" descr="/Users/eyalhazut/Documents/Claude/Projects/hk/mainScreen/docs/shots/co-fcast.png">    </p:cNvPr>
+          <p:cNvPicPr>
+            <a:picLocks noChangeAspect="1"/>
+          </p:cNvPicPr>
+          <p:nvPr/>
+        </p:nvPicPr>
+        <p:blipFill>
+          <a:blip r:embed="rId1"/>
+          <a:srcRect l="0" r="0" t="0" b="0"/>
+          <a:stretch/>
+        </p:blipFill>
+        <p:spPr>
+          <a:xfrm>
+            <a:off x="6233008" y="2176272"/>
+            <a:ext cx="5300320" cy="3767328"/>
+          </a:xfrm>
+          <a:prstGeom prst="rect">
+            <a:avLst/>
+          </a:prstGeom>
+        </p:spPr>
+      </p:pic>
+      <p:sp>
+        <p:nvSpPr>
+          <p:cNvPr id="7" name="Text 4"/>
+          <p:cNvSpPr txBox="1"/>
+          <p:nvPr/>
+        </p:nvSpPr>
+        <p:spPr>
+          <a:xfrm>
+            <a:off x="6233008" y="6071616"/>
+            <a:ext cx="5300320" cy="548640"/>
+          </a:xfrm>
+          <a:prstGeom prst="rect">
+            <a:avLst/>
+          </a:prstGeom>
+          <a:noFill/>
+          <a:ln/>
+        </p:spPr>
+        <p:txBody>
+          <a:bodyPr wrap="square" lIns="0" tIns="0" rIns="0" bIns="0" rtlCol="0" anchor="ctr"/>
+          <a:lstStyle/>
           <a:p>
             <a:pPr rtl="1" algn="r" indent="0" marL="0">
               <a:lnSpc>
-                <a:spcPct val="115000"/>
+                <a:spcPct val="130000"/>
               </a:lnSpc>
               <a:buNone/>
             </a:pPr>
             <a:r>
-              <a:rPr lang="en-US" sz="4800" b="1" dirty="0">
-                <a:solidFill>
-                  <a:srgbClr val="FFFFFF"/>
-                </a:solidFill>
-                <a:latin typeface="Arial" pitchFamily="34" charset="0"/>
-                <a:ea typeface="Arial" pitchFamily="34" charset="-122"/>
-                <a:cs typeface="Arial" pitchFamily="34" charset="-120"/>
-              </a:rPr>
-              <a:t>המערכת נותנת משוב </a:t>
-            </a:r>
-            <a:endParaRPr lang="en-US" sz="4800" dirty="0"/>
-          </a:p>
-          <a:p>
-            <a:pPr algn="r" indent="0" marL="0">
+              <a:rPr lang="en-US" sz="1150" dirty="0">
+                <a:solidFill>
+                  <a:srgbClr val="51677A"/>
+                </a:solidFill>
+                <a:latin typeface="Arial" pitchFamily="34" charset="0"/>
+                <a:ea typeface="Arial" pitchFamily="34" charset="-122"/>
+                <a:cs typeface="Arial" pitchFamily="34" charset="-120"/>
+              </a:rPr>
+              <a:t>תכנון תזרימי — יעד לכל קטגוריה, וחריגה שנראית לפני שהיא קורית</a:t>
+            </a:r>
+            <a:endParaRPr lang="en-US" sz="1150" dirty="0"/>
+          </a:p>
+        </p:txBody>
+      </p:sp>
+      <p:sp>
+        <p:nvSpPr>
+          <p:cNvPr id="8" name="Shape 5"/>
+          <p:cNvSpPr/>
+          <p:nvPr/>
+        </p:nvSpPr>
+        <p:spPr>
+          <a:xfrm>
+            <a:off x="612648" y="2130552"/>
+            <a:ext cx="5391760" cy="3858768"/>
+          </a:xfrm>
+          <a:prstGeom prst="roundRect">
+            <a:avLst>
+              <a:gd name="adj" fmla="val 1659"/>
+            </a:avLst>
+          </a:prstGeom>
+          <a:solidFill>
+            <a:srgbClr val="FFFFFF"/>
+          </a:solidFill>
+          <a:ln w="12700">
+            <a:solidFill>
+              <a:srgbClr val="D5DEE8"/>
+            </a:solidFill>
+            <a:prstDash val="solid"/>
+          </a:ln>
+          <a:effectLst>
+            <a:outerShdw sx="100000" sy="100000" kx="0" ky="0" algn="bl" rotWithShape="0" blurRad="203200" dist="50800" dir="5400000">
+              <a:srgbClr val="0C4068">
+                <a:alpha val="22000"/>
+              </a:srgbClr>
+            </a:outerShdw>
+          </a:effectLst>
+        </p:spPr>
+      </p:sp>
+      <p:pic>
+        <p:nvPicPr>
+          <p:cNvPr id="9" name="Image 1" descr="/Users/eyalhazut/Documents/Claude/Projects/hk/mainScreen/docs/shots/co-acct.png">    </p:cNvPr>
+          <p:cNvPicPr>
+            <a:picLocks noChangeAspect="1"/>
+          </p:cNvPicPr>
+          <p:nvPr/>
+        </p:nvPicPr>
+        <p:blipFill>
+          <a:blip r:embed="rId2"/>
+          <a:srcRect l="0" r="0" t="0" b="0"/>
+          <a:stretch/>
+        </p:blipFill>
+        <p:spPr>
+          <a:xfrm>
+            <a:off x="658368" y="2176272"/>
+            <a:ext cx="5300320" cy="3767328"/>
+          </a:xfrm>
+          <a:prstGeom prst="rect">
+            <a:avLst/>
+          </a:prstGeom>
+        </p:spPr>
+      </p:pic>
+      <p:sp>
+        <p:nvSpPr>
+          <p:cNvPr id="10" name="Text 6"/>
+          <p:cNvSpPr txBox="1"/>
+          <p:nvPr/>
+        </p:nvSpPr>
+        <p:spPr>
+          <a:xfrm>
+            <a:off x="658368" y="6071616"/>
+            <a:ext cx="5300320" cy="548640"/>
+          </a:xfrm>
+          <a:prstGeom prst="rect">
+            <a:avLst/>
+          </a:prstGeom>
+          <a:noFill/>
+          <a:ln/>
+        </p:spPr>
+        <p:txBody>
+          <a:bodyPr wrap="square" lIns="0" tIns="0" rIns="0" bIns="0" rtlCol="0" anchor="ctr"/>
+          <a:lstStyle/>
+          <a:p>
+            <a:pPr rtl="1" algn="r" indent="0" marL="0">
               <a:lnSpc>
-                <a:spcPct val="115000"/>
+                <a:spcPct val="130000"/>
               </a:lnSpc>
               <a:buNone/>
             </a:pPr>
             <a:r>
-              <a:rPr lang="en-US" sz="4800" b="1" dirty="0">
-                <a:solidFill>
-                  <a:srgbClr val="39ABE2"/>
-                </a:solidFill>
-                <a:latin typeface="Arial" pitchFamily="34" charset="0"/>
-                <a:ea typeface="Arial" pitchFamily="34" charset="-122"/>
-                <a:cs typeface="Arial" pitchFamily="34" charset="-120"/>
-              </a:rPr>
-              <a:t>עליך.</a:t>
-            </a:r>
-            <a:endParaRPr lang="en-US" sz="4800" dirty="0"/>
-          </a:p>
-        </p:txBody>
-      </p:sp>
-      <p:sp>
-        <p:nvSpPr>
-          <p:cNvPr id="4" name="Text 2"/>
-          <p:cNvSpPr txBox="1"/>
-          <p:nvPr/>
-        </p:nvSpPr>
-        <p:spPr>
-          <a:xfrm>
-            <a:off x="685800" y="4663440"/>
-            <a:ext cx="10820095" cy="1005840"/>
-          </a:xfrm>
-          <a:prstGeom prst="rect">
-            <a:avLst/>
-          </a:prstGeom>
-          <a:noFill/>
-          <a:ln/>
-        </p:spPr>
-        <p:txBody>
-          <a:bodyPr wrap="square" lIns="0" tIns="0" rIns="0" bIns="0" rtlCol="0" anchor="ctr"/>
-          <a:lstStyle/>
-          <a:p>
-            <a:pPr algn="r" indent="0" marL="0">
-              <a:lnSpc>
-                <a:spcPct val="140000"/>
-              </a:lnSpc>
-              <a:buNone/>
-            </a:pPr>
-            <a:r>
-              <a:rPr lang="en-US" sz="1600" dirty="0">
-                <a:solidFill>
-                  <a:srgbClr val="9FC0DA"/>
-                </a:solidFill>
-                <a:latin typeface="Arial" pitchFamily="34" charset="0"/>
-                <a:ea typeface="Arial" pitchFamily="34" charset="-122"/>
-                <a:cs typeface="Arial" pitchFamily="34" charset="-120"/>
-              </a:rPr>
-              <a:t>מיקוד וחיבור ל«למה» · הקשבה ומרחב · עבודת עומק · הובלה והנעה לפעולה
-</a:t>
-            </a:r>
-            <a:pPr algn="r" indent="0" marL="0">
-              <a:lnSpc>
-                <a:spcPct val="140000"/>
-              </a:lnSpc>
-              <a:buNone/>
-            </a:pPr>
-            <a:r>
-              <a:rPr lang="en-US" sz="1600" b="1" dirty="0">
-                <a:solidFill>
-                  <a:srgbClr val="FFFFFF"/>
-                </a:solidFill>
-                <a:latin typeface="Arial" pitchFamily="34" charset="0"/>
-                <a:ea typeface="Arial" pitchFamily="34" charset="-122"/>
-                <a:cs typeface="Arial" pitchFamily="34" charset="-120"/>
-              </a:rPr>
-              <a:t>לעיניך בלבד. לא נשלח ללקוח, לא למנהל.</a:t>
-            </a:r>
-            <a:endParaRPr lang="en-US" sz="1600" dirty="0"/>
+              <a:rPr lang="en-US" sz="1150" dirty="0">
+                <a:solidFill>
+                  <a:srgbClr val="51677A"/>
+                </a:solidFill>
+                <a:latin typeface="Arial" pitchFamily="34" charset="0"/>
+                <a:ea typeface="Arial" pitchFamily="34" charset="-122"/>
+                <a:cs typeface="Arial" pitchFamily="34" charset="-120"/>
+              </a:rPr>
+              <a:t>תכנון חשבונאי — ה־AI ממפה מבנה, חיבור הסכומים רץ בקוד</a:t>
+            </a:r>
+            <a:endParaRPr lang="en-US" sz="1150" dirty="0"/>
           </a:p>
         </p:txBody>
       </p:sp>
@@ -5462,24 +8800,24 @@
         </p:nvSpPr>
         <p:spPr>
           <a:xfrm>
-            <a:off x="685800" y="384048"/>
-            <a:ext cx="10820095" cy="310896"/>
-          </a:xfrm>
-          <a:prstGeom prst="rect">
-            <a:avLst/>
-          </a:prstGeom>
-          <a:noFill/>
-          <a:ln/>
-        </p:spPr>
-        <p:txBody>
-          <a:bodyPr wrap="square" lIns="0" tIns="0" rIns="0" bIns="0" rtlCol="0" anchor="ctr"/>
-          <a:lstStyle/>
-          <a:p>
-            <a:pPr rtl="1" algn="r" indent="0" marL="0">
-              <a:buNone/>
-            </a:pPr>
-            <a:r>
-              <a:rPr lang="en-US" sz="1300" b="1" dirty="0">
+            <a:off x="658368" y="365760"/>
+            <a:ext cx="10874959" cy="274320"/>
+          </a:xfrm>
+          <a:prstGeom prst="rect">
+            <a:avLst/>
+          </a:prstGeom>
+          <a:noFill/>
+          <a:ln/>
+        </p:spPr>
+        <p:txBody>
+          <a:bodyPr wrap="square" lIns="0" tIns="0" rIns="0" bIns="0" rtlCol="0" anchor="ctr"/>
+          <a:lstStyle/>
+          <a:p>
+            <a:pPr rtl="1" algn="r" indent="0" marL="0">
+              <a:buNone/>
+            </a:pPr>
+            <a:r>
+              <a:rPr lang="en-US" sz="1250" b="1" dirty="0">
                 <a:solidFill>
                   <a:srgbClr val="E8635A"/>
                 </a:solidFill>
@@ -5487,101 +8825,90 @@
                 <a:ea typeface="Arial" pitchFamily="34" charset="-122"/>
                 <a:cs typeface="Arial" pitchFamily="34" charset="-120"/>
               </a:rPr>
-              <a:t>ומה שהלקוח שלך רואה</a:t>
+              <a:t>חלק 5 · הצד של הלקוח</a:t>
+            </a:r>
+            <a:endParaRPr lang="en-US" sz="1250" dirty="0"/>
+          </a:p>
+        </p:txBody>
+      </p:sp>
+      <p:sp>
+        <p:nvSpPr>
+          <p:cNvPr id="3" name="Text 1"/>
+          <p:cNvSpPr txBox="1"/>
+          <p:nvPr/>
+        </p:nvSpPr>
+        <p:spPr>
+          <a:xfrm>
+            <a:off x="658368" y="658368"/>
+            <a:ext cx="10874959" cy="566928"/>
+          </a:xfrm>
+          <a:prstGeom prst="rect">
+            <a:avLst/>
+          </a:prstGeom>
+          <a:noFill/>
+          <a:ln/>
+        </p:spPr>
+        <p:txBody>
+          <a:bodyPr wrap="square" lIns="0" tIns="0" rIns="0" bIns="0" rtlCol="0" anchor="ctr"/>
+          <a:lstStyle/>
+          <a:p>
+            <a:pPr rtl="1" algn="r" indent="0" marL="0">
+              <a:buNone/>
+            </a:pPr>
+            <a:r>
+              <a:rPr lang="en-US" sz="2900" b="1" dirty="0">
+                <a:solidFill>
+                  <a:srgbClr val="0C4068"/>
+                </a:solidFill>
+                <a:latin typeface="Arial" pitchFamily="34" charset="0"/>
+                <a:ea typeface="Arial" pitchFamily="34" charset="-122"/>
+                <a:cs typeface="Arial" pitchFamily="34" charset="-120"/>
+              </a:rPr>
+              <a:t>הלקוח מקבל מערכת בשם המשרד שלך</a:t>
+            </a:r>
+            <a:endParaRPr lang="en-US" sz="2900" dirty="0"/>
+          </a:p>
+        </p:txBody>
+      </p:sp>
+      <p:sp>
+        <p:nvSpPr>
+          <p:cNvPr id="4" name="Text 2"/>
+          <p:cNvSpPr txBox="1"/>
+          <p:nvPr/>
+        </p:nvSpPr>
+        <p:spPr>
+          <a:xfrm>
+            <a:off x="658368" y="1261872"/>
+            <a:ext cx="10874959" cy="786384"/>
+          </a:xfrm>
+          <a:prstGeom prst="rect">
+            <a:avLst/>
+          </a:prstGeom>
+          <a:noFill/>
+          <a:ln/>
+        </p:spPr>
+        <p:txBody>
+          <a:bodyPr wrap="square" lIns="0" tIns="0" rIns="0" bIns="0" rtlCol="0" anchor="ctr"/>
+          <a:lstStyle/>
+          <a:p>
+            <a:pPr rtl="1" algn="r" indent="0" marL="0">
+              <a:lnSpc>
+                <a:spcPct val="135000"/>
+              </a:lnSpc>
+              <a:buNone/>
+            </a:pPr>
+            <a:r>
+              <a:rPr lang="en-US" sz="1300" dirty="0">
+                <a:solidFill>
+                  <a:srgbClr val="51677A"/>
+                </a:solidFill>
+                <a:latin typeface="Arial" pitchFamily="34" charset="0"/>
+                <a:ea typeface="Arial" pitchFamily="34" charset="-122"/>
+                <a:cs typeface="Arial" pitchFamily="34" charset="-120"/>
+              </a:rPr>
+              <a:t>לבעל העסק יש דשבורד משלו שנפתח בתקציר בוקר — פסקה שנכתבת כל בוקר מהזיכרון ומיתרות הבנק העדכניות — ולצדה יתרה, חריגה צפויה, משימות פתוחות והעלאת מסמכים. וכן עוזר בוואטסאפ שיודע את המספרים שלו.</a:t>
             </a:r>
             <a:endParaRPr lang="en-US" sz="1300" dirty="0"/>
-          </a:p>
-        </p:txBody>
-      </p:sp>
-      <p:sp>
-        <p:nvSpPr>
-          <p:cNvPr id="3" name="Text 1"/>
-          <p:cNvSpPr txBox="1"/>
-          <p:nvPr/>
-        </p:nvSpPr>
-        <p:spPr>
-          <a:xfrm>
-            <a:off x="685800" y="713232"/>
-            <a:ext cx="10820095" cy="685800"/>
-          </a:xfrm>
-          <a:prstGeom prst="rect">
-            <a:avLst/>
-          </a:prstGeom>
-          <a:noFill/>
-          <a:ln/>
-        </p:spPr>
-        <p:txBody>
-          <a:bodyPr wrap="square" lIns="0" tIns="0" rIns="0" bIns="0" rtlCol="0" anchor="ctr"/>
-          <a:lstStyle/>
-          <a:p>
-            <a:pPr algn="r" indent="0" marL="0">
-              <a:buNone/>
-            </a:pPr>
-            <a:r>
-              <a:rPr lang="en-US" sz="3300" b="1" dirty="0">
-                <a:solidFill>
-                  <a:srgbClr val="0C4068"/>
-                </a:solidFill>
-                <a:latin typeface="Arial" pitchFamily="34" charset="0"/>
-                <a:ea typeface="Arial" pitchFamily="34" charset="-122"/>
-                <a:cs typeface="Arial" pitchFamily="34" charset="-120"/>
-              </a:rPr>
-              <a:t>הלקוח מקבל מערכת. </a:t>
-            </a:r>
-            <a:pPr algn="r" indent="0" marL="0">
-              <a:buNone/>
-            </a:pPr>
-            <a:r>
-              <a:rPr lang="en-US" sz="3300" b="1" dirty="0">
-                <a:solidFill>
-                  <a:srgbClr val="E8635A"/>
-                </a:solidFill>
-                <a:latin typeface="Arial" pitchFamily="34" charset="0"/>
-                <a:ea typeface="Arial" pitchFamily="34" charset="-122"/>
-                <a:cs typeface="Arial" pitchFamily="34" charset="-120"/>
-              </a:rPr>
-              <a:t>אתה מקבל את הקרדיט.</a:t>
-            </a:r>
-            <a:endParaRPr lang="en-US" sz="3300" dirty="0"/>
-          </a:p>
-        </p:txBody>
-      </p:sp>
-      <p:sp>
-        <p:nvSpPr>
-          <p:cNvPr id="4" name="Text 2"/>
-          <p:cNvSpPr txBox="1"/>
-          <p:nvPr/>
-        </p:nvSpPr>
-        <p:spPr>
-          <a:xfrm>
-            <a:off x="685800" y="1426464"/>
-            <a:ext cx="10820095" cy="502920"/>
-          </a:xfrm>
-          <a:prstGeom prst="rect">
-            <a:avLst/>
-          </a:prstGeom>
-          <a:noFill/>
-          <a:ln/>
-        </p:spPr>
-        <p:txBody>
-          <a:bodyPr wrap="square" lIns="0" tIns="0" rIns="0" bIns="0" rtlCol="0" anchor="ctr"/>
-          <a:lstStyle/>
-          <a:p>
-            <a:pPr rtl="1" algn="r" indent="0" marL="0">
-              <a:buNone/>
-            </a:pPr>
-            <a:r>
-              <a:rPr lang="en-US" sz="1450" dirty="0">
-                <a:solidFill>
-                  <a:srgbClr val="51677A"/>
-                </a:solidFill>
-                <a:latin typeface="Arial" pitchFamily="34" charset="0"/>
-                <a:ea typeface="Arial" pitchFamily="34" charset="-122"/>
-                <a:cs typeface="Arial" pitchFamily="34" charset="-120"/>
-              </a:rPr>
-              <a:t>תקציר בוקר שנכתב כל יום מהזיכרון וממספרי הבנק, דשבורד חי, ועוזר בוואטסאפ — הכל בשם המשרד שלך. אין «HK» בשום מקום.</a:t>
-            </a:r>
-            <a:endParaRPr lang="en-US" sz="1450" dirty="0"/>
           </a:p>
         </p:txBody>
       </p:sp>
@@ -5593,12 +8920,12 @@
         </p:nvSpPr>
         <p:spPr>
           <a:xfrm>
-            <a:off x="630936" y="2029968"/>
-            <a:ext cx="10929823" cy="4498848"/>
+            <a:off x="4069080" y="2130552"/>
+            <a:ext cx="7509967" cy="4389120"/>
           </a:xfrm>
           <a:prstGeom prst="roundRect">
             <a:avLst>
-              <a:gd name="adj" fmla="val 1626"/>
+              <a:gd name="adj" fmla="val 1458"/>
             </a:avLst>
           </a:prstGeom>
           <a:solidFill>
@@ -5611,9 +8938,9 @@
             <a:prstDash val="solid"/>
           </a:ln>
           <a:effectLst>
-            <a:outerShdw sx="100000" sy="100000" kx="0" ky="0" algn="bl" rotWithShape="0" blurRad="254000" dist="63500" dir="5400000">
+            <a:outerShdw sx="100000" sy="100000" kx="0" ky="0" algn="bl" rotWithShape="0" blurRad="228600" dist="50800" dir="5400000">
               <a:srgbClr val="0C4068">
-                <a:alpha val="28000"/>
+                <a:alpha val="24000"/>
               </a:srgbClr>
             </a:outerShdw>
           </a:effectLst>
@@ -5634,8 +8961,8 @@
         </p:blipFill>
         <p:spPr>
           <a:xfrm>
-            <a:off x="685800" y="2084832"/>
-            <a:ext cx="10820095" cy="4389120"/>
+            <a:off x="4114800" y="2176272"/>
+            <a:ext cx="7418527" cy="4297680"/>
           </a:xfrm>
           <a:prstGeom prst="rect">
             <a:avLst/>
@@ -5650,25 +8977,18 @@
         </p:nvSpPr>
         <p:spPr>
           <a:xfrm>
-            <a:off x="7894015" y="2542032"/>
-            <a:ext cx="3291840" cy="713232"/>
+            <a:off x="8351215" y="2560320"/>
+            <a:ext cx="2926080" cy="621792"/>
           </a:xfrm>
           <a:prstGeom prst="roundRect">
             <a:avLst>
-              <a:gd name="adj" fmla="val 8974"/>
+              <a:gd name="adj" fmla="val 8824"/>
             </a:avLst>
           </a:prstGeom>
           <a:solidFill>
             <a:srgbClr val="0C4068"/>
           </a:solidFill>
           <a:ln/>
-          <a:effectLst>
-            <a:outerShdw sx="100000" sy="100000" kx="0" ky="0" algn="bl" rotWithShape="0" blurRad="152400" dist="38100" dir="5400000">
-              <a:srgbClr val="0A3557">
-                <a:alpha val="40000"/>
-              </a:srgbClr>
-            </a:outerShdw>
-          </a:effectLst>
         </p:spPr>
       </p:sp>
       <p:sp>
@@ -5679,24 +8999,24 @@
         </p:nvSpPr>
         <p:spPr>
           <a:xfrm>
-            <a:off x="8022031" y="2542032"/>
-            <a:ext cx="3035808" cy="713232"/>
-          </a:xfrm>
-          <a:prstGeom prst="rect">
-            <a:avLst/>
-          </a:prstGeom>
-          <a:noFill/>
-          <a:ln/>
-        </p:spPr>
-        <p:txBody>
-          <a:bodyPr wrap="square" lIns="0" tIns="0" rIns="0" bIns="0" rtlCol="0" anchor="ctr"/>
-          <a:lstStyle/>
-          <a:p>
-            <a:pPr rtl="1" algn="r" indent="0" marL="0">
-              <a:buNone/>
-            </a:pPr>
-            <a:r>
-              <a:rPr lang="en-US" sz="1150" dirty="0">
+            <a:off x="8460943" y="2560320"/>
+            <a:ext cx="2706624" cy="621792"/>
+          </a:xfrm>
+          <a:prstGeom prst="rect">
+            <a:avLst/>
+          </a:prstGeom>
+          <a:noFill/>
+          <a:ln/>
+        </p:spPr>
+        <p:txBody>
+          <a:bodyPr wrap="square" lIns="0" tIns="0" rIns="0" bIns="0" rtlCol="0" anchor="ctr"/>
+          <a:lstStyle/>
+          <a:p>
+            <a:pPr rtl="1" algn="r" indent="0" marL="0">
+              <a:buNone/>
+            </a:pPr>
+            <a:r>
+              <a:rPr lang="en-US" sz="1050" dirty="0">
                 <a:solidFill>
                   <a:srgbClr val="FFFFFF"/>
                 </a:solidFill>
@@ -5704,9 +9024,318 @@
                 <a:ea typeface="Arial" pitchFamily="34" charset="-122"/>
                 <a:cs typeface="Arial" pitchFamily="34" charset="-120"/>
               </a:rPr>
-              <a:t>«היתרה 75,187 ₪ — צפויה חריגה ב־11.07 אם ההעברה לא תבוצע»</a:t>
-            </a:r>
-            <a:endParaRPr lang="en-US" sz="1150" dirty="0"/>
+              <a:t>«היתרה 75,187 ₪ — צפויה חריגה ב־11.07»</a:t>
+            </a:r>
+            <a:endParaRPr lang="en-US" sz="1050" dirty="0"/>
+          </a:p>
+        </p:txBody>
+      </p:sp>
+      <p:sp>
+        <p:nvSpPr>
+          <p:cNvPr id="9" name="Shape 6"/>
+          <p:cNvSpPr/>
+          <p:nvPr/>
+        </p:nvSpPr>
+        <p:spPr>
+          <a:xfrm>
+            <a:off x="658368" y="2176272"/>
+            <a:ext cx="3200400" cy="4297680"/>
+          </a:xfrm>
+          <a:prstGeom prst="roundRect">
+            <a:avLst>
+              <a:gd name="adj" fmla="val 2000"/>
+            </a:avLst>
+          </a:prstGeom>
+          <a:solidFill>
+            <a:srgbClr val="F4F7FA"/>
+          </a:solidFill>
+          <a:ln w="12700">
+            <a:solidFill>
+              <a:srgbClr val="E6ECF4"/>
+            </a:solidFill>
+            <a:prstDash val="solid"/>
+          </a:ln>
+        </p:spPr>
+      </p:sp>
+      <p:sp>
+        <p:nvSpPr>
+          <p:cNvPr id="10" name="Text 7"/>
+          <p:cNvSpPr txBox="1"/>
+          <p:nvPr/>
+        </p:nvSpPr>
+        <p:spPr>
+          <a:xfrm>
+            <a:off x="859536" y="2395728"/>
+            <a:ext cx="2798064" cy="274320"/>
+          </a:xfrm>
+          <a:prstGeom prst="rect">
+            <a:avLst/>
+          </a:prstGeom>
+          <a:noFill/>
+          <a:ln/>
+        </p:spPr>
+        <p:txBody>
+          <a:bodyPr wrap="square" lIns="0" tIns="0" rIns="0" bIns="0" rtlCol="0" anchor="ctr"/>
+          <a:lstStyle/>
+          <a:p>
+            <a:pPr rtl="1" algn="r" indent="0" marL="0">
+              <a:buNone/>
+            </a:pPr>
+            <a:r>
+              <a:rPr lang="en-US" sz="1050" b="1" dirty="0">
+                <a:solidFill>
+                  <a:srgbClr val="E8635A"/>
+                </a:solidFill>
+                <a:latin typeface="Arial" pitchFamily="34" charset="0"/>
+                <a:ea typeface="Arial" pitchFamily="34" charset="-122"/>
+                <a:cs typeface="Arial" pitchFamily="34" charset="-120"/>
+              </a:rPr>
+              <a:t>היתרון ליועץ</a:t>
+            </a:r>
+            <a:endParaRPr lang="en-US" sz="1050" dirty="0"/>
+          </a:p>
+        </p:txBody>
+      </p:sp>
+      <p:sp>
+        <p:nvSpPr>
+          <p:cNvPr id="11" name="Text 8"/>
+          <p:cNvSpPr txBox="1"/>
+          <p:nvPr/>
+        </p:nvSpPr>
+        <p:spPr>
+          <a:xfrm>
+            <a:off x="859536" y="2779776"/>
+            <a:ext cx="2798064" cy="310896"/>
+          </a:xfrm>
+          <a:prstGeom prst="rect">
+            <a:avLst/>
+          </a:prstGeom>
+          <a:noFill/>
+          <a:ln/>
+        </p:spPr>
+        <p:txBody>
+          <a:bodyPr wrap="square" lIns="0" tIns="0" rIns="0" bIns="0" rtlCol="0" anchor="ctr"/>
+          <a:lstStyle/>
+          <a:p>
+            <a:pPr rtl="1" algn="r" indent="0" marL="0">
+              <a:buNone/>
+            </a:pPr>
+            <a:r>
+              <a:rPr lang="en-US" sz="1350" b="1" dirty="0">
+                <a:solidFill>
+                  <a:srgbClr val="0C4068"/>
+                </a:solidFill>
+                <a:latin typeface="Arial" pitchFamily="34" charset="0"/>
+                <a:ea typeface="Arial" pitchFamily="34" charset="-122"/>
+                <a:cs typeface="Arial" pitchFamily="34" charset="-120"/>
+              </a:rPr>
+              <a:t>שימור לקוחות</a:t>
+            </a:r>
+            <a:endParaRPr lang="en-US" sz="1350" dirty="0"/>
+          </a:p>
+        </p:txBody>
+      </p:sp>
+      <p:sp>
+        <p:nvSpPr>
+          <p:cNvPr id="12" name="Text 9"/>
+          <p:cNvSpPr txBox="1"/>
+          <p:nvPr/>
+        </p:nvSpPr>
+        <p:spPr>
+          <a:xfrm>
+            <a:off x="859536" y="3108960"/>
+            <a:ext cx="2798064" cy="810768"/>
+          </a:xfrm>
+          <a:prstGeom prst="rect">
+            <a:avLst/>
+          </a:prstGeom>
+          <a:noFill/>
+          <a:ln/>
+        </p:spPr>
+        <p:txBody>
+          <a:bodyPr wrap="square" lIns="0" tIns="0" rIns="0" bIns="0" rtlCol="0" anchor="ctr"/>
+          <a:lstStyle/>
+          <a:p>
+            <a:pPr rtl="1" algn="r" indent="0" marL="0">
+              <a:lnSpc>
+                <a:spcPct val="130000"/>
+              </a:lnSpc>
+              <a:buNone/>
+            </a:pPr>
+            <a:r>
+              <a:rPr lang="en-US" sz="1100" dirty="0">
+                <a:solidFill>
+                  <a:srgbClr val="51677A"/>
+                </a:solidFill>
+                <a:latin typeface="Arial" pitchFamily="34" charset="0"/>
+                <a:ea typeface="Arial" pitchFamily="34" charset="-122"/>
+                <a:cs typeface="Arial" pitchFamily="34" charset="-120"/>
+              </a:rPr>
+              <a:t>הלקוח מרגיש מטופל כל בוקר, לא רק ביום הפגישה.</a:t>
+            </a:r>
+            <a:endParaRPr lang="en-US" sz="1100" dirty="0"/>
+          </a:p>
+        </p:txBody>
+      </p:sp>
+      <p:sp>
+        <p:nvSpPr>
+          <p:cNvPr id="13" name="Text 10"/>
+          <p:cNvSpPr txBox="1"/>
+          <p:nvPr/>
+        </p:nvSpPr>
+        <p:spPr>
+          <a:xfrm>
+            <a:off x="859536" y="3992880"/>
+            <a:ext cx="2798064" cy="310896"/>
+          </a:xfrm>
+          <a:prstGeom prst="rect">
+            <a:avLst/>
+          </a:prstGeom>
+          <a:noFill/>
+          <a:ln/>
+        </p:spPr>
+        <p:txBody>
+          <a:bodyPr wrap="square" lIns="0" tIns="0" rIns="0" bIns="0" rtlCol="0" anchor="ctr"/>
+          <a:lstStyle/>
+          <a:p>
+            <a:pPr rtl="1" algn="r" indent="0" marL="0">
+              <a:buNone/>
+            </a:pPr>
+            <a:r>
+              <a:rPr lang="en-US" sz="1350" b="1" dirty="0">
+                <a:solidFill>
+                  <a:srgbClr val="0C4068"/>
+                </a:solidFill>
+                <a:latin typeface="Arial" pitchFamily="34" charset="0"/>
+                <a:ea typeface="Arial" pitchFamily="34" charset="-122"/>
+                <a:cs typeface="Arial" pitchFamily="34" charset="-120"/>
+              </a:rPr>
+              <a:t>white-label מלא</a:t>
+            </a:r>
+            <a:endParaRPr lang="en-US" sz="1350" dirty="0"/>
+          </a:p>
+        </p:txBody>
+      </p:sp>
+      <p:sp>
+        <p:nvSpPr>
+          <p:cNvPr id="14" name="Text 11"/>
+          <p:cNvSpPr txBox="1"/>
+          <p:nvPr/>
+        </p:nvSpPr>
+        <p:spPr>
+          <a:xfrm>
+            <a:off x="859536" y="4322064"/>
+            <a:ext cx="2798064" cy="810768"/>
+          </a:xfrm>
+          <a:prstGeom prst="rect">
+            <a:avLst/>
+          </a:prstGeom>
+          <a:noFill/>
+          <a:ln/>
+        </p:spPr>
+        <p:txBody>
+          <a:bodyPr wrap="square" lIns="0" tIns="0" rIns="0" bIns="0" rtlCol="0" anchor="ctr"/>
+          <a:lstStyle/>
+          <a:p>
+            <a:pPr rtl="1" algn="r" indent="0" marL="0">
+              <a:lnSpc>
+                <a:spcPct val="130000"/>
+              </a:lnSpc>
+              <a:buNone/>
+            </a:pPr>
+            <a:r>
+              <a:rPr lang="en-US" sz="1100" dirty="0">
+                <a:solidFill>
+                  <a:srgbClr val="51677A"/>
+                </a:solidFill>
+                <a:latin typeface="Arial" pitchFamily="34" charset="0"/>
+                <a:ea typeface="Arial" pitchFamily="34" charset="-122"/>
+                <a:cs typeface="Arial" pitchFamily="34" charset="-120"/>
+              </a:rPr>
+              <a:t>אין אזכור ל־HK בשום מקום — לא בכותרת, לא בשם הבוט, לא בתפקידים.</a:t>
+            </a:r>
+            <a:endParaRPr lang="en-US" sz="1100" dirty="0"/>
+          </a:p>
+        </p:txBody>
+      </p:sp>
+      <p:sp>
+        <p:nvSpPr>
+          <p:cNvPr id="15" name="Text 12"/>
+          <p:cNvSpPr txBox="1"/>
+          <p:nvPr/>
+        </p:nvSpPr>
+        <p:spPr>
+          <a:xfrm>
+            <a:off x="859536" y="5205984"/>
+            <a:ext cx="2798064" cy="310896"/>
+          </a:xfrm>
+          <a:prstGeom prst="rect">
+            <a:avLst/>
+          </a:prstGeom>
+          <a:noFill/>
+          <a:ln/>
+        </p:spPr>
+        <p:txBody>
+          <a:bodyPr wrap="square" lIns="0" tIns="0" rIns="0" bIns="0" rtlCol="0" anchor="ctr"/>
+          <a:lstStyle/>
+          <a:p>
+            <a:pPr rtl="1" algn="r" indent="0" marL="0">
+              <a:buNone/>
+            </a:pPr>
+            <a:r>
+              <a:rPr lang="en-US" sz="1350" b="1" dirty="0">
+                <a:solidFill>
+                  <a:srgbClr val="0C4068"/>
+                </a:solidFill>
+                <a:latin typeface="Arial" pitchFamily="34" charset="0"/>
+                <a:ea typeface="Arial" pitchFamily="34" charset="-122"/>
+                <a:cs typeface="Arial" pitchFamily="34" charset="-120"/>
+              </a:rPr>
+              <a:t>פחות שאלות אליך</a:t>
+            </a:r>
+            <a:endParaRPr lang="en-US" sz="1350" dirty="0"/>
+          </a:p>
+        </p:txBody>
+      </p:sp>
+      <p:sp>
+        <p:nvSpPr>
+          <p:cNvPr id="16" name="Text 13"/>
+          <p:cNvSpPr txBox="1"/>
+          <p:nvPr/>
+        </p:nvSpPr>
+        <p:spPr>
+          <a:xfrm>
+            <a:off x="859536" y="5535168"/>
+            <a:ext cx="2798064" cy="810768"/>
+          </a:xfrm>
+          <a:prstGeom prst="rect">
+            <a:avLst/>
+          </a:prstGeom>
+          <a:noFill/>
+          <a:ln/>
+        </p:spPr>
+        <p:txBody>
+          <a:bodyPr wrap="square" lIns="0" tIns="0" rIns="0" bIns="0" rtlCol="0" anchor="ctr"/>
+          <a:lstStyle/>
+          <a:p>
+            <a:pPr rtl="1" algn="r" indent="0" marL="0">
+              <a:lnSpc>
+                <a:spcPct val="130000"/>
+              </a:lnSpc>
+              <a:buNone/>
+            </a:pPr>
+            <a:r>
+              <a:rPr lang="en-US" sz="1100" dirty="0">
+                <a:solidFill>
+                  <a:srgbClr val="51677A"/>
+                </a:solidFill>
+                <a:latin typeface="Arial" pitchFamily="34" charset="0"/>
+                <a:ea typeface="Arial" pitchFamily="34" charset="-122"/>
+                <a:cs typeface="Arial" pitchFamily="34" charset="-120"/>
+              </a:rPr>
+              <a:t>מה שהלקוח שואל את העוזר נענה מיד; מה שדורש יועץ מגיע אליך כמשימה.</a:t>
+            </a:r>
+            <a:endParaRPr lang="en-US" sz="1100" dirty="0"/>
           </a:p>
         </p:txBody>
       </p:sp>

--- a/docs/HK-presentation.pptx
+++ b/docs/HK-presentation.pptx
@@ -5703,7 +5703,7 @@
       </p:sp>
       <p:pic>
         <p:nvPicPr>
-          <p:cNvPr id="6" name="Image 0" descr="/Users/eyalhazut/Documents/Claude/Projects/hk/mainScreen/docs/shots/mgr-opsmode.png">    </p:cNvPr>
+          <p:cNvPr id="6" name="Image 0" descr="/Users/eyalhazut/Documents/Claude/Projects/hk/mainScreen/docs/shots/z-ops.png">    </p:cNvPr>
           <p:cNvPicPr>
             <a:picLocks noChangeAspect="1"/>
           </p:cNvPicPr>
@@ -6282,7 +6282,7 @@
       </p:sp>
       <p:pic>
         <p:nvPicPr>
-          <p:cNvPr id="6" name="Image 0" descr="/Users/eyalhazut/Documents/Claude/Projects/hk/mainScreen/docs/shots/co-mem.png">    </p:cNvPr>
+          <p:cNvPr id="6" name="Image 0" descr="/Users/eyalhazut/Documents/Claude/Projects/hk/mainScreen/docs/shots/z-mem.png">    </p:cNvPr>
           <p:cNvPicPr>
             <a:picLocks noChangeAspect="1"/>
           </p:cNvPicPr>
@@ -6861,7 +6861,7 @@
       </p:sp>
       <p:pic>
         <p:nvPicPr>
-          <p:cNvPr id="6" name="Image 0" descr="/Users/eyalhazut/Documents/Claude/Projects/hk/mainScreen/docs/shots/adv-comm.png">    </p:cNvPr>
+          <p:cNvPr id="6" name="Image 0" descr="/Users/eyalhazut/Documents/Claude/Projects/hk/mainScreen/docs/shots/z-comm.png">    </p:cNvPr>
           <p:cNvPicPr>
             <a:picLocks noChangeAspect="1"/>
           </p:cNvPicPr>
@@ -7440,7 +7440,7 @@
       </p:sp>
       <p:pic>
         <p:nvPicPr>
-          <p:cNvPr id="6" name="Image 0" descr="/Users/eyalhazut/Documents/Claude/Projects/hk/mainScreen/docs/shots/meet-prep.png">    </p:cNvPr>
+          <p:cNvPr id="6" name="Image 0" descr="/Users/eyalhazut/Documents/Claude/Projects/hk/mainScreen/docs/shots/z-prep.png">    </p:cNvPr>
           <p:cNvPicPr>
             <a:picLocks noChangeAspect="1"/>
           </p:cNvPicPr>
@@ -8019,7 +8019,7 @@
       </p:sp>
       <p:pic>
         <p:nvPicPr>
-          <p:cNvPr id="6" name="Image 0" descr="/Users/eyalhazut/Documents/Claude/Projects/hk/mainScreen/docs/shots/meet-feedback.png">    </p:cNvPr>
+          <p:cNvPr id="6" name="Image 0" descr="/Users/eyalhazut/Documents/Claude/Projects/hk/mainScreen/docs/shots/z-feedback.png">    </p:cNvPr>
           <p:cNvPicPr>
             <a:picLocks noChangeAspect="1"/>
           </p:cNvPicPr>
@@ -8598,7 +8598,7 @@
       </p:sp>
       <p:pic>
         <p:nvPicPr>
-          <p:cNvPr id="6" name="Image 0" descr="/Users/eyalhazut/Documents/Claude/Projects/hk/mainScreen/docs/shots/co-fcast.png">    </p:cNvPr>
+          <p:cNvPr id="6" name="Image 0" descr="/Users/eyalhazut/Documents/Claude/Projects/hk/mainScreen/docs/shots/z-acct.png">    </p:cNvPr>
           <p:cNvPicPr>
             <a:picLocks noChangeAspect="1"/>
           </p:cNvPicPr>
@@ -8655,7 +8655,7 @@
                 <a:ea typeface="Arial" pitchFamily="34" charset="-122"/>
                 <a:cs typeface="Arial" pitchFamily="34" charset="-120"/>
               </a:rPr>
-              <a:t>תכנון תזרימי — יעד לכל קטגוריה, וחריגה שנראית לפני שהיא קורית</a:t>
+              <a:t>תכנון חשבונאי — 14,083 תנועות ← 631 כרטיסים; ה־AI ממפה מבנה, הכסף מחובר בקוד</a:t>
             </a:r>
             <a:endParaRPr lang="en-US" sz="1150" dirty="0"/>
           </a:p>
@@ -8697,7 +8697,7 @@
       </p:sp>
       <p:pic>
         <p:nvPicPr>
-          <p:cNvPr id="9" name="Image 1" descr="/Users/eyalhazut/Documents/Claude/Projects/hk/mainScreen/docs/shots/co-acct.png">    </p:cNvPr>
+          <p:cNvPr id="9" name="Image 1" descr="/Users/eyalhazut/Documents/Claude/Projects/hk/mainScreen/docs/shots/co-fcast.png">    </p:cNvPr>
           <p:cNvPicPr>
             <a:picLocks noChangeAspect="1"/>
           </p:cNvPicPr>
@@ -8727,6 +8727,105 @@
         <p:spPr>
           <a:xfrm>
             <a:off x="658368" y="6071616"/>
+            <a:ext cx="5300320" cy="548640"/>
+          </a:xfrm>
+          <a:prstGeom prst="rect">
+            <a:avLst/>
+          </a:prstGeom>
+          <a:noFill/>
+          <a:ln/>
+        </p:spPr>
+        <p:txBody>
+          <a:bodyPr wrap="square" lIns="0" tIns="0" rIns="0" bIns="0" rtlCol="0" anchor="ctr"/>
+          <a:lstStyle/>
+          <a:p>
+            <a:pPr rtl="1" algn="r" indent="0" marL="0">
+              <a:lnSpc>
+                <a:spcPct val="130000"/>
+              </a:lnSpc>
+              <a:buNone/>
+            </a:pPr>
+            <a:r>
+              <a:rPr lang="en-US" sz="1150" dirty="0">
+                <a:solidFill>
+                  <a:srgbClr val="51677A"/>
+                </a:solidFill>
+                <a:latin typeface="Arial" pitchFamily="34" charset="0"/>
+                <a:ea typeface="Arial" pitchFamily="34" charset="-122"/>
+                <a:cs typeface="Arial" pitchFamily="34" charset="-120"/>
+              </a:rPr>
+              <a:t>תכנון תזרימי — יעד לכל קטגוריה, וחריגה שנראית לפני שהיא קורית</a:t>
+            </a:r>
+            <a:endParaRPr lang="en-US" sz="1150" dirty="0"/>
+          </a:p>
+        </p:txBody>
+      </p:sp>
+      <p:sp>
+        <p:nvSpPr>
+          <p:cNvPr id="11" name="Shape 7"/>
+          <p:cNvSpPr/>
+          <p:nvPr/>
+        </p:nvSpPr>
+        <p:spPr>
+          <a:xfrm>
+            <a:off x="-4961992" y="2130552"/>
+            <a:ext cx="5391760" cy="3858768"/>
+          </a:xfrm>
+          <a:prstGeom prst="roundRect">
+            <a:avLst>
+              <a:gd name="adj" fmla="val 1659"/>
+            </a:avLst>
+          </a:prstGeom>
+          <a:solidFill>
+            <a:srgbClr val="FFFFFF"/>
+          </a:solidFill>
+          <a:ln w="12700">
+            <a:solidFill>
+              <a:srgbClr val="D5DEE8"/>
+            </a:solidFill>
+            <a:prstDash val="solid"/>
+          </a:ln>
+          <a:effectLst>
+            <a:outerShdw sx="100000" sy="100000" kx="0" ky="0" algn="bl" rotWithShape="0" blurRad="203200" dist="50800" dir="5400000">
+              <a:srgbClr val="0C4068">
+                <a:alpha val="22000"/>
+              </a:srgbClr>
+            </a:outerShdw>
+          </a:effectLst>
+        </p:spPr>
+      </p:sp>
+      <p:pic>
+        <p:nvPicPr>
+          <p:cNvPr id="12" name="Image 2" descr="/Users/eyalhazut/Documents/Claude/Projects/hk/mainScreen/docs/shots/co-acct.png">    </p:cNvPr>
+          <p:cNvPicPr>
+            <a:picLocks noChangeAspect="1"/>
+          </p:cNvPicPr>
+          <p:nvPr/>
+        </p:nvPicPr>
+        <p:blipFill>
+          <a:blip r:embed="rId3"/>
+          <a:srcRect l="0" r="0" t="0" b="0"/>
+          <a:stretch/>
+        </p:blipFill>
+        <p:spPr>
+          <a:xfrm>
+            <a:off x="-4916272" y="2176272"/>
+            <a:ext cx="5300320" cy="3767328"/>
+          </a:xfrm>
+          <a:prstGeom prst="rect">
+            <a:avLst/>
+          </a:prstGeom>
+        </p:spPr>
+      </p:pic>
+      <p:sp>
+        <p:nvSpPr>
+          <p:cNvPr id="13" name="Text 8"/>
+          <p:cNvSpPr txBox="1"/>
+          <p:nvPr/>
+        </p:nvSpPr>
+        <p:spPr>
+          <a:xfrm>
+            <a:off x="-4916272" y="6071616"/>
             <a:ext cx="5300320" cy="548640"/>
           </a:xfrm>
           <a:prstGeom prst="rect">
@@ -8948,7 +9047,7 @@
       </p:sp>
       <p:pic>
         <p:nvPicPr>
-          <p:cNvPr id="6" name="Image 0" descr="/Users/eyalhazut/Documents/Claude/Projects/hk/mainScreen/docs/shots/cli-dash.png">    </p:cNvPr>
+          <p:cNvPr id="6" name="Image 0" descr="/Users/eyalhazut/Documents/Claude/Projects/hk/mainScreen/docs/shots/z-brief.png">    </p:cNvPr>
           <p:cNvPicPr>
             <a:picLocks noChangeAspect="1"/>
           </p:cNvPicPr>
